--- a/Nivoda-Brand-Template.pptx
+++ b/Nivoda-Brand-Template.pptx
@@ -19,9 +19,14 @@
     <p:sldId id="267" r:id="rId13"/>
     <p:sldId id="268" r:id="rId14"/>
     <p:sldId id="269" r:id="rId15"/>
+    <p:sldId id="270" r:id="rId16"/>
+    <p:sldId id="271" r:id="rId17"/>
+    <p:sldId id="272" r:id="rId18"/>
+    <p:sldId id="273" r:id="rId19"/>
+    <p:sldId id="274" r:id="rId20"/>
   </p:sldIdLst>
   <p:notesMasterIdLst>
-    <p:notesMasterId r:id="rId16"/>
+    <p:notesMasterId r:id="rId21"/>
   </p:notesMasterIdLst>
   <p:sldSz cx="9144000" cy="5143500"/>
   <p:notesSz cx="5143500" cy="9144000"/>
@@ -118,6 +123,1816 @@
     </a:lvl9pPr>
   </p:defaultTextStyle>
 </p:presentation>
+</file>
+
+<file path=ppt/charts/chart1.xml><?xml version="1.0" encoding="utf-8"?>
+<c:chartSpace xmlns:c="http://schemas.openxmlformats.org/drawingml/2006/chart" xmlns:a="http://schemas.openxmlformats.org/drawingml/2006/main" xmlns:r="http://schemas.openxmlformats.org/officeDocument/2006/relationships">
+  <c:date1904 val="0"/>
+  <c:roundedCorners val="1"/>
+  <c:chart>
+    <c:autoTitleDeleted val="1"/>
+    <c:plotArea>
+      <c:layout/>
+      <c:barChart>
+        <c:barDir val="col"/>
+        <c:grouping val="stacked"/>
+        <c:varyColors val="0"/>
+        <c:ser>
+          <c:idx val="0"/>
+          <c:order val="0"/>
+          <c:tx>
+            <c:strRef>
+              <c:f>Sheet1!$B$1</c:f>
+              <c:strCache>
+                <c:ptCount val="1"/>
+                <c:pt idx="0">
+                  <c:v/>
+                </c:pt>
+              </c:strCache>
+            </c:strRef>
+          </c:tx>
+          <c:spPr>
+            <a:solidFill>
+              <a:srgbClr val="F5F0EC"/>
+            </a:solidFill>
+            <a:effectLst/>
+          </c:spPr>
+          <c:invertIfNegative val="0"/>
+          <c:dLbls>
+            <c:numFmt formatCode="#,##0" sourceLinked="0"/>
+            <c:txPr>
+              <a:bodyPr/>
+              <a:lstStyle/>
+              <a:p>
+                <a:pPr>
+                  <a:defRPr b="0" i="0" strike="noStrike" sz="950" u="none">
+                    <a:solidFill>
+                      <a:srgbClr val="FFFFFF"/>
+                    </a:solidFill>
+                    <a:latin typeface="JetBrains Mono"/>
+                  </a:defRPr>
+                </a:pPr>
+              </a:p>
+            </c:txPr>
+            <c:showLegendKey val="0"/>
+            <c:showVal val="1"/>
+            <c:showCatName val="0"/>
+            <c:showSerName val="0"/>
+            <c:showPercent val="0"/>
+            <c:showBubbleSize val="0"/>
+            <c:showLeaderLines val="0"/>
+          </c:dLbls>
+          <c:cat>
+            <c:multiLvlStrRef>
+              <c:f>Sheet1!$A$2:$A$9</c:f>
+              <c:multiLvlStrCache>
+                <c:ptCount val="8"/>
+                <c:lvl>
+                  <c:pt idx="0">
+                    <c:v>Category 1</c:v>
+                  </c:pt>
+                  <c:pt idx="1">
+                    <c:v>Category 2</c:v>
+                  </c:pt>
+                  <c:pt idx="2">
+                    <c:v>Category 3</c:v>
+                  </c:pt>
+                  <c:pt idx="3">
+                    <c:v>Category 4</c:v>
+                  </c:pt>
+                  <c:pt idx="4">
+                    <c:v>Category 5</c:v>
+                  </c:pt>
+                  <c:pt idx="5">
+                    <c:v>Category 6</c:v>
+                  </c:pt>
+                  <c:pt idx="6">
+                    <c:v>Category 7</c:v>
+                  </c:pt>
+                  <c:pt idx="7">
+                    <c:v>Category 8</c:v>
+                  </c:pt>
+                </c:lvl>
+              </c:multiLvlStrCache>
+            </c:multiLvlStrRef>
+          </c:cat>
+          <c:val>
+            <c:numRef>
+              <c:f>Sheet1!$B$2:$B$9</c:f>
+              <c:numCache>
+                <c:formatCode>General</c:formatCode>
+                <c:ptCount val="8"/>
+                <c:pt idx="0">
+                  <c:v>0</c:v>
+                </c:pt>
+                <c:pt idx="1">
+                  <c:v>100</c:v>
+                </c:pt>
+                <c:pt idx="2">
+                  <c:v>120</c:v>
+                </c:pt>
+                <c:pt idx="3">
+                  <c:v>130</c:v>
+                </c:pt>
+                <c:pt idx="4">
+                  <c:v>0</c:v>
+                </c:pt>
+                <c:pt idx="5">
+                  <c:v>70</c:v>
+                </c:pt>
+                <c:pt idx="6">
+                  <c:v>70</c:v>
+                </c:pt>
+                <c:pt idx="7">
+                  <c:v>0</c:v>
+                </c:pt>
+              </c:numCache>
+            </c:numRef>
+          </c:val>
+        </c:ser>
+        <c:ser>
+          <c:idx val="1"/>
+          <c:order val="1"/>
+          <c:tx>
+            <c:strRef>
+              <c:f>Sheet1!$C$1</c:f>
+              <c:strCache>
+                <c:ptCount val="1"/>
+                <c:pt idx="0">
+                  <c:v>Increase</c:v>
+                </c:pt>
+              </c:strCache>
+            </c:strRef>
+          </c:tx>
+          <c:spPr>
+            <a:solidFill>
+              <a:srgbClr val="6330F5"/>
+            </a:solidFill>
+            <a:effectLst/>
+          </c:spPr>
+          <c:invertIfNegative val="0"/>
+          <c:dLbls>
+            <c:numFmt formatCode="#,##0" sourceLinked="0"/>
+            <c:txPr>
+              <a:bodyPr/>
+              <a:lstStyle/>
+              <a:p>
+                <a:pPr>
+                  <a:defRPr b="0" i="0" strike="noStrike" sz="950" u="none">
+                    <a:solidFill>
+                      <a:srgbClr val="FFFFFF"/>
+                    </a:solidFill>
+                    <a:latin typeface="JetBrains Mono"/>
+                  </a:defRPr>
+                </a:pPr>
+              </a:p>
+            </c:txPr>
+            <c:showLegendKey val="0"/>
+            <c:showVal val="1"/>
+            <c:showCatName val="0"/>
+            <c:showSerName val="0"/>
+            <c:showPercent val="0"/>
+            <c:showBubbleSize val="0"/>
+            <c:showLeaderLines val="0"/>
+          </c:dLbls>
+          <c:cat>
+            <c:multiLvlStrRef>
+              <c:f>Sheet1!$A$2:$A$9</c:f>
+              <c:multiLvlStrCache>
+                <c:ptCount val="8"/>
+                <c:lvl>
+                  <c:pt idx="0">
+                    <c:v>Category 1</c:v>
+                  </c:pt>
+                  <c:pt idx="1">
+                    <c:v>Category 2</c:v>
+                  </c:pt>
+                  <c:pt idx="2">
+                    <c:v>Category 3</c:v>
+                  </c:pt>
+                  <c:pt idx="3">
+                    <c:v>Category 4</c:v>
+                  </c:pt>
+                  <c:pt idx="4">
+                    <c:v>Category 5</c:v>
+                  </c:pt>
+                  <c:pt idx="5">
+                    <c:v>Category 6</c:v>
+                  </c:pt>
+                  <c:pt idx="6">
+                    <c:v>Category 7</c:v>
+                  </c:pt>
+                  <c:pt idx="7">
+                    <c:v>Category 8</c:v>
+                  </c:pt>
+                </c:lvl>
+              </c:multiLvlStrCache>
+            </c:multiLvlStrRef>
+          </c:cat>
+          <c:val>
+            <c:numRef>
+              <c:f>Sheet1!$C$2:$C$9</c:f>
+              <c:numCache>
+                <c:formatCode>General</c:formatCode>
+                <c:ptCount val="8"/>
+                <c:pt idx="0">
+                  <c:v>100</c:v>
+                </c:pt>
+                <c:pt idx="1">
+                  <c:v>20</c:v>
+                </c:pt>
+                <c:pt idx="2">
+                  <c:v>50</c:v>
+                </c:pt>
+                <c:pt idx="3">
+                  <c:v>0</c:v>
+                </c:pt>
+                <c:pt idx="4">
+                  <c:v>0</c:v>
+                </c:pt>
+                <c:pt idx="5">
+                  <c:v>0</c:v>
+                </c:pt>
+                <c:pt idx="6">
+                  <c:v>70</c:v>
+                </c:pt>
+                <c:pt idx="7">
+                  <c:v>0</c:v>
+                </c:pt>
+              </c:numCache>
+            </c:numRef>
+          </c:val>
+        </c:ser>
+        <c:ser>
+          <c:idx val="2"/>
+          <c:order val="2"/>
+          <c:tx>
+            <c:strRef>
+              <c:f>Sheet1!$D$1</c:f>
+              <c:strCache>
+                <c:ptCount val="1"/>
+                <c:pt idx="0">
+                  <c:v>Decrease</c:v>
+                </c:pt>
+              </c:strCache>
+            </c:strRef>
+          </c:tx>
+          <c:spPr>
+            <a:solidFill>
+              <a:srgbClr val="9886FF"/>
+            </a:solidFill>
+            <a:effectLst/>
+          </c:spPr>
+          <c:invertIfNegative val="0"/>
+          <c:dLbls>
+            <c:numFmt formatCode="#,##0" sourceLinked="0"/>
+            <c:txPr>
+              <a:bodyPr/>
+              <a:lstStyle/>
+              <a:p>
+                <a:pPr>
+                  <a:defRPr b="0" i="0" strike="noStrike" sz="950" u="none">
+                    <a:solidFill>
+                      <a:srgbClr val="FFFFFF"/>
+                    </a:solidFill>
+                    <a:latin typeface="JetBrains Mono"/>
+                  </a:defRPr>
+                </a:pPr>
+              </a:p>
+            </c:txPr>
+            <c:showLegendKey val="0"/>
+            <c:showVal val="1"/>
+            <c:showCatName val="0"/>
+            <c:showSerName val="0"/>
+            <c:showPercent val="0"/>
+            <c:showBubbleSize val="0"/>
+            <c:showLeaderLines val="0"/>
+          </c:dLbls>
+          <c:cat>
+            <c:multiLvlStrRef>
+              <c:f>Sheet1!$A$2:$A$9</c:f>
+              <c:multiLvlStrCache>
+                <c:ptCount val="8"/>
+                <c:lvl>
+                  <c:pt idx="0">
+                    <c:v>Category 1</c:v>
+                  </c:pt>
+                  <c:pt idx="1">
+                    <c:v>Category 2</c:v>
+                  </c:pt>
+                  <c:pt idx="2">
+                    <c:v>Category 3</c:v>
+                  </c:pt>
+                  <c:pt idx="3">
+                    <c:v>Category 4</c:v>
+                  </c:pt>
+                  <c:pt idx="4">
+                    <c:v>Category 5</c:v>
+                  </c:pt>
+                  <c:pt idx="5">
+                    <c:v>Category 6</c:v>
+                  </c:pt>
+                  <c:pt idx="6">
+                    <c:v>Category 7</c:v>
+                  </c:pt>
+                  <c:pt idx="7">
+                    <c:v>Category 8</c:v>
+                  </c:pt>
+                </c:lvl>
+              </c:multiLvlStrCache>
+            </c:multiLvlStrRef>
+          </c:cat>
+          <c:val>
+            <c:numRef>
+              <c:f>Sheet1!$D$2:$D$9</c:f>
+              <c:numCache>
+                <c:formatCode>General</c:formatCode>
+                <c:ptCount val="8"/>
+                <c:pt idx="0">
+                  <c:v>0</c:v>
+                </c:pt>
+                <c:pt idx="1">
+                  <c:v>0</c:v>
+                </c:pt>
+                <c:pt idx="2">
+                  <c:v>0</c:v>
+                </c:pt>
+                <c:pt idx="3">
+                  <c:v>40</c:v>
+                </c:pt>
+                <c:pt idx="4">
+                  <c:v>0</c:v>
+                </c:pt>
+                <c:pt idx="5">
+                  <c:v>60</c:v>
+                </c:pt>
+                <c:pt idx="6">
+                  <c:v>0</c:v>
+                </c:pt>
+                <c:pt idx="7">
+                  <c:v>0</c:v>
+                </c:pt>
+              </c:numCache>
+            </c:numRef>
+          </c:val>
+        </c:ser>
+        <c:ser>
+          <c:idx val="3"/>
+          <c:order val="3"/>
+          <c:tx>
+            <c:strRef>
+              <c:f>Sheet1!$E$1</c:f>
+              <c:strCache>
+                <c:ptCount val="1"/>
+                <c:pt idx="0">
+                  <c:v>Total</c:v>
+                </c:pt>
+              </c:strCache>
+            </c:strRef>
+          </c:tx>
+          <c:spPr>
+            <a:solidFill>
+              <a:srgbClr val="7655FD"/>
+            </a:solidFill>
+            <a:effectLst/>
+          </c:spPr>
+          <c:invertIfNegative val="0"/>
+          <c:dLbls>
+            <c:numFmt formatCode="#,##0" sourceLinked="0"/>
+            <c:txPr>
+              <a:bodyPr/>
+              <a:lstStyle/>
+              <a:p>
+                <a:pPr>
+                  <a:defRPr b="0" i="0" strike="noStrike" sz="950" u="none">
+                    <a:solidFill>
+                      <a:srgbClr val="FFFFFF"/>
+                    </a:solidFill>
+                    <a:latin typeface="JetBrains Mono"/>
+                  </a:defRPr>
+                </a:pPr>
+              </a:p>
+            </c:txPr>
+            <c:showLegendKey val="0"/>
+            <c:showVal val="1"/>
+            <c:showCatName val="0"/>
+            <c:showSerName val="0"/>
+            <c:showPercent val="0"/>
+            <c:showBubbleSize val="0"/>
+            <c:showLeaderLines val="0"/>
+          </c:dLbls>
+          <c:cat>
+            <c:multiLvlStrRef>
+              <c:f>Sheet1!$A$2:$A$9</c:f>
+              <c:multiLvlStrCache>
+                <c:ptCount val="8"/>
+                <c:lvl>
+                  <c:pt idx="0">
+                    <c:v>Category 1</c:v>
+                  </c:pt>
+                  <c:pt idx="1">
+                    <c:v>Category 2</c:v>
+                  </c:pt>
+                  <c:pt idx="2">
+                    <c:v>Category 3</c:v>
+                  </c:pt>
+                  <c:pt idx="3">
+                    <c:v>Category 4</c:v>
+                  </c:pt>
+                  <c:pt idx="4">
+                    <c:v>Category 5</c:v>
+                  </c:pt>
+                  <c:pt idx="5">
+                    <c:v>Category 6</c:v>
+                  </c:pt>
+                  <c:pt idx="6">
+                    <c:v>Category 7</c:v>
+                  </c:pt>
+                  <c:pt idx="7">
+                    <c:v>Category 8</c:v>
+                  </c:pt>
+                </c:lvl>
+              </c:multiLvlStrCache>
+            </c:multiLvlStrRef>
+          </c:cat>
+          <c:val>
+            <c:numRef>
+              <c:f>Sheet1!$E$2:$E$9</c:f>
+              <c:numCache>
+                <c:formatCode>General</c:formatCode>
+                <c:ptCount val="8"/>
+                <c:pt idx="0">
+                  <c:v>0</c:v>
+                </c:pt>
+                <c:pt idx="1">
+                  <c:v>0</c:v>
+                </c:pt>
+                <c:pt idx="2">
+                  <c:v>0</c:v>
+                </c:pt>
+                <c:pt idx="3">
+                  <c:v>0</c:v>
+                </c:pt>
+                <c:pt idx="4">
+                  <c:v>130</c:v>
+                </c:pt>
+                <c:pt idx="5">
+                  <c:v>0</c:v>
+                </c:pt>
+                <c:pt idx="6">
+                  <c:v>0</c:v>
+                </c:pt>
+                <c:pt idx="7">
+                  <c:v>140</c:v>
+                </c:pt>
+              </c:numCache>
+            </c:numRef>
+          </c:val>
+        </c:ser>
+        <c:dLbls>
+          <c:numFmt formatCode="#,##0" sourceLinked="0"/>
+          <c:txPr>
+            <a:bodyPr/>
+            <a:lstStyle/>
+            <a:p>
+              <a:pPr>
+                <a:defRPr b="0" i="0" strike="noStrike" sz="950" u="none">
+                  <a:solidFill>
+                    <a:srgbClr val="FFFFFF"/>
+                  </a:solidFill>
+                  <a:latin typeface="JetBrains Mono"/>
+                </a:defRPr>
+              </a:pPr>
+            </a:p>
+          </c:txPr>
+          <c:showLegendKey val="0"/>
+          <c:showVal val="1"/>
+          <c:showCatName val="0"/>
+          <c:showSerName val="0"/>
+          <c:showPercent val="0"/>
+          <c:showBubbleSize val="0"/>
+          <c:showLeaderLines val="0"/>
+        </c:dLbls>
+        <c:gapWidth val="80"/>
+        <c:overlap val="100"/>
+        <c:axId val="2094734554"/>
+        <c:axId val="2094734552"/>
+        <c:axId val="2094734556"/>
+      </c:barChart>
+      <c:catAx>
+        <c:axId val="2094734554"/>
+        <c:scaling>
+          <c:orientation val="minMax"/>
+        </c:scaling>
+        <c:delete val="0"/>
+        <c:axPos val="b"/>
+        <c:numFmt formatCode="General" sourceLinked="1"/>
+        <c:majorTickMark val="out"/>
+        <c:minorTickMark val="none"/>
+        <c:tickLblPos val="low"/>
+        <c:spPr>
+          <a:ln w="12700" cap="flat">
+            <a:noFill/>
+            <a:prstDash val="solid"/>
+            <a:round/>
+          </a:ln>
+        </c:spPr>
+        <c:txPr>
+          <a:bodyPr/>
+          <a:lstStyle/>
+          <a:p>
+            <a:pPr>
+              <a:defRPr sz="850" b="0" i="0" u="none" strike="noStrike">
+                <a:solidFill>
+                  <a:srgbClr val="78716C"/>
+                </a:solidFill>
+                <a:latin typeface="Inter"/>
+              </a:defRPr>
+            </a:pPr>
+            <a:endParaRPr lang="en-US"/>
+          </a:p>
+        </c:txPr>
+        <c:crossAx val="2094734552"/>
+        <c:crosses val="autoZero"/>
+        <c:auto val="1"/>
+        <c:lblAlgn val="ctr"/>
+        <c:noMultiLvlLbl val="1"/>
+      </c:catAx>
+      <c:valAx>
+        <c:axId val="2094734552"/>
+        <c:scaling>
+          <c:orientation val="minMax"/>
+        </c:scaling>
+        <c:delete val="1"/>
+        <c:axPos val="l"/>
+        <c:majorGridlines>
+          <c:spPr>
+            <a:ln w="12700" cap="flat">
+              <a:solidFill>
+                <a:srgbClr val="888888"/>
+              </a:solidFill>
+              <a:prstDash val="solid"/>
+              <a:round/>
+            </a:ln>
+          </c:spPr>
+        </c:majorGridlines>
+        <c:numFmt formatCode="General" sourceLinked="0"/>
+        <c:majorTickMark val="out"/>
+        <c:minorTickMark val="none"/>
+        <c:tickLblPos val="nextTo"/>
+        <c:spPr>
+          <a:ln w="12700" cap="flat">
+            <a:noFill/>
+            <a:prstDash val="solid"/>
+            <a:round/>
+          </a:ln>
+        </c:spPr>
+        <c:txPr>
+          <a:bodyPr/>
+          <a:lstStyle/>
+          <a:p>
+            <a:pPr>
+              <a:defRPr sz="1200" b="0" i="0" u="none" strike="noStrike">
+                <a:solidFill>
+                  <a:srgbClr val="000000"/>
+                </a:solidFill>
+                <a:latin typeface="Arial"/>
+              </a:defRPr>
+            </a:pPr>
+            <a:endParaRPr lang="en-US"/>
+          </a:p>
+        </c:txPr>
+        <c:crossAx val="2094734554"/>
+        <c:crosses val="autoZero"/>
+        <c:crossBetween val="between"/>
+      </c:valAx>
+      <c:spPr>
+        <a:noFill/>
+        <a:ln w="12700" cap="flat">
+          <a:solidFill>
+            <a:srgbClr val="F5F0EC"/>
+          </a:solidFill>
+        </a:ln>
+        <a:effectLst/>
+      </c:spPr>
+    </c:plotArea>
+    <c:legend>
+      <c:legendPos val="t"/>
+      <c:overlay val="0"/>
+      <c:txPr>
+        <a:bodyPr/>
+        <a:lstStyle/>
+        <a:p>
+          <a:pPr>
+            <a:defRPr sz="850">
+              <a:solidFill>
+                <a:srgbClr val="78716C"/>
+              </a:solidFill>
+              <a:latin typeface="Inter"/>
+              <a:cs typeface="Inter"/>
+            </a:defRPr>
+          </a:pPr>
+          <a:endParaRPr lang="en-US"/>
+        </a:p>
+      </c:txPr>
+    </c:legend>
+    <c:plotVisOnly val="1"/>
+    <c:dispBlanksAs val="span"/>
+  </c:chart>
+  <c:spPr>
+    <a:noFill/>
+    <a:ln>
+      <a:noFill/>
+    </a:ln>
+    <a:effectLst/>
+  </c:spPr>
+  <c:externalData r:id="rId1">
+    <c:autoUpdate val="0"/>
+  </c:externalData>
+</c:chartSpace>
+</file>
+
+<file path=ppt/charts/chart2.xml><?xml version="1.0" encoding="utf-8"?>
+<c:chartSpace xmlns:c="http://schemas.openxmlformats.org/drawingml/2006/chart" xmlns:a="http://schemas.openxmlformats.org/drawingml/2006/main" xmlns:r="http://schemas.openxmlformats.org/officeDocument/2006/relationships">
+  <c:date1904 val="0"/>
+  <c:roundedCorners val="1"/>
+  <c:chart>
+    <c:autoTitleDeleted val="1"/>
+    <c:plotArea>
+      <c:layout/>
+      <c:doughnutChart>
+        <c:varyColors val="1"/>
+        <c:ser>
+          <c:idx val="0"/>
+          <c:order val="0"/>
+          <c:tx>
+            <c:strRef>
+              <c:f>Sheet1!$B$1</c:f>
+              <c:strCache>
+                <c:ptCount val="1"/>
+                <c:pt idx="0">
+                  <c:v>Share</c:v>
+                </c:pt>
+              </c:strCache>
+            </c:strRef>
+          </c:tx>
+          <c:spPr>
+            <a:solidFill>
+              <a:schemeClr val="accent1"/>
+            </a:solidFill>
+            <a:ln w="9525" cap="flat">
+              <a:solidFill>
+                <a:srgbClr val="F9F9F9"/>
+              </a:solidFill>
+              <a:prstDash val="solid"/>
+              <a:round/>
+            </a:ln>
+            <a:effectLst/>
+          </c:spPr>
+          <c:dPt>
+            <c:idx val="0"/>
+            <c:bubble3D val="0"/>
+            <c:spPr>
+              <a:solidFill>
+                <a:srgbClr val="6330F5"/>
+              </a:solidFill>
+              <a:effectLst/>
+            </c:spPr>
+          </c:dPt>
+          <c:dPt>
+            <c:idx val="1"/>
+            <c:bubble3D val="0"/>
+            <c:spPr>
+              <a:solidFill>
+                <a:srgbClr val="7655FD"/>
+              </a:solidFill>
+              <a:effectLst/>
+            </c:spPr>
+          </c:dPt>
+          <c:dPt>
+            <c:idx val="2"/>
+            <c:bubble3D val="0"/>
+            <c:spPr>
+              <a:solidFill>
+                <a:srgbClr val="9886FF"/>
+              </a:solidFill>
+              <a:effectLst/>
+            </c:spPr>
+          </c:dPt>
+          <c:dPt>
+            <c:idx val="3"/>
+            <c:bubble3D val="0"/>
+            <c:spPr>
+              <a:solidFill>
+                <a:srgbClr val="B5ADFA"/>
+              </a:solidFill>
+              <a:effectLst/>
+            </c:spPr>
+          </c:dPt>
+          <c:dLbls>
+            <c:dLbl>
+              <c:idx val="0"/>
+              <c:numFmt formatCode="General" sourceLinked="0"/>
+              <c:spPr/>
+              <c:txPr>
+                <a:bodyPr/>
+                <a:lstStyle/>
+                <a:p>
+                  <a:pPr>
+                    <a:defRPr sz="1000" b="0" i="0" u="none" strike="noStrike">
+                      <a:solidFill>
+                        <a:srgbClr val="FFFFFF"/>
+                      </a:solidFill>
+                      <a:latin typeface="JetBrains Mono"/>
+                    </a:defRPr>
+                  </a:pPr>
+                </a:p>
+              </c:txPr>
+              <c:showLegendKey val="0"/>
+              <c:showVal val="1"/>
+              <c:showCatName val="0"/>
+              <c:showSerName val="0"/>
+              <c:showPercent val="0"/>
+              <c:showBubbleSize val="0"/>
+            </c:dLbl>
+            <c:dLbl>
+              <c:idx val="1"/>
+              <c:numFmt formatCode="General" sourceLinked="0"/>
+              <c:spPr/>
+              <c:txPr>
+                <a:bodyPr/>
+                <a:lstStyle/>
+                <a:p>
+                  <a:pPr>
+                    <a:defRPr sz="1000" b="0" i="0" u="none" strike="noStrike">
+                      <a:solidFill>
+                        <a:srgbClr val="FFFFFF"/>
+                      </a:solidFill>
+                      <a:latin typeface="JetBrains Mono"/>
+                    </a:defRPr>
+                  </a:pPr>
+                </a:p>
+              </c:txPr>
+              <c:showLegendKey val="0"/>
+              <c:showVal val="1"/>
+              <c:showCatName val="0"/>
+              <c:showSerName val="0"/>
+              <c:showPercent val="0"/>
+              <c:showBubbleSize val="0"/>
+            </c:dLbl>
+            <c:dLbl>
+              <c:idx val="2"/>
+              <c:numFmt formatCode="General" sourceLinked="0"/>
+              <c:spPr/>
+              <c:txPr>
+                <a:bodyPr/>
+                <a:lstStyle/>
+                <a:p>
+                  <a:pPr>
+                    <a:defRPr sz="1000" b="0" i="0" u="none" strike="noStrike">
+                      <a:solidFill>
+                        <a:srgbClr val="FFFFFF"/>
+                      </a:solidFill>
+                      <a:latin typeface="JetBrains Mono"/>
+                    </a:defRPr>
+                  </a:pPr>
+                </a:p>
+              </c:txPr>
+              <c:showLegendKey val="0"/>
+              <c:showVal val="1"/>
+              <c:showCatName val="0"/>
+              <c:showSerName val="0"/>
+              <c:showPercent val="0"/>
+              <c:showBubbleSize val="0"/>
+            </c:dLbl>
+            <c:dLbl>
+              <c:idx val="3"/>
+              <c:numFmt formatCode="General" sourceLinked="0"/>
+              <c:spPr/>
+              <c:txPr>
+                <a:bodyPr/>
+                <a:lstStyle/>
+                <a:p>
+                  <a:pPr>
+                    <a:defRPr sz="1000" b="0" i="0" u="none" strike="noStrike">
+                      <a:solidFill>
+                        <a:srgbClr val="FFFFFF"/>
+                      </a:solidFill>
+                      <a:latin typeface="JetBrains Mono"/>
+                    </a:defRPr>
+                  </a:pPr>
+                </a:p>
+              </c:txPr>
+              <c:showLegendKey val="0"/>
+              <c:showVal val="1"/>
+              <c:showCatName val="0"/>
+              <c:showSerName val="0"/>
+              <c:showPercent val="0"/>
+              <c:showBubbleSize val="0"/>
+            </c:dLbl>
+            <c:numFmt formatCode="General" sourceLinked="0"/>
+            <c:txPr>
+              <a:bodyPr/>
+              <a:lstStyle/>
+              <a:p>
+                <a:pPr>
+                  <a:defRPr sz="1800" b="0" i="0" u="none" strike="noStrike">
+                    <a:solidFill>
+                      <a:srgbClr val="000000"/>
+                    </a:solidFill>
+                    <a:latin typeface="Arial"/>
+                  </a:defRPr>
+                </a:pPr>
+              </a:p>
+            </c:txPr>
+            <c:showLegendKey val="0"/>
+            <c:showVal val="0"/>
+            <c:showCatName val="1"/>
+            <c:showSerName val="0"/>
+            <c:showPercent val="1"/>
+            <c:showBubbleSize val="0"/>
+            <c:showLeaderLines val="0"/>
+          </c:dLbls>
+          <c:cat>
+            <c:strRef>
+              <c:f>Sheet1!$A$2:$A$5</c:f>
+              <c:strCache>
+                <c:ptCount val="4"/>
+                <c:pt idx="0">
+                  <c:v>Segment A</c:v>
+                </c:pt>
+                <c:pt idx="1">
+                  <c:v>Segment B</c:v>
+                </c:pt>
+                <c:pt idx="2">
+                  <c:v>Segment C</c:v>
+                </c:pt>
+                <c:pt idx="3">
+                  <c:v>Segment D</c:v>
+                </c:pt>
+              </c:strCache>
+            </c:strRef>
+          </c:cat>
+          <c:val>
+            <c:numRef>
+              <c:f>Sheet1!$B$2:$B$5</c:f>
+              <c:numCache>
+                <c:ptCount val="4"/>
+                <c:pt idx="0">
+                  <c:v>8.2</c:v>
+                </c:pt>
+                <c:pt idx="1">
+                  <c:v>3.2</c:v>
+                </c:pt>
+                <c:pt idx="2">
+                  <c:v>1.4</c:v>
+                </c:pt>
+                <c:pt idx="3">
+                  <c:v>1.2</c:v>
+                </c:pt>
+              </c:numCache>
+            </c:numRef>
+          </c:val>
+        </c:ser>
+        <c:firstSliceAng val="0"/>
+        <c:holeSize val="52"/>
+      </c:doughnutChart>
+      <c:spPr>
+        <a:noFill/>
+        <a:ln w="12700" cap="flat">
+          <a:solidFill>
+            <a:srgbClr val="F5F0EC"/>
+          </a:solidFill>
+        </a:ln>
+        <a:effectLst/>
+      </c:spPr>
+    </c:plotArea>
+    <c:legend>
+      <c:legendPos val="b"/>
+      <c:overlay val="0"/>
+      <c:txPr>
+        <a:bodyPr/>
+        <a:lstStyle/>
+        <a:p>
+          <a:pPr>
+            <a:defRPr sz="900">
+              <a:solidFill>
+                <a:srgbClr val="78716C"/>
+              </a:solidFill>
+              <a:latin typeface="Inter"/>
+              <a:cs typeface="Inter"/>
+            </a:defRPr>
+          </a:pPr>
+          <a:endParaRPr lang="en-US"/>
+        </a:p>
+      </c:txPr>
+    </c:legend>
+    <c:plotVisOnly val="1"/>
+    <c:dispBlanksAs val="span"/>
+  </c:chart>
+  <c:spPr>
+    <a:noFill/>
+    <a:ln>
+      <a:noFill/>
+    </a:ln>
+    <a:effectLst/>
+  </c:spPr>
+  <c:externalData r:id="rId1">
+    <c:autoUpdate val="0"/>
+  </c:externalData>
+</c:chartSpace>
+</file>
+
+<file path=ppt/charts/chart3.xml><?xml version="1.0" encoding="utf-8"?>
+<c:chartSpace xmlns:c="http://schemas.openxmlformats.org/drawingml/2006/chart" xmlns:a="http://schemas.openxmlformats.org/drawingml/2006/main" xmlns:r="http://schemas.openxmlformats.org/officeDocument/2006/relationships">
+  <c:date1904 val="0"/>
+  <c:roundedCorners val="1"/>
+  <c:chart>
+    <c:autoTitleDeleted val="1"/>
+    <c:plotArea>
+      <c:layout/>
+      <c:barChart>
+        <c:barDir val="bar"/>
+        <c:grouping val="clustered"/>
+        <c:varyColors val="0"/>
+        <c:ser>
+          <c:idx val="0"/>
+          <c:order val="0"/>
+          <c:tx>
+            <c:strRef>
+              <c:f>Sheet1!$B$1</c:f>
+              <c:strCache>
+                <c:ptCount val="1"/>
+                <c:pt idx="0">
+                  <c:v>Series 1</c:v>
+                </c:pt>
+              </c:strCache>
+            </c:strRef>
+          </c:tx>
+          <c:spPr>
+            <a:solidFill>
+              <a:srgbClr val="6330F5"/>
+            </a:solidFill>
+            <a:effectLst/>
+          </c:spPr>
+          <c:invertIfNegative val="0"/>
+          <c:dLbls>
+            <c:numFmt formatCode="#,##0" sourceLinked="0"/>
+            <c:txPr>
+              <a:bodyPr/>
+              <a:lstStyle/>
+              <a:p>
+                <a:pPr>
+                  <a:defRPr b="0" i="0" strike="noStrike" sz="850" u="none">
+                    <a:solidFill>
+                      <a:srgbClr val="FFFFFF"/>
+                    </a:solidFill>
+                    <a:latin typeface="JetBrains Mono"/>
+                  </a:defRPr>
+                </a:pPr>
+              </a:p>
+            </c:txPr>
+            <c:dLblPos val="inEnd"/>
+            <c:showLegendKey val="0"/>
+            <c:showVal val="1"/>
+            <c:showCatName val="0"/>
+            <c:showSerName val="0"/>
+            <c:showPercent val="0"/>
+            <c:showBubbleSize val="0"/>
+            <c:showLeaderLines val="0"/>
+          </c:dLbls>
+          <c:cat>
+            <c:multiLvlStrRef>
+              <c:f>Sheet1!$A$2:$A$5</c:f>
+              <c:multiLvlStrCache>
+                <c:ptCount val="4"/>
+                <c:lvl>
+                  <c:pt idx="0">
+                    <c:v>Category 4</c:v>
+                  </c:pt>
+                  <c:pt idx="1">
+                    <c:v>Category 3</c:v>
+                  </c:pt>
+                  <c:pt idx="2">
+                    <c:v>Category 2</c:v>
+                  </c:pt>
+                  <c:pt idx="3">
+                    <c:v>Category 1</c:v>
+                  </c:pt>
+                </c:lvl>
+              </c:multiLvlStrCache>
+            </c:multiLvlStrRef>
+          </c:cat>
+          <c:val>
+            <c:numRef>
+              <c:f>Sheet1!$B$2:$B$5</c:f>
+              <c:numCache>
+                <c:formatCode>General</c:formatCode>
+                <c:ptCount val="4"/>
+                <c:pt idx="0">
+                  <c:v>4.5</c:v>
+                </c:pt>
+                <c:pt idx="1">
+                  <c:v>3.5</c:v>
+                </c:pt>
+                <c:pt idx="2">
+                  <c:v>2.5</c:v>
+                </c:pt>
+                <c:pt idx="3">
+                  <c:v>4.3</c:v>
+                </c:pt>
+              </c:numCache>
+            </c:numRef>
+          </c:val>
+        </c:ser>
+        <c:ser>
+          <c:idx val="1"/>
+          <c:order val="1"/>
+          <c:tx>
+            <c:strRef>
+              <c:f>Sheet1!$C$1</c:f>
+              <c:strCache>
+                <c:ptCount val="1"/>
+                <c:pt idx="0">
+                  <c:v>Series 2</c:v>
+                </c:pt>
+              </c:strCache>
+            </c:strRef>
+          </c:tx>
+          <c:spPr>
+            <a:solidFill>
+              <a:srgbClr val="7655FD"/>
+            </a:solidFill>
+            <a:effectLst/>
+          </c:spPr>
+          <c:invertIfNegative val="0"/>
+          <c:dLbls>
+            <c:numFmt formatCode="#,##0" sourceLinked="0"/>
+            <c:txPr>
+              <a:bodyPr/>
+              <a:lstStyle/>
+              <a:p>
+                <a:pPr>
+                  <a:defRPr b="0" i="0" strike="noStrike" sz="850" u="none">
+                    <a:solidFill>
+                      <a:srgbClr val="FFFFFF"/>
+                    </a:solidFill>
+                    <a:latin typeface="JetBrains Mono"/>
+                  </a:defRPr>
+                </a:pPr>
+              </a:p>
+            </c:txPr>
+            <c:dLblPos val="inEnd"/>
+            <c:showLegendKey val="0"/>
+            <c:showVal val="1"/>
+            <c:showCatName val="0"/>
+            <c:showSerName val="0"/>
+            <c:showPercent val="0"/>
+            <c:showBubbleSize val="0"/>
+            <c:showLeaderLines val="0"/>
+          </c:dLbls>
+          <c:cat>
+            <c:multiLvlStrRef>
+              <c:f>Sheet1!$A$2:$A$5</c:f>
+              <c:multiLvlStrCache>
+                <c:ptCount val="4"/>
+                <c:lvl>
+                  <c:pt idx="0">
+                    <c:v>Category 4</c:v>
+                  </c:pt>
+                  <c:pt idx="1">
+                    <c:v>Category 3</c:v>
+                  </c:pt>
+                  <c:pt idx="2">
+                    <c:v>Category 2</c:v>
+                  </c:pt>
+                  <c:pt idx="3">
+                    <c:v>Category 1</c:v>
+                  </c:pt>
+                </c:lvl>
+              </c:multiLvlStrCache>
+            </c:multiLvlStrRef>
+          </c:cat>
+          <c:val>
+            <c:numRef>
+              <c:f>Sheet1!$C$2:$C$5</c:f>
+              <c:numCache>
+                <c:formatCode>General</c:formatCode>
+                <c:ptCount val="4"/>
+                <c:pt idx="0">
+                  <c:v>2.8</c:v>
+                </c:pt>
+                <c:pt idx="1">
+                  <c:v>1.8</c:v>
+                </c:pt>
+                <c:pt idx="2">
+                  <c:v>4.4</c:v>
+                </c:pt>
+                <c:pt idx="3">
+                  <c:v>2.4</c:v>
+                </c:pt>
+              </c:numCache>
+            </c:numRef>
+          </c:val>
+        </c:ser>
+        <c:ser>
+          <c:idx val="2"/>
+          <c:order val="2"/>
+          <c:tx>
+            <c:strRef>
+              <c:f>Sheet1!$D$1</c:f>
+              <c:strCache>
+                <c:ptCount val="1"/>
+                <c:pt idx="0">
+                  <c:v>Series 3</c:v>
+                </c:pt>
+              </c:strCache>
+            </c:strRef>
+          </c:tx>
+          <c:spPr>
+            <a:solidFill>
+              <a:srgbClr val="9886FF"/>
+            </a:solidFill>
+            <a:effectLst/>
+          </c:spPr>
+          <c:invertIfNegative val="0"/>
+          <c:dLbls>
+            <c:numFmt formatCode="#,##0" sourceLinked="0"/>
+            <c:txPr>
+              <a:bodyPr/>
+              <a:lstStyle/>
+              <a:p>
+                <a:pPr>
+                  <a:defRPr b="0" i="0" strike="noStrike" sz="850" u="none">
+                    <a:solidFill>
+                      <a:srgbClr val="FFFFFF"/>
+                    </a:solidFill>
+                    <a:latin typeface="JetBrains Mono"/>
+                  </a:defRPr>
+                </a:pPr>
+              </a:p>
+            </c:txPr>
+            <c:dLblPos val="inEnd"/>
+            <c:showLegendKey val="0"/>
+            <c:showVal val="1"/>
+            <c:showCatName val="0"/>
+            <c:showSerName val="0"/>
+            <c:showPercent val="0"/>
+            <c:showBubbleSize val="0"/>
+            <c:showLeaderLines val="0"/>
+          </c:dLbls>
+          <c:cat>
+            <c:multiLvlStrRef>
+              <c:f>Sheet1!$A$2:$A$5</c:f>
+              <c:multiLvlStrCache>
+                <c:ptCount val="4"/>
+                <c:lvl>
+                  <c:pt idx="0">
+                    <c:v>Category 4</c:v>
+                  </c:pt>
+                  <c:pt idx="1">
+                    <c:v>Category 3</c:v>
+                  </c:pt>
+                  <c:pt idx="2">
+                    <c:v>Category 2</c:v>
+                  </c:pt>
+                  <c:pt idx="3">
+                    <c:v>Category 1</c:v>
+                  </c:pt>
+                </c:lvl>
+              </c:multiLvlStrCache>
+            </c:multiLvlStrRef>
+          </c:cat>
+          <c:val>
+            <c:numRef>
+              <c:f>Sheet1!$D$2:$D$5</c:f>
+              <c:numCache>
+                <c:formatCode>General</c:formatCode>
+                <c:ptCount val="4"/>
+                <c:pt idx="0">
+                  <c:v>5</c:v>
+                </c:pt>
+                <c:pt idx="1">
+                  <c:v>3</c:v>
+                </c:pt>
+                <c:pt idx="2">
+                  <c:v>2</c:v>
+                </c:pt>
+                <c:pt idx="3">
+                  <c:v>2</c:v>
+                </c:pt>
+              </c:numCache>
+            </c:numRef>
+          </c:val>
+        </c:ser>
+        <c:dLbls>
+          <c:numFmt formatCode="#,##0" sourceLinked="0"/>
+          <c:txPr>
+            <a:bodyPr/>
+            <a:lstStyle/>
+            <a:p>
+              <a:pPr>
+                <a:defRPr b="0" i="0" strike="noStrike" sz="850" u="none">
+                  <a:solidFill>
+                    <a:srgbClr val="FFFFFF"/>
+                  </a:solidFill>
+                  <a:latin typeface="JetBrains Mono"/>
+                </a:defRPr>
+              </a:pPr>
+            </a:p>
+          </c:txPr>
+          <c:dLblPos val="inEnd"/>
+          <c:showLegendKey val="0"/>
+          <c:showVal val="1"/>
+          <c:showCatName val="0"/>
+          <c:showSerName val="0"/>
+          <c:showPercent val="0"/>
+          <c:showBubbleSize val="0"/>
+          <c:showLeaderLines val="0"/>
+        </c:dLbls>
+        <c:gapWidth val="60"/>
+        <c:overlap val="0"/>
+        <c:axId val="2094734554"/>
+        <c:axId val="2094734552"/>
+        <c:axId val="2094734556"/>
+      </c:barChart>
+      <c:catAx>
+        <c:axId val="2094734554"/>
+        <c:scaling>
+          <c:orientation val="minMax"/>
+        </c:scaling>
+        <c:delete val="0"/>
+        <c:axPos val="l"/>
+        <c:numFmt formatCode="General" sourceLinked="1"/>
+        <c:majorTickMark val="out"/>
+        <c:minorTickMark val="none"/>
+        <c:tickLblPos val="nextTo"/>
+        <c:spPr>
+          <a:ln w="12700" cap="flat">
+            <a:noFill/>
+            <a:prstDash val="solid"/>
+            <a:round/>
+          </a:ln>
+        </c:spPr>
+        <c:txPr>
+          <a:bodyPr/>
+          <a:lstStyle/>
+          <a:p>
+            <a:pPr>
+              <a:defRPr sz="850" b="0" i="0" u="none" strike="noStrike">
+                <a:solidFill>
+                  <a:srgbClr val="78716C"/>
+                </a:solidFill>
+                <a:latin typeface="Inter"/>
+              </a:defRPr>
+            </a:pPr>
+            <a:endParaRPr lang="en-US"/>
+          </a:p>
+        </c:txPr>
+        <c:crossAx val="2094734552"/>
+        <c:crosses val="autoZero"/>
+        <c:auto val="1"/>
+        <c:lblAlgn val="ctr"/>
+        <c:noMultiLvlLbl val="1"/>
+      </c:catAx>
+      <c:valAx>
+        <c:axId val="2094734552"/>
+        <c:scaling>
+          <c:orientation val="minMax"/>
+        </c:scaling>
+        <c:delete val="1"/>
+        <c:axPos val="b"/>
+        <c:majorGridlines>
+          <c:spPr>
+            <a:ln w="12700" cap="flat">
+              <a:solidFill>
+                <a:srgbClr val="888888"/>
+              </a:solidFill>
+              <a:prstDash val="solid"/>
+              <a:round/>
+            </a:ln>
+          </c:spPr>
+        </c:majorGridlines>
+        <c:numFmt formatCode="General" sourceLinked="0"/>
+        <c:majorTickMark val="out"/>
+        <c:minorTickMark val="none"/>
+        <c:tickLblPos val="low"/>
+        <c:spPr>
+          <a:ln w="12700" cap="flat">
+            <a:noFill/>
+            <a:prstDash val="solid"/>
+            <a:round/>
+          </a:ln>
+        </c:spPr>
+        <c:txPr>
+          <a:bodyPr/>
+          <a:lstStyle/>
+          <a:p>
+            <a:pPr>
+              <a:defRPr sz="1200" b="0" i="0" u="none" strike="noStrike">
+                <a:solidFill>
+                  <a:srgbClr val="000000"/>
+                </a:solidFill>
+                <a:latin typeface="Arial"/>
+              </a:defRPr>
+            </a:pPr>
+            <a:endParaRPr lang="en-US"/>
+          </a:p>
+        </c:txPr>
+        <c:crossAx val="2094734554"/>
+        <c:crosses val="autoZero"/>
+        <c:crossBetween val="between"/>
+      </c:valAx>
+      <c:spPr>
+        <a:noFill/>
+        <a:ln w="12700" cap="flat">
+          <a:solidFill>
+            <a:srgbClr val="F5F0EC"/>
+          </a:solidFill>
+        </a:ln>
+        <a:effectLst/>
+      </c:spPr>
+    </c:plotArea>
+    <c:legend>
+      <c:legendPos val="t"/>
+      <c:overlay val="0"/>
+      <c:txPr>
+        <a:bodyPr/>
+        <a:lstStyle/>
+        <a:p>
+          <a:pPr>
+            <a:defRPr sz="800">
+              <a:solidFill>
+                <a:srgbClr val="78716C"/>
+              </a:solidFill>
+              <a:latin typeface="Inter"/>
+              <a:cs typeface="Inter"/>
+            </a:defRPr>
+          </a:pPr>
+          <a:endParaRPr lang="en-US"/>
+        </a:p>
+      </c:txPr>
+    </c:legend>
+    <c:plotVisOnly val="1"/>
+    <c:dispBlanksAs val="span"/>
+  </c:chart>
+  <c:spPr>
+    <a:noFill/>
+    <a:ln>
+      <a:noFill/>
+    </a:ln>
+    <a:effectLst/>
+  </c:spPr>
+  <c:externalData r:id="rId1">
+    <c:autoUpdate val="0"/>
+  </c:externalData>
+</c:chartSpace>
+</file>
+
+<file path=ppt/charts/chart4.xml><?xml version="1.0" encoding="utf-8"?>
+<c:chartSpace xmlns:c="http://schemas.openxmlformats.org/drawingml/2006/chart" xmlns:a="http://schemas.openxmlformats.org/drawingml/2006/main" xmlns:r="http://schemas.openxmlformats.org/officeDocument/2006/relationships">
+  <c:date1904 val="0"/>
+  <c:roundedCorners val="1"/>
+  <c:chart>
+    <c:autoTitleDeleted val="1"/>
+    <c:plotArea>
+      <c:layout/>
+      <c:barChart>
+        <c:barDir val="bar"/>
+        <c:grouping val="stacked"/>
+        <c:varyColors val="0"/>
+        <c:ser>
+          <c:idx val="0"/>
+          <c:order val="0"/>
+          <c:tx>
+            <c:strRef>
+              <c:f>Sheet1!$B$1</c:f>
+              <c:strCache>
+                <c:ptCount val="1"/>
+                <c:pt idx="0">
+                  <c:v>Series 1</c:v>
+                </c:pt>
+              </c:strCache>
+            </c:strRef>
+          </c:tx>
+          <c:spPr>
+            <a:solidFill>
+              <a:srgbClr val="6330F5"/>
+            </a:solidFill>
+            <a:effectLst/>
+          </c:spPr>
+          <c:invertIfNegative val="0"/>
+          <c:dLbls>
+            <c:numFmt formatCode="#,##0" sourceLinked="0"/>
+            <c:txPr>
+              <a:bodyPr/>
+              <a:lstStyle/>
+              <a:p>
+                <a:pPr>
+                  <a:defRPr b="0" i="0" strike="noStrike" sz="850" u="none">
+                    <a:solidFill>
+                      <a:srgbClr val="FFFFFF"/>
+                    </a:solidFill>
+                    <a:latin typeface="JetBrains Mono"/>
+                  </a:defRPr>
+                </a:pPr>
+              </a:p>
+            </c:txPr>
+            <c:dLblPos val="ctr"/>
+            <c:showLegendKey val="0"/>
+            <c:showVal val="1"/>
+            <c:showCatName val="0"/>
+            <c:showSerName val="0"/>
+            <c:showPercent val="0"/>
+            <c:showBubbleSize val="0"/>
+            <c:showLeaderLines val="0"/>
+          </c:dLbls>
+          <c:cat>
+            <c:multiLvlStrRef>
+              <c:f>Sheet1!$A$2:$A$5</c:f>
+              <c:multiLvlStrCache>
+                <c:ptCount val="4"/>
+                <c:lvl>
+                  <c:pt idx="0">
+                    <c:v>Category 4</c:v>
+                  </c:pt>
+                  <c:pt idx="1">
+                    <c:v>Category 3</c:v>
+                  </c:pt>
+                  <c:pt idx="2">
+                    <c:v>Category 2</c:v>
+                  </c:pt>
+                  <c:pt idx="3">
+                    <c:v>Category 1</c:v>
+                  </c:pt>
+                </c:lvl>
+              </c:multiLvlStrCache>
+            </c:multiLvlStrRef>
+          </c:cat>
+          <c:val>
+            <c:numRef>
+              <c:f>Sheet1!$B$2:$B$5</c:f>
+              <c:numCache>
+                <c:formatCode>General</c:formatCode>
+                <c:ptCount val="4"/>
+                <c:pt idx="0">
+                  <c:v>4.5</c:v>
+                </c:pt>
+                <c:pt idx="1">
+                  <c:v>3.5</c:v>
+                </c:pt>
+                <c:pt idx="2">
+                  <c:v>2.5</c:v>
+                </c:pt>
+                <c:pt idx="3">
+                  <c:v>4.3</c:v>
+                </c:pt>
+              </c:numCache>
+            </c:numRef>
+          </c:val>
+        </c:ser>
+        <c:ser>
+          <c:idx val="1"/>
+          <c:order val="1"/>
+          <c:tx>
+            <c:strRef>
+              <c:f>Sheet1!$C$1</c:f>
+              <c:strCache>
+                <c:ptCount val="1"/>
+                <c:pt idx="0">
+                  <c:v>Series 2</c:v>
+                </c:pt>
+              </c:strCache>
+            </c:strRef>
+          </c:tx>
+          <c:spPr>
+            <a:solidFill>
+              <a:srgbClr val="7655FD"/>
+            </a:solidFill>
+            <a:effectLst/>
+          </c:spPr>
+          <c:invertIfNegative val="0"/>
+          <c:dLbls>
+            <c:numFmt formatCode="#,##0" sourceLinked="0"/>
+            <c:txPr>
+              <a:bodyPr/>
+              <a:lstStyle/>
+              <a:p>
+                <a:pPr>
+                  <a:defRPr b="0" i="0" strike="noStrike" sz="850" u="none">
+                    <a:solidFill>
+                      <a:srgbClr val="FFFFFF"/>
+                    </a:solidFill>
+                    <a:latin typeface="JetBrains Mono"/>
+                  </a:defRPr>
+                </a:pPr>
+              </a:p>
+            </c:txPr>
+            <c:dLblPos val="ctr"/>
+            <c:showLegendKey val="0"/>
+            <c:showVal val="1"/>
+            <c:showCatName val="0"/>
+            <c:showSerName val="0"/>
+            <c:showPercent val="0"/>
+            <c:showBubbleSize val="0"/>
+            <c:showLeaderLines val="0"/>
+          </c:dLbls>
+          <c:cat>
+            <c:multiLvlStrRef>
+              <c:f>Sheet1!$A$2:$A$5</c:f>
+              <c:multiLvlStrCache>
+                <c:ptCount val="4"/>
+                <c:lvl>
+                  <c:pt idx="0">
+                    <c:v>Category 4</c:v>
+                  </c:pt>
+                  <c:pt idx="1">
+                    <c:v>Category 3</c:v>
+                  </c:pt>
+                  <c:pt idx="2">
+                    <c:v>Category 2</c:v>
+                  </c:pt>
+                  <c:pt idx="3">
+                    <c:v>Category 1</c:v>
+                  </c:pt>
+                </c:lvl>
+              </c:multiLvlStrCache>
+            </c:multiLvlStrRef>
+          </c:cat>
+          <c:val>
+            <c:numRef>
+              <c:f>Sheet1!$C$2:$C$5</c:f>
+              <c:numCache>
+                <c:formatCode>General</c:formatCode>
+                <c:ptCount val="4"/>
+                <c:pt idx="0">
+                  <c:v>2.8</c:v>
+                </c:pt>
+                <c:pt idx="1">
+                  <c:v>1.8</c:v>
+                </c:pt>
+                <c:pt idx="2">
+                  <c:v>4.4</c:v>
+                </c:pt>
+                <c:pt idx="3">
+                  <c:v>2.4</c:v>
+                </c:pt>
+              </c:numCache>
+            </c:numRef>
+          </c:val>
+        </c:ser>
+        <c:ser>
+          <c:idx val="2"/>
+          <c:order val="2"/>
+          <c:tx>
+            <c:strRef>
+              <c:f>Sheet1!$D$1</c:f>
+              <c:strCache>
+                <c:ptCount val="1"/>
+                <c:pt idx="0">
+                  <c:v>Series 3</c:v>
+                </c:pt>
+              </c:strCache>
+            </c:strRef>
+          </c:tx>
+          <c:spPr>
+            <a:solidFill>
+              <a:srgbClr val="9886FF"/>
+            </a:solidFill>
+            <a:effectLst/>
+          </c:spPr>
+          <c:invertIfNegative val="0"/>
+          <c:dLbls>
+            <c:numFmt formatCode="#,##0" sourceLinked="0"/>
+            <c:txPr>
+              <a:bodyPr/>
+              <a:lstStyle/>
+              <a:p>
+                <a:pPr>
+                  <a:defRPr b="0" i="0" strike="noStrike" sz="850" u="none">
+                    <a:solidFill>
+                      <a:srgbClr val="FFFFFF"/>
+                    </a:solidFill>
+                    <a:latin typeface="JetBrains Mono"/>
+                  </a:defRPr>
+                </a:pPr>
+              </a:p>
+            </c:txPr>
+            <c:dLblPos val="ctr"/>
+            <c:showLegendKey val="0"/>
+            <c:showVal val="1"/>
+            <c:showCatName val="0"/>
+            <c:showSerName val="0"/>
+            <c:showPercent val="0"/>
+            <c:showBubbleSize val="0"/>
+            <c:showLeaderLines val="0"/>
+          </c:dLbls>
+          <c:cat>
+            <c:multiLvlStrRef>
+              <c:f>Sheet1!$A$2:$A$5</c:f>
+              <c:multiLvlStrCache>
+                <c:ptCount val="4"/>
+                <c:lvl>
+                  <c:pt idx="0">
+                    <c:v>Category 4</c:v>
+                  </c:pt>
+                  <c:pt idx="1">
+                    <c:v>Category 3</c:v>
+                  </c:pt>
+                  <c:pt idx="2">
+                    <c:v>Category 2</c:v>
+                  </c:pt>
+                  <c:pt idx="3">
+                    <c:v>Category 1</c:v>
+                  </c:pt>
+                </c:lvl>
+              </c:multiLvlStrCache>
+            </c:multiLvlStrRef>
+          </c:cat>
+          <c:val>
+            <c:numRef>
+              <c:f>Sheet1!$D$2:$D$5</c:f>
+              <c:numCache>
+                <c:formatCode>General</c:formatCode>
+                <c:ptCount val="4"/>
+                <c:pt idx="0">
+                  <c:v>5</c:v>
+                </c:pt>
+                <c:pt idx="1">
+                  <c:v>3</c:v>
+                </c:pt>
+                <c:pt idx="2">
+                  <c:v>2</c:v>
+                </c:pt>
+                <c:pt idx="3">
+                  <c:v>2</c:v>
+                </c:pt>
+              </c:numCache>
+            </c:numRef>
+          </c:val>
+        </c:ser>
+        <c:dLbls>
+          <c:numFmt formatCode="#,##0" sourceLinked="0"/>
+          <c:txPr>
+            <a:bodyPr/>
+            <a:lstStyle/>
+            <a:p>
+              <a:pPr>
+                <a:defRPr b="0" i="0" strike="noStrike" sz="850" u="none">
+                  <a:solidFill>
+                    <a:srgbClr val="FFFFFF"/>
+                  </a:solidFill>
+                  <a:latin typeface="JetBrains Mono"/>
+                </a:defRPr>
+              </a:pPr>
+            </a:p>
+          </c:txPr>
+          <c:dLblPos val="ctr"/>
+          <c:showLegendKey val="0"/>
+          <c:showVal val="1"/>
+          <c:showCatName val="0"/>
+          <c:showSerName val="0"/>
+          <c:showPercent val="0"/>
+          <c:showBubbleSize val="0"/>
+          <c:showLeaderLines val="0"/>
+        </c:dLbls>
+        <c:gapWidth val="60"/>
+        <c:overlap val="100"/>
+        <c:axId val="2094734554"/>
+        <c:axId val="2094734552"/>
+        <c:axId val="2094734556"/>
+      </c:barChart>
+      <c:catAx>
+        <c:axId val="2094734554"/>
+        <c:scaling>
+          <c:orientation val="minMax"/>
+        </c:scaling>
+        <c:delete val="0"/>
+        <c:axPos val="l"/>
+        <c:numFmt formatCode="General" sourceLinked="1"/>
+        <c:majorTickMark val="out"/>
+        <c:minorTickMark val="none"/>
+        <c:tickLblPos val="nextTo"/>
+        <c:spPr>
+          <a:ln w="12700" cap="flat">
+            <a:noFill/>
+            <a:prstDash val="solid"/>
+            <a:round/>
+          </a:ln>
+        </c:spPr>
+        <c:txPr>
+          <a:bodyPr/>
+          <a:lstStyle/>
+          <a:p>
+            <a:pPr>
+              <a:defRPr sz="850" b="0" i="0" u="none" strike="noStrike">
+                <a:solidFill>
+                  <a:srgbClr val="78716C"/>
+                </a:solidFill>
+                <a:latin typeface="Inter"/>
+              </a:defRPr>
+            </a:pPr>
+            <a:endParaRPr lang="en-US"/>
+          </a:p>
+        </c:txPr>
+        <c:crossAx val="2094734552"/>
+        <c:crosses val="autoZero"/>
+        <c:auto val="1"/>
+        <c:lblAlgn val="ctr"/>
+        <c:noMultiLvlLbl val="1"/>
+      </c:catAx>
+      <c:valAx>
+        <c:axId val="2094734552"/>
+        <c:scaling>
+          <c:orientation val="minMax"/>
+        </c:scaling>
+        <c:delete val="1"/>
+        <c:axPos val="b"/>
+        <c:majorGridlines>
+          <c:spPr>
+            <a:ln w="12700" cap="flat">
+              <a:solidFill>
+                <a:srgbClr val="888888"/>
+              </a:solidFill>
+              <a:prstDash val="solid"/>
+              <a:round/>
+            </a:ln>
+          </c:spPr>
+        </c:majorGridlines>
+        <c:numFmt formatCode="General" sourceLinked="0"/>
+        <c:majorTickMark val="out"/>
+        <c:minorTickMark val="none"/>
+        <c:tickLblPos val="low"/>
+        <c:spPr>
+          <a:ln w="12700" cap="flat">
+            <a:noFill/>
+            <a:prstDash val="solid"/>
+            <a:round/>
+          </a:ln>
+        </c:spPr>
+        <c:txPr>
+          <a:bodyPr/>
+          <a:lstStyle/>
+          <a:p>
+            <a:pPr>
+              <a:defRPr sz="1200" b="0" i="0" u="none" strike="noStrike">
+                <a:solidFill>
+                  <a:srgbClr val="000000"/>
+                </a:solidFill>
+                <a:latin typeface="Arial"/>
+              </a:defRPr>
+            </a:pPr>
+            <a:endParaRPr lang="en-US"/>
+          </a:p>
+        </c:txPr>
+        <c:crossAx val="2094734554"/>
+        <c:crosses val="autoZero"/>
+        <c:crossBetween val="between"/>
+      </c:valAx>
+      <c:spPr>
+        <a:noFill/>
+        <a:ln w="12700" cap="flat">
+          <a:solidFill>
+            <a:srgbClr val="F5F0EC"/>
+          </a:solidFill>
+        </a:ln>
+        <a:effectLst/>
+      </c:spPr>
+    </c:plotArea>
+    <c:legend>
+      <c:legendPos val="t"/>
+      <c:overlay val="0"/>
+      <c:txPr>
+        <a:bodyPr/>
+        <a:lstStyle/>
+        <a:p>
+          <a:pPr>
+            <a:defRPr sz="800">
+              <a:solidFill>
+                <a:srgbClr val="78716C"/>
+              </a:solidFill>
+              <a:latin typeface="Inter"/>
+              <a:cs typeface="Inter"/>
+            </a:defRPr>
+          </a:pPr>
+          <a:endParaRPr lang="en-US"/>
+        </a:p>
+      </c:txPr>
+    </c:legend>
+    <c:plotVisOnly val="1"/>
+    <c:dispBlanksAs val="span"/>
+  </c:chart>
+  <c:spPr>
+    <a:noFill/>
+    <a:ln>
+      <a:noFill/>
+    </a:ln>
+    <a:effectLst/>
+  </c:spPr>
+  <c:externalData r:id="rId1">
+    <c:autoUpdate val="0"/>
+  </c:externalData>
+</c:chartSpace>
 </file>
 
 <file path=ppt/notesMasters/notesMaster1.xml><?xml version="1.0" encoding="utf-8"?>
@@ -979,6 +2794,446 @@
             <a:fld id="{F7021451-1387-4CA6-816F-3879F97B5CBC}" type="slidenum">
               <a:rPr lang="en-US"/>
               <a:t>14</a:t>
+            </a:fld>
+            <a:endParaRPr lang="en-US"/>
+          </a:p>
+        </p:txBody>
+      </p:sp>
+    </p:spTree>
+    <p:extLst>
+      <p:ext uri="{BB962C8B-B14F-4D97-AF65-F5344CB8AC3E}">
+        <p14:creationId xmlns:p14="http://schemas.microsoft.com/office/powerpoint/2010/main" val="1024086991"/>
+      </p:ext>
+    </p:extLst>
+  </p:cSld>
+  <p:clrMapOvr>
+    <a:masterClrMapping/>
+  </p:clrMapOvr>
+</p:notes>
+</file>
+
+<file path=ppt/notesSlides/notesSlide15.xml><?xml version="1.0" encoding="utf-8"?>
+<p:notes xmlns:a="http://schemas.openxmlformats.org/drawingml/2006/main" xmlns:r="http://schemas.openxmlformats.org/officeDocument/2006/relationships" xmlns:p="http://schemas.openxmlformats.org/presentationml/2006/main">
+  <p:cSld>
+    <p:spTree>
+      <p:nvGrpSpPr>
+        <p:cNvPr id="1" name=""/>
+        <p:cNvGrpSpPr/>
+        <p:nvPr/>
+      </p:nvGrpSpPr>
+      <p:grpSpPr>
+        <a:xfrm>
+          <a:off x="0" y="0"/>
+          <a:ext cx="0" cy="0"/>
+          <a:chOff x="0" y="0"/>
+          <a:chExt cx="0" cy="0"/>
+        </a:xfrm>
+      </p:grpSpPr>
+      <p:sp>
+        <p:nvSpPr>
+          <p:cNvPr id="2" name="Slide Image Placeholder 1"/>
+          <p:cNvSpPr>
+            <a:spLocks noGrp="1" noRot="1" noChangeAspect="1"/>
+          </p:cNvSpPr>
+          <p:nvPr>
+            <p:ph type="sldImg"/>
+          </p:nvPr>
+        </p:nvSpPr>
+        <p:spPr/>
+      </p:sp>
+      <p:sp>
+        <p:nvSpPr>
+          <p:cNvPr id="3" name="Notes Placeholder 2"/>
+          <p:cNvSpPr>
+            <a:spLocks noGrp="1"/>
+          </p:cNvSpPr>
+          <p:nvPr>
+            <p:ph type="body" idx="1"/>
+          </p:nvPr>
+        </p:nvSpPr>
+        <p:spPr/>
+        <p:txBody>
+          <a:bodyPr/>
+          <a:lstStyle/>
+          <a:p>
+            <a:r>
+              <a:rPr lang="en-US" dirty="0"/>
+              <a:t/>
+            </a:r>
+            <a:endParaRPr lang="en-US" dirty="0"/>
+          </a:p>
+        </p:txBody>
+      </p:sp>
+      <p:sp>
+        <p:nvSpPr>
+          <p:cNvPr id="4" name="Slide Number Placeholder 3"/>
+          <p:cNvSpPr>
+            <a:spLocks noGrp="1"/>
+          </p:cNvSpPr>
+          <p:nvPr>
+            <p:ph type="sldNum" sz="quarter" idx="10"/>
+          </p:nvPr>
+        </p:nvSpPr>
+        <p:spPr/>
+        <p:txBody>
+          <a:bodyPr/>
+          <a:lstStyle/>
+          <a:p>
+            <a:fld id="{F7021451-1387-4CA6-816F-3879F97B5CBC}" type="slidenum">
+              <a:rPr lang="en-US"/>
+              <a:t>15</a:t>
+            </a:fld>
+            <a:endParaRPr lang="en-US"/>
+          </a:p>
+        </p:txBody>
+      </p:sp>
+    </p:spTree>
+    <p:extLst>
+      <p:ext uri="{BB962C8B-B14F-4D97-AF65-F5344CB8AC3E}">
+        <p14:creationId xmlns:p14="http://schemas.microsoft.com/office/powerpoint/2010/main" val="1024086991"/>
+      </p:ext>
+    </p:extLst>
+  </p:cSld>
+  <p:clrMapOvr>
+    <a:masterClrMapping/>
+  </p:clrMapOvr>
+</p:notes>
+</file>
+
+<file path=ppt/notesSlides/notesSlide16.xml><?xml version="1.0" encoding="utf-8"?>
+<p:notes xmlns:a="http://schemas.openxmlformats.org/drawingml/2006/main" xmlns:r="http://schemas.openxmlformats.org/officeDocument/2006/relationships" xmlns:p="http://schemas.openxmlformats.org/presentationml/2006/main">
+  <p:cSld>
+    <p:spTree>
+      <p:nvGrpSpPr>
+        <p:cNvPr id="1" name=""/>
+        <p:cNvGrpSpPr/>
+        <p:nvPr/>
+      </p:nvGrpSpPr>
+      <p:grpSpPr>
+        <a:xfrm>
+          <a:off x="0" y="0"/>
+          <a:ext cx="0" cy="0"/>
+          <a:chOff x="0" y="0"/>
+          <a:chExt cx="0" cy="0"/>
+        </a:xfrm>
+      </p:grpSpPr>
+      <p:sp>
+        <p:nvSpPr>
+          <p:cNvPr id="2" name="Slide Image Placeholder 1"/>
+          <p:cNvSpPr>
+            <a:spLocks noGrp="1" noRot="1" noChangeAspect="1"/>
+          </p:cNvSpPr>
+          <p:nvPr>
+            <p:ph type="sldImg"/>
+          </p:nvPr>
+        </p:nvSpPr>
+        <p:spPr/>
+      </p:sp>
+      <p:sp>
+        <p:nvSpPr>
+          <p:cNvPr id="3" name="Notes Placeholder 2"/>
+          <p:cNvSpPr>
+            <a:spLocks noGrp="1"/>
+          </p:cNvSpPr>
+          <p:nvPr>
+            <p:ph type="body" idx="1"/>
+          </p:nvPr>
+        </p:nvSpPr>
+        <p:spPr/>
+        <p:txBody>
+          <a:bodyPr/>
+          <a:lstStyle/>
+          <a:p>
+            <a:r>
+              <a:rPr lang="en-US" dirty="0"/>
+              <a:t/>
+            </a:r>
+            <a:endParaRPr lang="en-US" dirty="0"/>
+          </a:p>
+        </p:txBody>
+      </p:sp>
+      <p:sp>
+        <p:nvSpPr>
+          <p:cNvPr id="4" name="Slide Number Placeholder 3"/>
+          <p:cNvSpPr>
+            <a:spLocks noGrp="1"/>
+          </p:cNvSpPr>
+          <p:nvPr>
+            <p:ph type="sldNum" sz="quarter" idx="10"/>
+          </p:nvPr>
+        </p:nvSpPr>
+        <p:spPr/>
+        <p:txBody>
+          <a:bodyPr/>
+          <a:lstStyle/>
+          <a:p>
+            <a:fld id="{F7021451-1387-4CA6-816F-3879F97B5CBC}" type="slidenum">
+              <a:rPr lang="en-US"/>
+              <a:t>16</a:t>
+            </a:fld>
+            <a:endParaRPr lang="en-US"/>
+          </a:p>
+        </p:txBody>
+      </p:sp>
+    </p:spTree>
+    <p:extLst>
+      <p:ext uri="{BB962C8B-B14F-4D97-AF65-F5344CB8AC3E}">
+        <p14:creationId xmlns:p14="http://schemas.microsoft.com/office/powerpoint/2010/main" val="1024086991"/>
+      </p:ext>
+    </p:extLst>
+  </p:cSld>
+  <p:clrMapOvr>
+    <a:masterClrMapping/>
+  </p:clrMapOvr>
+</p:notes>
+</file>
+
+<file path=ppt/notesSlides/notesSlide17.xml><?xml version="1.0" encoding="utf-8"?>
+<p:notes xmlns:a="http://schemas.openxmlformats.org/drawingml/2006/main" xmlns:r="http://schemas.openxmlformats.org/officeDocument/2006/relationships" xmlns:p="http://schemas.openxmlformats.org/presentationml/2006/main">
+  <p:cSld>
+    <p:spTree>
+      <p:nvGrpSpPr>
+        <p:cNvPr id="1" name=""/>
+        <p:cNvGrpSpPr/>
+        <p:nvPr/>
+      </p:nvGrpSpPr>
+      <p:grpSpPr>
+        <a:xfrm>
+          <a:off x="0" y="0"/>
+          <a:ext cx="0" cy="0"/>
+          <a:chOff x="0" y="0"/>
+          <a:chExt cx="0" cy="0"/>
+        </a:xfrm>
+      </p:grpSpPr>
+      <p:sp>
+        <p:nvSpPr>
+          <p:cNvPr id="2" name="Slide Image Placeholder 1"/>
+          <p:cNvSpPr>
+            <a:spLocks noGrp="1" noRot="1" noChangeAspect="1"/>
+          </p:cNvSpPr>
+          <p:nvPr>
+            <p:ph type="sldImg"/>
+          </p:nvPr>
+        </p:nvSpPr>
+        <p:spPr/>
+      </p:sp>
+      <p:sp>
+        <p:nvSpPr>
+          <p:cNvPr id="3" name="Notes Placeholder 2"/>
+          <p:cNvSpPr>
+            <a:spLocks noGrp="1"/>
+          </p:cNvSpPr>
+          <p:nvPr>
+            <p:ph type="body" idx="1"/>
+          </p:nvPr>
+        </p:nvSpPr>
+        <p:spPr/>
+        <p:txBody>
+          <a:bodyPr/>
+          <a:lstStyle/>
+          <a:p>
+            <a:r>
+              <a:rPr lang="en-US" dirty="0"/>
+              <a:t/>
+            </a:r>
+            <a:endParaRPr lang="en-US" dirty="0"/>
+          </a:p>
+        </p:txBody>
+      </p:sp>
+      <p:sp>
+        <p:nvSpPr>
+          <p:cNvPr id="4" name="Slide Number Placeholder 3"/>
+          <p:cNvSpPr>
+            <a:spLocks noGrp="1"/>
+          </p:cNvSpPr>
+          <p:nvPr>
+            <p:ph type="sldNum" sz="quarter" idx="10"/>
+          </p:nvPr>
+        </p:nvSpPr>
+        <p:spPr/>
+        <p:txBody>
+          <a:bodyPr/>
+          <a:lstStyle/>
+          <a:p>
+            <a:fld id="{F7021451-1387-4CA6-816F-3879F97B5CBC}" type="slidenum">
+              <a:rPr lang="en-US"/>
+              <a:t>17</a:t>
+            </a:fld>
+            <a:endParaRPr lang="en-US"/>
+          </a:p>
+        </p:txBody>
+      </p:sp>
+    </p:spTree>
+    <p:extLst>
+      <p:ext uri="{BB962C8B-B14F-4D97-AF65-F5344CB8AC3E}">
+        <p14:creationId xmlns:p14="http://schemas.microsoft.com/office/powerpoint/2010/main" val="1024086991"/>
+      </p:ext>
+    </p:extLst>
+  </p:cSld>
+  <p:clrMapOvr>
+    <a:masterClrMapping/>
+  </p:clrMapOvr>
+</p:notes>
+</file>
+
+<file path=ppt/notesSlides/notesSlide18.xml><?xml version="1.0" encoding="utf-8"?>
+<p:notes xmlns:a="http://schemas.openxmlformats.org/drawingml/2006/main" xmlns:r="http://schemas.openxmlformats.org/officeDocument/2006/relationships" xmlns:p="http://schemas.openxmlformats.org/presentationml/2006/main">
+  <p:cSld>
+    <p:spTree>
+      <p:nvGrpSpPr>
+        <p:cNvPr id="1" name=""/>
+        <p:cNvGrpSpPr/>
+        <p:nvPr/>
+      </p:nvGrpSpPr>
+      <p:grpSpPr>
+        <a:xfrm>
+          <a:off x="0" y="0"/>
+          <a:ext cx="0" cy="0"/>
+          <a:chOff x="0" y="0"/>
+          <a:chExt cx="0" cy="0"/>
+        </a:xfrm>
+      </p:grpSpPr>
+      <p:sp>
+        <p:nvSpPr>
+          <p:cNvPr id="2" name="Slide Image Placeholder 1"/>
+          <p:cNvSpPr>
+            <a:spLocks noGrp="1" noRot="1" noChangeAspect="1"/>
+          </p:cNvSpPr>
+          <p:nvPr>
+            <p:ph type="sldImg"/>
+          </p:nvPr>
+        </p:nvSpPr>
+        <p:spPr/>
+      </p:sp>
+      <p:sp>
+        <p:nvSpPr>
+          <p:cNvPr id="3" name="Notes Placeholder 2"/>
+          <p:cNvSpPr>
+            <a:spLocks noGrp="1"/>
+          </p:cNvSpPr>
+          <p:nvPr>
+            <p:ph type="body" idx="1"/>
+          </p:nvPr>
+        </p:nvSpPr>
+        <p:spPr/>
+        <p:txBody>
+          <a:bodyPr/>
+          <a:lstStyle/>
+          <a:p>
+            <a:r>
+              <a:rPr lang="en-US" dirty="0"/>
+              <a:t/>
+            </a:r>
+            <a:endParaRPr lang="en-US" dirty="0"/>
+          </a:p>
+        </p:txBody>
+      </p:sp>
+      <p:sp>
+        <p:nvSpPr>
+          <p:cNvPr id="4" name="Slide Number Placeholder 3"/>
+          <p:cNvSpPr>
+            <a:spLocks noGrp="1"/>
+          </p:cNvSpPr>
+          <p:nvPr>
+            <p:ph type="sldNum" sz="quarter" idx="10"/>
+          </p:nvPr>
+        </p:nvSpPr>
+        <p:spPr/>
+        <p:txBody>
+          <a:bodyPr/>
+          <a:lstStyle/>
+          <a:p>
+            <a:fld id="{F7021451-1387-4CA6-816F-3879F97B5CBC}" type="slidenum">
+              <a:rPr lang="en-US"/>
+              <a:t>18</a:t>
+            </a:fld>
+            <a:endParaRPr lang="en-US"/>
+          </a:p>
+        </p:txBody>
+      </p:sp>
+    </p:spTree>
+    <p:extLst>
+      <p:ext uri="{BB962C8B-B14F-4D97-AF65-F5344CB8AC3E}">
+        <p14:creationId xmlns:p14="http://schemas.microsoft.com/office/powerpoint/2010/main" val="1024086991"/>
+      </p:ext>
+    </p:extLst>
+  </p:cSld>
+  <p:clrMapOvr>
+    <a:masterClrMapping/>
+  </p:clrMapOvr>
+</p:notes>
+</file>
+
+<file path=ppt/notesSlides/notesSlide19.xml><?xml version="1.0" encoding="utf-8"?>
+<p:notes xmlns:a="http://schemas.openxmlformats.org/drawingml/2006/main" xmlns:r="http://schemas.openxmlformats.org/officeDocument/2006/relationships" xmlns:p="http://schemas.openxmlformats.org/presentationml/2006/main">
+  <p:cSld>
+    <p:spTree>
+      <p:nvGrpSpPr>
+        <p:cNvPr id="1" name=""/>
+        <p:cNvGrpSpPr/>
+        <p:nvPr/>
+      </p:nvGrpSpPr>
+      <p:grpSpPr>
+        <a:xfrm>
+          <a:off x="0" y="0"/>
+          <a:ext cx="0" cy="0"/>
+          <a:chOff x="0" y="0"/>
+          <a:chExt cx="0" cy="0"/>
+        </a:xfrm>
+      </p:grpSpPr>
+      <p:sp>
+        <p:nvSpPr>
+          <p:cNvPr id="2" name="Slide Image Placeholder 1"/>
+          <p:cNvSpPr>
+            <a:spLocks noGrp="1" noRot="1" noChangeAspect="1"/>
+          </p:cNvSpPr>
+          <p:nvPr>
+            <p:ph type="sldImg"/>
+          </p:nvPr>
+        </p:nvSpPr>
+        <p:spPr/>
+      </p:sp>
+      <p:sp>
+        <p:nvSpPr>
+          <p:cNvPr id="3" name="Notes Placeholder 2"/>
+          <p:cNvSpPr>
+            <a:spLocks noGrp="1"/>
+          </p:cNvSpPr>
+          <p:nvPr>
+            <p:ph type="body" idx="1"/>
+          </p:nvPr>
+        </p:nvSpPr>
+        <p:spPr/>
+        <p:txBody>
+          <a:bodyPr/>
+          <a:lstStyle/>
+          <a:p>
+            <a:r>
+              <a:rPr lang="en-US" dirty="0"/>
+              <a:t/>
+            </a:r>
+            <a:endParaRPr lang="en-US" dirty="0"/>
+          </a:p>
+        </p:txBody>
+      </p:sp>
+      <p:sp>
+        <p:nvSpPr>
+          <p:cNvPr id="4" name="Slide Number Placeholder 3"/>
+          <p:cNvSpPr>
+            <a:spLocks noGrp="1"/>
+          </p:cNvSpPr>
+          <p:nvPr>
+            <p:ph type="sldNum" sz="quarter" idx="10"/>
+          </p:nvPr>
+        </p:nvSpPr>
+        <p:spPr/>
+        <p:txBody>
+          <a:bodyPr/>
+          <a:lstStyle/>
+          <a:p>
+            <a:fld id="{F7021451-1387-4CA6-816F-3879F97B5CBC}" type="slidenum">
+              <a:rPr lang="en-US"/>
+              <a:t>19</a:t>
             </a:fld>
             <a:endParaRPr lang="en-US"/>
           </a:p>
@@ -2034,20 +4289,14 @@
       </p:grpSpPr>
       <p:pic>
         <p:nvPicPr>
-          <p:cNvPr id="2" name="Image 0" descr="/sessions/sleepy-youthful-albattani/mnt/brand-system/assets/logos/wordmark-white.svg">    </p:cNvPr>
+          <p:cNvPr id="2" name="Image 0" descr="/sessions/sleepy-youthful-albattani/mnt/brand-system/assets/logos/wordmark-white.png">    </p:cNvPr>
           <p:cNvPicPr>
             <a:picLocks noChangeAspect="1"/>
           </p:cNvPicPr>
           <p:nvPr/>
         </p:nvPicPr>
         <p:blipFill>
-          <a:blip r:embed="rId1">
-            <a:extLst>
-              <a:ext uri="{96DAC541-7B7A-43D3-8B79-37D633B846F1}">
-                <asvg:svgBlip xmlns:asvg="http://schemas.microsoft.com/office/drawing/2016/SVG/main" r:embed="rId2"/>
-              </a:ext>
-            </a:extLst>
-          </a:blip>
+          <a:blip r:embed="rId1"/>
           <a:stretch>
             <a:fillRect/>
           </a:stretch>
@@ -2110,7 +4359,7 @@
         <p:spPr>
           <a:xfrm>
             <a:off x="502920" y="1618488"/>
-            <a:ext cx="914400" cy="10973"/>
+            <a:ext cx="914400" cy="4572"/>
           </a:xfrm>
           <a:prstGeom prst="rect">
             <a:avLst/>
@@ -2343,7 +4592,7 @@
         <p:spPr>
           <a:xfrm>
             <a:off x="502920" y="585216"/>
-            <a:ext cx="914400" cy="10973"/>
+            <a:ext cx="914400" cy="4572"/>
           </a:xfrm>
           <a:prstGeom prst="rect">
             <a:avLst/>
@@ -2367,8 +4616,8 @@
         </p:nvSpPr>
         <p:spPr>
           <a:xfrm>
-            <a:off x="502920" y="749808"/>
-            <a:ext cx="8138160" cy="502920"/>
+            <a:off x="502920" y="713232"/>
+            <a:ext cx="7772400" cy="548640"/>
           </a:xfrm>
           <a:prstGeom prst="rect">
             <a:avLst/>
@@ -2377,14 +4626,17 @@
           <a:ln/>
         </p:spPr>
         <p:txBody>
-          <a:bodyPr wrap="square" lIns="0" tIns="0" rIns="0" bIns="0" rtlCol="0" anchor="ctr"/>
+          <a:bodyPr wrap="square" lIns="0" tIns="0" rIns="0" bIns="0" rtlCol="0" anchor="t"/>
           <a:lstStyle/>
           <a:p>
             <a:pPr indent="0" marL="0">
+              <a:lnSpc>
+                <a:spcPct val="110000"/>
+              </a:lnSpc>
               <a:buNone/>
             </a:pPr>
             <a:r>
-              <a:rPr lang="en-US" sz="2800" dirty="0">
+              <a:rPr lang="en-US" sz="2600" dirty="0">
                 <a:solidFill>
                   <a:srgbClr val="0C0A09"/>
                 </a:solidFill>
@@ -2392,9 +4644,26 @@
                 <a:ea typeface="Nanum Myeongjo" pitchFamily="34" charset="-122"/>
                 <a:cs typeface="Nanum Myeongjo" pitchFamily="34" charset="-120"/>
               </a:rPr>
-              <a:t>Table heading</a:t>
+              <a:t>Table with a </a:t>
             </a:r>
-            <a:endParaRPr lang="en-US" sz="2800" dirty="0"/>
+            <a:pPr indent="0" marL="0">
+              <a:lnSpc>
+                <a:spcPct val="110000"/>
+              </a:lnSpc>
+              <a:buNone/>
+            </a:pPr>
+            <a:r>
+              <a:rPr lang="en-US" sz="2600" i="1" dirty="0">
+                <a:solidFill>
+                  <a:srgbClr val="6330F5"/>
+                </a:solidFill>
+                <a:latin typeface="Nanum Myeongjo" pitchFamily="34" charset="0"/>
+                <a:ea typeface="Nanum Myeongjo" pitchFamily="34" charset="-122"/>
+                <a:cs typeface="Nanum Myeongjo" pitchFamily="34" charset="-120"/>
+              </a:rPr>
+              <a:t>header row.</a:t>
+            </a:r>
+            <a:endParaRPr lang="en-US" sz="2600" dirty="0"/>
           </a:p>
         </p:txBody>
       </p:sp>
@@ -2414,19 +4683,19 @@
         </p:nvGraphicFramePr>
         <p:xfrm>
           <a:off x="502920" y="1417320"/>
-          <a:ext cx="8138160" cy="3200400"/>
+          <a:ext cx="5120640" cy="914400"/>
         </p:xfrm>
         <a:graphic>
           <a:graphicData uri="http://schemas.openxmlformats.org/drawingml/2006/table">
             <a:tbl>
               <a:tblPr/>
               <a:tblGrid>
-                <a:gridCol w="2034540"/>
-                <a:gridCol w="2034540"/>
-                <a:gridCol w="2034540"/>
-                <a:gridCol w="2034540"/>
+                <a:gridCol w="1371600"/>
+                <a:gridCol w="1252728"/>
+                <a:gridCol w="1252728"/>
+                <a:gridCol w="1243584"/>
               </a:tblGrid>
-              <a:tr h="402336">
+              <a:tr h="475488">
                 <a:tc>
                   <a:txBody>
                     <a:bodyPr/>
@@ -2436,24 +4705,24 @@
                         <a:buNone/>
                       </a:pPr>
                       <a:r>
-                        <a:rPr lang="en-US" sz="1150" b="1" dirty="0">
+                        <a:rPr lang="en-US" sz="900" spc="100" kern="0" dirty="0">
                           <a:solidFill>
-                            <a:srgbClr val="FAFAF9"/>
+                            <a:srgbClr val="78716C"/>
                           </a:solidFill>
-                          <a:latin typeface="Inter" pitchFamily="34" charset="0"/>
-                          <a:ea typeface="Inter" pitchFamily="34" charset="-122"/>
-                          <a:cs typeface="Inter" pitchFamily="34" charset="-120"/>
+                          <a:latin typeface="JetBrains Mono" pitchFamily="34" charset="0"/>
+                          <a:ea typeface="JetBrains Mono" pitchFamily="34" charset="-122"/>
+                          <a:cs typeface="JetBrains Mono" pitchFamily="34" charset="-120"/>
                         </a:rPr>
-                        <a:t>Column heading</a:t>
+                        <a:t>COLUMN</a:t>
                       </a:r>
-                      <a:endParaRPr lang="en-US" sz="1150" dirty="0">
-                        <a:latin typeface="Inter" charset="0"/>
-                        <a:ea typeface="Inter" charset="0"/>
-                        <a:cs typeface="Inter" charset="0"/>
+                      <a:endParaRPr lang="en-US" sz="900" dirty="0">
+                        <a:latin typeface="JetBrains Mono" charset="0"/>
+                        <a:ea typeface="JetBrains Mono" charset="0"/>
+                        <a:cs typeface="JetBrains Mono" charset="0"/>
                       </a:endParaRPr>
                     </a:p>
                   </a:txBody>
-                  <a:tcPr marL="91440" marR="91440" marT="45720" marB="45720" anchor="ctr">
+                  <a:tcPr marL="114300" marR="114300" marT="114300" marB="114300" anchor="ctr">
                     <a:lnL w="6350" cap="flat" cmpd="sng" algn="ctr">
                       <a:solidFill>
                         <a:srgbClr val="E7E5E4"/>
@@ -2491,7 +4760,7 @@
                       <a:tailEnd type="none" w="med" len="med"/>
                     </a:lnB>
                     <a:solidFill>
-                      <a:srgbClr val="0C0A09"/>
+                      <a:srgbClr val="FFFFFF"/>
                     </a:solidFill>
                   </a:tcPr>
                 </a:tc>
@@ -2504,24 +4773,24 @@
                         <a:buNone/>
                       </a:pPr>
                       <a:r>
-                        <a:rPr lang="en-US" sz="1150" b="1" dirty="0">
+                        <a:rPr lang="en-US" sz="900" spc="100" kern="0" dirty="0">
                           <a:solidFill>
-                            <a:srgbClr val="FAFAF9"/>
+                            <a:srgbClr val="78716C"/>
                           </a:solidFill>
-                          <a:latin typeface="Inter" pitchFamily="34" charset="0"/>
-                          <a:ea typeface="Inter" pitchFamily="34" charset="-122"/>
-                          <a:cs typeface="Inter" pitchFamily="34" charset="-120"/>
+                          <a:latin typeface="JetBrains Mono" pitchFamily="34" charset="0"/>
+                          <a:ea typeface="JetBrains Mono" pitchFamily="34" charset="-122"/>
+                          <a:cs typeface="JetBrains Mono" pitchFamily="34" charset="-120"/>
                         </a:rPr>
-                        <a:t>Column heading</a:t>
+                        <a:t>COLUMN</a:t>
                       </a:r>
-                      <a:endParaRPr lang="en-US" sz="1150" dirty="0">
-                        <a:latin typeface="Inter" charset="0"/>
-                        <a:ea typeface="Inter" charset="0"/>
-                        <a:cs typeface="Inter" charset="0"/>
+                      <a:endParaRPr lang="en-US" sz="900" dirty="0">
+                        <a:latin typeface="JetBrains Mono" charset="0"/>
+                        <a:ea typeface="JetBrains Mono" charset="0"/>
+                        <a:cs typeface="JetBrains Mono" charset="0"/>
                       </a:endParaRPr>
                     </a:p>
                   </a:txBody>
-                  <a:tcPr marL="91440" marR="91440" marT="45720" marB="45720" anchor="ctr">
+                  <a:tcPr marL="114300" marR="114300" marT="114300" marB="114300" anchor="ctr">
                     <a:lnL w="6350" cap="flat" cmpd="sng" algn="ctr">
                       <a:solidFill>
                         <a:srgbClr val="E7E5E4"/>
@@ -2559,7 +4828,7 @@
                       <a:tailEnd type="none" w="med" len="med"/>
                     </a:lnB>
                     <a:solidFill>
-                      <a:srgbClr val="0C0A09"/>
+                      <a:srgbClr val="FFFFFF"/>
                     </a:solidFill>
                   </a:tcPr>
                 </a:tc>
@@ -2572,24 +4841,24 @@
                         <a:buNone/>
                       </a:pPr>
                       <a:r>
-                        <a:rPr lang="en-US" sz="1150" b="1" dirty="0">
+                        <a:rPr lang="en-US" sz="900" spc="100" kern="0" dirty="0">
                           <a:solidFill>
-                            <a:srgbClr val="FAFAF9"/>
+                            <a:srgbClr val="78716C"/>
                           </a:solidFill>
-                          <a:latin typeface="Inter" pitchFamily="34" charset="0"/>
-                          <a:ea typeface="Inter" pitchFamily="34" charset="-122"/>
-                          <a:cs typeface="Inter" pitchFamily="34" charset="-120"/>
+                          <a:latin typeface="JetBrains Mono" pitchFamily="34" charset="0"/>
+                          <a:ea typeface="JetBrains Mono" pitchFamily="34" charset="-122"/>
+                          <a:cs typeface="JetBrains Mono" pitchFamily="34" charset="-120"/>
                         </a:rPr>
-                        <a:t>Column heading</a:t>
+                        <a:t>COLUMN</a:t>
                       </a:r>
-                      <a:endParaRPr lang="en-US" sz="1150" dirty="0">
-                        <a:latin typeface="Inter" charset="0"/>
-                        <a:ea typeface="Inter" charset="0"/>
-                        <a:cs typeface="Inter" charset="0"/>
+                      <a:endParaRPr lang="en-US" sz="900" dirty="0">
+                        <a:latin typeface="JetBrains Mono" charset="0"/>
+                        <a:ea typeface="JetBrains Mono" charset="0"/>
+                        <a:cs typeface="JetBrains Mono" charset="0"/>
                       </a:endParaRPr>
                     </a:p>
                   </a:txBody>
-                  <a:tcPr marL="91440" marR="91440" marT="45720" marB="45720" anchor="ctr">
+                  <a:tcPr marL="114300" marR="114300" marT="114300" marB="114300" anchor="ctr">
                     <a:lnL w="6350" cap="flat" cmpd="sng" algn="ctr">
                       <a:solidFill>
                         <a:srgbClr val="E7E5E4"/>
@@ -2627,7 +4896,7 @@
                       <a:tailEnd type="none" w="med" len="med"/>
                     </a:lnB>
                     <a:solidFill>
-                      <a:srgbClr val="0C0A09"/>
+                      <a:srgbClr val="FFFFFF"/>
                     </a:solidFill>
                   </a:tcPr>
                 </a:tc>
@@ -2640,24 +4909,24 @@
                         <a:buNone/>
                       </a:pPr>
                       <a:r>
-                        <a:rPr lang="en-US" sz="1150" b="1" dirty="0">
+                        <a:rPr lang="en-US" sz="900" spc="100" kern="0" dirty="0">
                           <a:solidFill>
-                            <a:srgbClr val="FAFAF9"/>
+                            <a:srgbClr val="78716C"/>
                           </a:solidFill>
-                          <a:latin typeface="Inter" pitchFamily="34" charset="0"/>
-                          <a:ea typeface="Inter" pitchFamily="34" charset="-122"/>
-                          <a:cs typeface="Inter" pitchFamily="34" charset="-120"/>
+                          <a:latin typeface="JetBrains Mono" pitchFamily="34" charset="0"/>
+                          <a:ea typeface="JetBrains Mono" pitchFamily="34" charset="-122"/>
+                          <a:cs typeface="JetBrains Mono" pitchFamily="34" charset="-120"/>
                         </a:rPr>
-                        <a:t>Column heading</a:t>
+                        <a:t>COLUMN</a:t>
                       </a:r>
-                      <a:endParaRPr lang="en-US" sz="1150" dirty="0">
-                        <a:latin typeface="Inter" charset="0"/>
-                        <a:ea typeface="Inter" charset="0"/>
-                        <a:cs typeface="Inter" charset="0"/>
+                      <a:endParaRPr lang="en-US" sz="900" dirty="0">
+                        <a:latin typeface="JetBrains Mono" charset="0"/>
+                        <a:ea typeface="JetBrains Mono" charset="0"/>
+                        <a:cs typeface="JetBrains Mono" charset="0"/>
                       </a:endParaRPr>
                     </a:p>
                   </a:txBody>
-                  <a:tcPr marL="91440" marR="91440" marT="45720" marB="45720" anchor="ctr">
+                  <a:tcPr marL="114300" marR="114300" marT="114300" marB="114300" anchor="ctr">
                     <a:lnL w="6350" cap="flat" cmpd="sng" algn="ctr">
                       <a:solidFill>
                         <a:srgbClr val="E7E5E4"/>
@@ -2695,12 +4964,12 @@
                       <a:tailEnd type="none" w="med" len="med"/>
                     </a:lnB>
                     <a:solidFill>
-                      <a:srgbClr val="0C0A09"/>
+                      <a:srgbClr val="FFFFFF"/>
                     </a:solidFill>
                   </a:tcPr>
                 </a:tc>
               </a:tr>
-              <a:tr h="402336">
+              <a:tr h="475488">
                 <a:tc>
                   <a:txBody>
                     <a:bodyPr/>
@@ -2712,7 +4981,7 @@
                       <a:r>
                         <a:rPr lang="en-US" sz="1200" dirty="0">
                           <a:solidFill>
-                            <a:srgbClr val="0C0A09"/>
+                            <a:srgbClr val="44403C"/>
                           </a:solidFill>
                           <a:latin typeface="Inter" pitchFamily="34" charset="0"/>
                           <a:ea typeface="Inter" pitchFamily="34" charset="-122"/>
@@ -2727,7 +4996,7 @@
                       </a:endParaRPr>
                     </a:p>
                   </a:txBody>
-                  <a:tcPr marL="91440" marR="91440" marT="45720" marB="45720" anchor="ctr">
+                  <a:tcPr marL="114300" marR="114300" marT="114300" marB="114300" anchor="ctr">
                     <a:lnL w="6350" cap="flat" cmpd="sng" algn="ctr">
                       <a:solidFill>
                         <a:srgbClr val="E7E5E4"/>
@@ -2780,7 +5049,7 @@
                       <a:r>
                         <a:rPr lang="en-US" sz="1200" dirty="0">
                           <a:solidFill>
-                            <a:srgbClr val="0C0A09"/>
+                            <a:srgbClr val="57534E"/>
                           </a:solidFill>
                           <a:latin typeface="Inter" pitchFamily="34" charset="0"/>
                           <a:ea typeface="Inter" pitchFamily="34" charset="-122"/>
@@ -2795,7 +5064,7 @@
                       </a:endParaRPr>
                     </a:p>
                   </a:txBody>
-                  <a:tcPr marL="91440" marR="91440" marT="45720" marB="45720" anchor="ctr">
+                  <a:tcPr marL="114300" marR="114300" marT="114300" marB="114300" anchor="ctr">
                     <a:lnL w="6350" cap="flat" cmpd="sng" algn="ctr">
                       <a:solidFill>
                         <a:srgbClr val="E7E5E4"/>
@@ -2848,7 +5117,7 @@
                       <a:r>
                         <a:rPr lang="en-US" sz="1200" dirty="0">
                           <a:solidFill>
-                            <a:srgbClr val="0C0A09"/>
+                            <a:srgbClr val="57534E"/>
                           </a:solidFill>
                           <a:latin typeface="Inter" pitchFamily="34" charset="0"/>
                           <a:ea typeface="Inter" pitchFamily="34" charset="-122"/>
@@ -2863,7 +5132,7 @@
                       </a:endParaRPr>
                     </a:p>
                   </a:txBody>
-                  <a:tcPr marL="91440" marR="91440" marT="45720" marB="45720" anchor="ctr">
+                  <a:tcPr marL="114300" marR="114300" marT="114300" marB="114300" anchor="ctr">
                     <a:lnL w="6350" cap="flat" cmpd="sng" algn="ctr">
                       <a:solidFill>
                         <a:srgbClr val="E7E5E4"/>
@@ -2916,7 +5185,7 @@
                       <a:r>
                         <a:rPr lang="en-US" sz="1200" dirty="0">
                           <a:solidFill>
-                            <a:srgbClr val="0C0A09"/>
+                            <a:srgbClr val="57534E"/>
                           </a:solidFill>
                           <a:latin typeface="Inter" pitchFamily="34" charset="0"/>
                           <a:ea typeface="Inter" pitchFamily="34" charset="-122"/>
@@ -2931,7 +5200,7 @@
                       </a:endParaRPr>
                     </a:p>
                   </a:txBody>
-                  <a:tcPr marL="91440" marR="91440" marT="45720" marB="45720" anchor="ctr">
+                  <a:tcPr marL="114300" marR="114300" marT="114300" marB="114300" anchor="ctr">
                     <a:lnL w="6350" cap="flat" cmpd="sng" algn="ctr">
                       <a:solidFill>
                         <a:srgbClr val="E7E5E4"/>
@@ -2974,7 +5243,7 @@
                   </a:tcPr>
                 </a:tc>
               </a:tr>
-              <a:tr h="402336">
+              <a:tr h="475488">
                 <a:tc>
                   <a:txBody>
                     <a:bodyPr/>
@@ -2986,7 +5255,7 @@
                       <a:r>
                         <a:rPr lang="en-US" sz="1200" dirty="0">
                           <a:solidFill>
-                            <a:srgbClr val="0C0A09"/>
+                            <a:srgbClr val="44403C"/>
                           </a:solidFill>
                           <a:latin typeface="Inter" pitchFamily="34" charset="0"/>
                           <a:ea typeface="Inter" pitchFamily="34" charset="-122"/>
@@ -3001,7 +5270,7 @@
                       </a:endParaRPr>
                     </a:p>
                   </a:txBody>
-                  <a:tcPr marL="91440" marR="91440" marT="45720" marB="45720" anchor="ctr">
+                  <a:tcPr marL="114300" marR="114300" marT="114300" marB="114300" anchor="ctr">
                     <a:lnL w="6350" cap="flat" cmpd="sng" algn="ctr">
                       <a:solidFill>
                         <a:srgbClr val="E7E5E4"/>
@@ -3054,7 +5323,7 @@
                       <a:r>
                         <a:rPr lang="en-US" sz="1200" dirty="0">
                           <a:solidFill>
-                            <a:srgbClr val="0C0A09"/>
+                            <a:srgbClr val="57534E"/>
                           </a:solidFill>
                           <a:latin typeface="Inter" pitchFamily="34" charset="0"/>
                           <a:ea typeface="Inter" pitchFamily="34" charset="-122"/>
@@ -3069,7 +5338,7 @@
                       </a:endParaRPr>
                     </a:p>
                   </a:txBody>
-                  <a:tcPr marL="91440" marR="91440" marT="45720" marB="45720" anchor="ctr">
+                  <a:tcPr marL="114300" marR="114300" marT="114300" marB="114300" anchor="ctr">
                     <a:lnL w="6350" cap="flat" cmpd="sng" algn="ctr">
                       <a:solidFill>
                         <a:srgbClr val="E7E5E4"/>
@@ -3122,7 +5391,7 @@
                       <a:r>
                         <a:rPr lang="en-US" sz="1200" dirty="0">
                           <a:solidFill>
-                            <a:srgbClr val="0C0A09"/>
+                            <a:srgbClr val="57534E"/>
                           </a:solidFill>
                           <a:latin typeface="Inter" pitchFamily="34" charset="0"/>
                           <a:ea typeface="Inter" pitchFamily="34" charset="-122"/>
@@ -3137,7 +5406,7 @@
                       </a:endParaRPr>
                     </a:p>
                   </a:txBody>
-                  <a:tcPr marL="91440" marR="91440" marT="45720" marB="45720" anchor="ctr">
+                  <a:tcPr marL="114300" marR="114300" marT="114300" marB="114300" anchor="ctr">
                     <a:lnL w="6350" cap="flat" cmpd="sng" algn="ctr">
                       <a:solidFill>
                         <a:srgbClr val="E7E5E4"/>
@@ -3190,7 +5459,7 @@
                       <a:r>
                         <a:rPr lang="en-US" sz="1200" dirty="0">
                           <a:solidFill>
-                            <a:srgbClr val="0C0A09"/>
+                            <a:srgbClr val="57534E"/>
                           </a:solidFill>
                           <a:latin typeface="Inter" pitchFamily="34" charset="0"/>
                           <a:ea typeface="Inter" pitchFamily="34" charset="-122"/>
@@ -3205,7 +5474,7 @@
                       </a:endParaRPr>
                     </a:p>
                   </a:txBody>
-                  <a:tcPr marL="91440" marR="91440" marT="45720" marB="45720" anchor="ctr">
+                  <a:tcPr marL="114300" marR="114300" marT="114300" marB="114300" anchor="ctr">
                     <a:lnL w="6350" cap="flat" cmpd="sng" algn="ctr">
                       <a:solidFill>
                         <a:srgbClr val="E7E5E4"/>
@@ -3248,7 +5517,7 @@
                   </a:tcPr>
                 </a:tc>
               </a:tr>
-              <a:tr h="402336">
+              <a:tr h="475488">
                 <a:tc>
                   <a:txBody>
                     <a:bodyPr/>
@@ -3260,7 +5529,7 @@
                       <a:r>
                         <a:rPr lang="en-US" sz="1200" dirty="0">
                           <a:solidFill>
-                            <a:srgbClr val="0C0A09"/>
+                            <a:srgbClr val="44403C"/>
                           </a:solidFill>
                           <a:latin typeface="Inter" pitchFamily="34" charset="0"/>
                           <a:ea typeface="Inter" pitchFamily="34" charset="-122"/>
@@ -3275,7 +5544,7 @@
                       </a:endParaRPr>
                     </a:p>
                   </a:txBody>
-                  <a:tcPr marL="91440" marR="91440" marT="45720" marB="45720" anchor="ctr">
+                  <a:tcPr marL="114300" marR="114300" marT="114300" marB="114300" anchor="ctr">
                     <a:lnL w="6350" cap="flat" cmpd="sng" algn="ctr">
                       <a:solidFill>
                         <a:srgbClr val="E7E5E4"/>
@@ -3328,7 +5597,7 @@
                       <a:r>
                         <a:rPr lang="en-US" sz="1200" dirty="0">
                           <a:solidFill>
-                            <a:srgbClr val="0C0A09"/>
+                            <a:srgbClr val="57534E"/>
                           </a:solidFill>
                           <a:latin typeface="Inter" pitchFamily="34" charset="0"/>
                           <a:ea typeface="Inter" pitchFamily="34" charset="-122"/>
@@ -3343,7 +5612,7 @@
                       </a:endParaRPr>
                     </a:p>
                   </a:txBody>
-                  <a:tcPr marL="91440" marR="91440" marT="45720" marB="45720" anchor="ctr">
+                  <a:tcPr marL="114300" marR="114300" marT="114300" marB="114300" anchor="ctr">
                     <a:lnL w="6350" cap="flat" cmpd="sng" algn="ctr">
                       <a:solidFill>
                         <a:srgbClr val="E7E5E4"/>
@@ -3396,7 +5665,7 @@
                       <a:r>
                         <a:rPr lang="en-US" sz="1200" dirty="0">
                           <a:solidFill>
-                            <a:srgbClr val="0C0A09"/>
+                            <a:srgbClr val="57534E"/>
                           </a:solidFill>
                           <a:latin typeface="Inter" pitchFamily="34" charset="0"/>
                           <a:ea typeface="Inter" pitchFamily="34" charset="-122"/>
@@ -3411,7 +5680,7 @@
                       </a:endParaRPr>
                     </a:p>
                   </a:txBody>
-                  <a:tcPr marL="91440" marR="91440" marT="45720" marB="45720" anchor="ctr">
+                  <a:tcPr marL="114300" marR="114300" marT="114300" marB="114300" anchor="ctr">
                     <a:lnL w="6350" cap="flat" cmpd="sng" algn="ctr">
                       <a:solidFill>
                         <a:srgbClr val="E7E5E4"/>
@@ -3464,7 +5733,7 @@
                       <a:r>
                         <a:rPr lang="en-US" sz="1200" dirty="0">
                           <a:solidFill>
-                            <a:srgbClr val="0C0A09"/>
+                            <a:srgbClr val="57534E"/>
                           </a:solidFill>
                           <a:latin typeface="Inter" pitchFamily="34" charset="0"/>
                           <a:ea typeface="Inter" pitchFamily="34" charset="-122"/>
@@ -3479,7 +5748,7 @@
                       </a:endParaRPr>
                     </a:p>
                   </a:txBody>
-                  <a:tcPr marL="91440" marR="91440" marT="45720" marB="45720" anchor="ctr">
+                  <a:tcPr marL="114300" marR="114300" marT="114300" marB="114300" anchor="ctr">
                     <a:lnL w="6350" cap="flat" cmpd="sng" algn="ctr">
                       <a:solidFill>
                         <a:srgbClr val="E7E5E4"/>
@@ -3522,7 +5791,7 @@
                   </a:tcPr>
                 </a:tc>
               </a:tr>
-              <a:tr h="402336">
+              <a:tr h="475488">
                 <a:tc>
                   <a:txBody>
                     <a:bodyPr/>
@@ -3534,7 +5803,7 @@
                       <a:r>
                         <a:rPr lang="en-US" sz="1200" dirty="0">
                           <a:solidFill>
-                            <a:srgbClr val="0C0A09"/>
+                            <a:srgbClr val="44403C"/>
                           </a:solidFill>
                           <a:latin typeface="Inter" pitchFamily="34" charset="0"/>
                           <a:ea typeface="Inter" pitchFamily="34" charset="-122"/>
@@ -3549,7 +5818,7 @@
                       </a:endParaRPr>
                     </a:p>
                   </a:txBody>
-                  <a:tcPr marL="91440" marR="91440" marT="45720" marB="45720" anchor="ctr">
+                  <a:tcPr marL="114300" marR="114300" marT="114300" marB="114300" anchor="ctr">
                     <a:lnL w="6350" cap="flat" cmpd="sng" algn="ctr">
                       <a:solidFill>
                         <a:srgbClr val="E7E5E4"/>
@@ -3602,7 +5871,7 @@
                       <a:r>
                         <a:rPr lang="en-US" sz="1200" dirty="0">
                           <a:solidFill>
-                            <a:srgbClr val="0C0A09"/>
+                            <a:srgbClr val="57534E"/>
                           </a:solidFill>
                           <a:latin typeface="Inter" pitchFamily="34" charset="0"/>
                           <a:ea typeface="Inter" pitchFamily="34" charset="-122"/>
@@ -3617,7 +5886,7 @@
                       </a:endParaRPr>
                     </a:p>
                   </a:txBody>
-                  <a:tcPr marL="91440" marR="91440" marT="45720" marB="45720" anchor="ctr">
+                  <a:tcPr marL="114300" marR="114300" marT="114300" marB="114300" anchor="ctr">
                     <a:lnL w="6350" cap="flat" cmpd="sng" algn="ctr">
                       <a:solidFill>
                         <a:srgbClr val="E7E5E4"/>
@@ -3670,7 +5939,7 @@
                       <a:r>
                         <a:rPr lang="en-US" sz="1200" dirty="0">
                           <a:solidFill>
-                            <a:srgbClr val="0C0A09"/>
+                            <a:srgbClr val="57534E"/>
                           </a:solidFill>
                           <a:latin typeface="Inter" pitchFamily="34" charset="0"/>
                           <a:ea typeface="Inter" pitchFamily="34" charset="-122"/>
@@ -3685,7 +5954,7 @@
                       </a:endParaRPr>
                     </a:p>
                   </a:txBody>
-                  <a:tcPr marL="91440" marR="91440" marT="45720" marB="45720" anchor="ctr">
+                  <a:tcPr marL="114300" marR="114300" marT="114300" marB="114300" anchor="ctr">
                     <a:lnL w="6350" cap="flat" cmpd="sng" algn="ctr">
                       <a:solidFill>
                         <a:srgbClr val="E7E5E4"/>
@@ -3738,7 +6007,7 @@
                       <a:r>
                         <a:rPr lang="en-US" sz="1200" dirty="0">
                           <a:solidFill>
-                            <a:srgbClr val="0C0A09"/>
+                            <a:srgbClr val="57534E"/>
                           </a:solidFill>
                           <a:latin typeface="Inter" pitchFamily="34" charset="0"/>
                           <a:ea typeface="Inter" pitchFamily="34" charset="-122"/>
@@ -3753,7 +6022,7 @@
                       </a:endParaRPr>
                     </a:p>
                   </a:txBody>
-                  <a:tcPr marL="91440" marR="91440" marT="45720" marB="45720" anchor="ctr">
+                  <a:tcPr marL="114300" marR="114300" marT="114300" marB="114300" anchor="ctr">
                     <a:lnL w="6350" cap="flat" cmpd="sng" algn="ctr">
                       <a:solidFill>
                         <a:srgbClr val="E7E5E4"/>
@@ -3796,7 +6065,7 @@
                   </a:tcPr>
                 </a:tc>
               </a:tr>
-              <a:tr h="402336">
+              <a:tr h="475488">
                 <a:tc>
                   <a:txBody>
                     <a:bodyPr/>
@@ -3808,7 +6077,7 @@
                       <a:r>
                         <a:rPr lang="en-US" sz="1200" dirty="0">
                           <a:solidFill>
-                            <a:srgbClr val="0C0A09"/>
+                            <a:srgbClr val="44403C"/>
                           </a:solidFill>
                           <a:latin typeface="Inter" pitchFamily="34" charset="0"/>
                           <a:ea typeface="Inter" pitchFamily="34" charset="-122"/>
@@ -3823,7 +6092,7 @@
                       </a:endParaRPr>
                     </a:p>
                   </a:txBody>
-                  <a:tcPr marL="91440" marR="91440" marT="45720" marB="45720" anchor="ctr">
+                  <a:tcPr marL="114300" marR="114300" marT="114300" marB="114300" anchor="ctr">
                     <a:lnL w="6350" cap="flat" cmpd="sng" algn="ctr">
                       <a:solidFill>
                         <a:srgbClr val="E7E5E4"/>
@@ -3876,7 +6145,7 @@
                       <a:r>
                         <a:rPr lang="en-US" sz="1200" dirty="0">
                           <a:solidFill>
-                            <a:srgbClr val="0C0A09"/>
+                            <a:srgbClr val="57534E"/>
                           </a:solidFill>
                           <a:latin typeface="Inter" pitchFamily="34" charset="0"/>
                           <a:ea typeface="Inter" pitchFamily="34" charset="-122"/>
@@ -3891,7 +6160,7 @@
                       </a:endParaRPr>
                     </a:p>
                   </a:txBody>
-                  <a:tcPr marL="91440" marR="91440" marT="45720" marB="45720" anchor="ctr">
+                  <a:tcPr marL="114300" marR="114300" marT="114300" marB="114300" anchor="ctr">
                     <a:lnL w="6350" cap="flat" cmpd="sng" algn="ctr">
                       <a:solidFill>
                         <a:srgbClr val="E7E5E4"/>
@@ -3944,7 +6213,7 @@
                       <a:r>
                         <a:rPr lang="en-US" sz="1200" dirty="0">
                           <a:solidFill>
-                            <a:srgbClr val="0C0A09"/>
+                            <a:srgbClr val="57534E"/>
                           </a:solidFill>
                           <a:latin typeface="Inter" pitchFamily="34" charset="0"/>
                           <a:ea typeface="Inter" pitchFamily="34" charset="-122"/>
@@ -3959,7 +6228,7 @@
                       </a:endParaRPr>
                     </a:p>
                   </a:txBody>
-                  <a:tcPr marL="91440" marR="91440" marT="45720" marB="45720" anchor="ctr">
+                  <a:tcPr marL="114300" marR="114300" marT="114300" marB="114300" anchor="ctr">
                     <a:lnL w="6350" cap="flat" cmpd="sng" algn="ctr">
                       <a:solidFill>
                         <a:srgbClr val="E7E5E4"/>
@@ -4012,7 +6281,7 @@
                       <a:r>
                         <a:rPr lang="en-US" sz="1200" dirty="0">
                           <a:solidFill>
-                            <a:srgbClr val="0C0A09"/>
+                            <a:srgbClr val="57534E"/>
                           </a:solidFill>
                           <a:latin typeface="Inter" pitchFamily="34" charset="0"/>
                           <a:ea typeface="Inter" pitchFamily="34" charset="-122"/>
@@ -4027,7 +6296,7 @@
                       </a:endParaRPr>
                     </a:p>
                   </a:txBody>
-                  <a:tcPr marL="91440" marR="91440" marT="45720" marB="45720" anchor="ctr">
+                  <a:tcPr marL="114300" marR="114300" marT="114300" marB="114300" anchor="ctr">
                     <a:lnL w="6350" cap="flat" cmpd="sng" algn="ctr">
                       <a:solidFill>
                         <a:srgbClr val="E7E5E4"/>
@@ -4074,6 +6343,321 @@
           </a:graphicData>
         </a:graphic>
       </p:graphicFrame>
+      <p:sp>
+        <p:nvSpPr>
+          <p:cNvPr id="6" name="Shape 3"/>
+          <p:cNvSpPr/>
+          <p:nvPr/>
+        </p:nvSpPr>
+        <p:spPr>
+          <a:xfrm>
+            <a:off x="502920" y="1890065"/>
+            <a:ext cx="5120640" cy="5486"/>
+          </a:xfrm>
+          <a:prstGeom prst="rect">
+            <a:avLst/>
+          </a:prstGeom>
+          <a:solidFill>
+            <a:srgbClr val="E7E5E4"/>
+          </a:solidFill>
+          <a:ln w="12700">
+            <a:solidFill>
+              <a:srgbClr val="E7E5E4"/>
+            </a:solidFill>
+            <a:prstDash val="solid"/>
+          </a:ln>
+        </p:spPr>
+      </p:sp>
+      <p:sp>
+        <p:nvSpPr>
+          <p:cNvPr id="7" name="Shape 4"/>
+          <p:cNvSpPr/>
+          <p:nvPr/>
+        </p:nvSpPr>
+        <p:spPr>
+          <a:xfrm>
+            <a:off x="502920" y="2365553"/>
+            <a:ext cx="5120640" cy="5486"/>
+          </a:xfrm>
+          <a:prstGeom prst="rect">
+            <a:avLst/>
+          </a:prstGeom>
+          <a:solidFill>
+            <a:srgbClr val="E7E5E4"/>
+          </a:solidFill>
+          <a:ln w="12700">
+            <a:solidFill>
+              <a:srgbClr val="E7E5E4"/>
+            </a:solidFill>
+            <a:prstDash val="solid"/>
+          </a:ln>
+        </p:spPr>
+      </p:sp>
+      <p:sp>
+        <p:nvSpPr>
+          <p:cNvPr id="8" name="Shape 5"/>
+          <p:cNvSpPr/>
+          <p:nvPr/>
+        </p:nvSpPr>
+        <p:spPr>
+          <a:xfrm>
+            <a:off x="502920" y="2841041"/>
+            <a:ext cx="5120640" cy="5486"/>
+          </a:xfrm>
+          <a:prstGeom prst="rect">
+            <a:avLst/>
+          </a:prstGeom>
+          <a:solidFill>
+            <a:srgbClr val="E7E5E4"/>
+          </a:solidFill>
+          <a:ln w="12700">
+            <a:solidFill>
+              <a:srgbClr val="E7E5E4"/>
+            </a:solidFill>
+            <a:prstDash val="solid"/>
+          </a:ln>
+        </p:spPr>
+      </p:sp>
+      <p:sp>
+        <p:nvSpPr>
+          <p:cNvPr id="9" name="Shape 6"/>
+          <p:cNvSpPr/>
+          <p:nvPr/>
+        </p:nvSpPr>
+        <p:spPr>
+          <a:xfrm>
+            <a:off x="502920" y="3316529"/>
+            <a:ext cx="5120640" cy="5486"/>
+          </a:xfrm>
+          <a:prstGeom prst="rect">
+            <a:avLst/>
+          </a:prstGeom>
+          <a:solidFill>
+            <a:srgbClr val="E7E5E4"/>
+          </a:solidFill>
+          <a:ln w="12700">
+            <a:solidFill>
+              <a:srgbClr val="E7E5E4"/>
+            </a:solidFill>
+            <a:prstDash val="solid"/>
+          </a:ln>
+        </p:spPr>
+      </p:sp>
+      <p:sp>
+        <p:nvSpPr>
+          <p:cNvPr id="10" name="Shape 7"/>
+          <p:cNvSpPr/>
+          <p:nvPr/>
+        </p:nvSpPr>
+        <p:spPr>
+          <a:xfrm>
+            <a:off x="502920" y="3792017"/>
+            <a:ext cx="5120640" cy="5486"/>
+          </a:xfrm>
+          <a:prstGeom prst="rect">
+            <a:avLst/>
+          </a:prstGeom>
+          <a:solidFill>
+            <a:srgbClr val="E7E5E4"/>
+          </a:solidFill>
+          <a:ln w="12700">
+            <a:solidFill>
+              <a:srgbClr val="E7E5E4"/>
+            </a:solidFill>
+            <a:prstDash val="solid"/>
+          </a:ln>
+        </p:spPr>
+      </p:sp>
+      <p:sp>
+        <p:nvSpPr>
+          <p:cNvPr id="11" name="Shape 8"/>
+          <p:cNvSpPr/>
+          <p:nvPr/>
+        </p:nvSpPr>
+        <p:spPr>
+          <a:xfrm>
+            <a:off x="502920" y="4267505"/>
+            <a:ext cx="5120640" cy="5486"/>
+          </a:xfrm>
+          <a:prstGeom prst="rect">
+            <a:avLst/>
+          </a:prstGeom>
+          <a:solidFill>
+            <a:srgbClr val="E7E5E4"/>
+          </a:solidFill>
+          <a:ln w="12700">
+            <a:solidFill>
+              <a:srgbClr val="E7E5E4"/>
+            </a:solidFill>
+            <a:prstDash val="solid"/>
+          </a:ln>
+        </p:spPr>
+      </p:sp>
+      <p:sp>
+        <p:nvSpPr>
+          <p:cNvPr id="12" name="Text 9"/>
+          <p:cNvSpPr/>
+          <p:nvPr/>
+        </p:nvSpPr>
+        <p:spPr>
+          <a:xfrm>
+            <a:off x="5806440" y="1417320"/>
+            <a:ext cx="4572000" cy="164592"/>
+          </a:xfrm>
+          <a:prstGeom prst="rect">
+            <a:avLst/>
+          </a:prstGeom>
+          <a:noFill/>
+          <a:ln/>
+        </p:spPr>
+        <p:txBody>
+          <a:bodyPr wrap="square" lIns="0" tIns="0" rIns="0" bIns="0" rtlCol="0" anchor="ctr"/>
+          <a:lstStyle/>
+          <a:p>
+            <a:pPr indent="0" marL="0">
+              <a:buNone/>
+            </a:pPr>
+            <a:r>
+              <a:rPr lang="en-US" sz="850" spc="150" kern="0" dirty="0">
+                <a:solidFill>
+                  <a:srgbClr val="78716C"/>
+                </a:solidFill>
+                <a:latin typeface="JetBrains Mono" pitchFamily="34" charset="0"/>
+                <a:ea typeface="JetBrains Mono" pitchFamily="34" charset="-122"/>
+                <a:cs typeface="JetBrains Mono" pitchFamily="34" charset="-120"/>
+              </a:rPr>
+              <a:t>CONTEXT</a:t>
+            </a:r>
+            <a:endParaRPr lang="en-US" sz="850" dirty="0"/>
+          </a:p>
+        </p:txBody>
+      </p:sp>
+      <p:sp>
+        <p:nvSpPr>
+          <p:cNvPr id="13" name="Shape 10"/>
+          <p:cNvSpPr/>
+          <p:nvPr/>
+        </p:nvSpPr>
+        <p:spPr>
+          <a:xfrm>
+            <a:off x="5806440" y="1618488"/>
+            <a:ext cx="914400" cy="4572"/>
+          </a:xfrm>
+          <a:prstGeom prst="rect">
+            <a:avLst/>
+          </a:prstGeom>
+          <a:solidFill>
+            <a:srgbClr val="6330F5"/>
+          </a:solidFill>
+          <a:ln w="12700">
+            <a:solidFill>
+              <a:srgbClr val="6330F5"/>
+            </a:solidFill>
+            <a:prstDash val="solid"/>
+          </a:ln>
+        </p:spPr>
+      </p:sp>
+      <p:sp>
+        <p:nvSpPr>
+          <p:cNvPr id="14" name="Text 11"/>
+          <p:cNvSpPr/>
+          <p:nvPr/>
+        </p:nvSpPr>
+        <p:spPr>
+          <a:xfrm>
+            <a:off x="5806440" y="1764792"/>
+            <a:ext cx="2834640" cy="1097280"/>
+          </a:xfrm>
+          <a:prstGeom prst="rect">
+            <a:avLst/>
+          </a:prstGeom>
+          <a:noFill/>
+          <a:ln/>
+        </p:spPr>
+        <p:txBody>
+          <a:bodyPr wrap="square" lIns="0" tIns="0" rIns="0" bIns="0" rtlCol="0" anchor="t"/>
+          <a:lstStyle/>
+          <a:p>
+            <a:pPr indent="0" marL="0">
+              <a:lnSpc>
+                <a:spcPct val="115000"/>
+              </a:lnSpc>
+              <a:buNone/>
+            </a:pPr>
+            <a:r>
+              <a:rPr lang="en-US" sz="2200" dirty="0">
+                <a:solidFill>
+                  <a:srgbClr val="0C0A09"/>
+                </a:solidFill>
+                <a:latin typeface="Nanum Myeongjo" pitchFamily="34" charset="0"/>
+                <a:ea typeface="Nanum Myeongjo" pitchFamily="34" charset="-122"/>
+                <a:cs typeface="Nanum Myeongjo" pitchFamily="34" charset="-120"/>
+              </a:rPr>
+              <a:t>Use this space to </a:t>
+            </a:r>
+            <a:pPr indent="0" marL="0">
+              <a:lnSpc>
+                <a:spcPct val="115000"/>
+              </a:lnSpc>
+              <a:buNone/>
+            </a:pPr>
+            <a:r>
+              <a:rPr lang="en-US" sz="2200" i="1" dirty="0">
+                <a:solidFill>
+                  <a:srgbClr val="6330F5"/>
+                </a:solidFill>
+                <a:latin typeface="Nanum Myeongjo" pitchFamily="34" charset="0"/>
+                <a:ea typeface="Nanum Myeongjo" pitchFamily="34" charset="-122"/>
+                <a:cs typeface="Nanum Myeongjo" pitchFamily="34" charset="-120"/>
+              </a:rPr>
+              <a:t>frame the data.</a:t>
+            </a:r>
+            <a:endParaRPr lang="en-US" sz="2200" dirty="0"/>
+          </a:p>
+        </p:txBody>
+      </p:sp>
+      <p:sp>
+        <p:nvSpPr>
+          <p:cNvPr id="15" name="Text 12"/>
+          <p:cNvSpPr/>
+          <p:nvPr/>
+        </p:nvSpPr>
+        <p:spPr>
+          <a:xfrm>
+            <a:off x="5806440" y="3017520"/>
+            <a:ext cx="2834640" cy="1554480"/>
+          </a:xfrm>
+          <a:prstGeom prst="rect">
+            <a:avLst/>
+          </a:prstGeom>
+          <a:noFill/>
+          <a:ln/>
+        </p:spPr>
+        <p:txBody>
+          <a:bodyPr wrap="square" lIns="0" tIns="0" rIns="0" bIns="0" rtlCol="0" anchor="t"/>
+          <a:lstStyle/>
+          <a:p>
+            <a:pPr indent="0" marL="0">
+              <a:lnSpc>
+                <a:spcPct val="150000"/>
+              </a:lnSpc>
+              <a:buNone/>
+            </a:pPr>
+            <a:r>
+              <a:rPr lang="en-US" sz="1200" dirty="0">
+                <a:solidFill>
+                  <a:srgbClr val="57534E"/>
+                </a:solidFill>
+                <a:latin typeface="Inter" pitchFamily="34" charset="0"/>
+                <a:ea typeface="Inter" pitchFamily="34" charset="-122"/>
+                <a:cs typeface="Inter" pitchFamily="34" charset="-120"/>
+              </a:rPr>
+              <a:t>Provide the narrative context that the table cannot. What should the reader conclude? What action does this support?</a:t>
+            </a:r>
+            <a:endParaRPr lang="en-US" sz="1200" dirty="0"/>
+          </a:p>
+        </p:txBody>
+      </p:sp>
     </p:spTree>
   </p:cSld>
   <p:clrMapOvr>
@@ -4139,6 +6723,3853 @@
                 <a:ea typeface="JetBrains Mono" pitchFamily="34" charset="-122"/>
                 <a:cs typeface="JetBrains Mono" pitchFamily="34" charset="-120"/>
               </a:rPr>
+              <a:t>DATA</a:t>
+            </a:r>
+            <a:endParaRPr lang="en-US" sz="850" dirty="0"/>
+          </a:p>
+        </p:txBody>
+      </p:sp>
+      <p:sp>
+        <p:nvSpPr>
+          <p:cNvPr id="3" name="Shape 1"/>
+          <p:cNvSpPr/>
+          <p:nvPr/>
+        </p:nvSpPr>
+        <p:spPr>
+          <a:xfrm>
+            <a:off x="502920" y="585216"/>
+            <a:ext cx="914400" cy="4572"/>
+          </a:xfrm>
+          <a:prstGeom prst="rect">
+            <a:avLst/>
+          </a:prstGeom>
+          <a:solidFill>
+            <a:srgbClr val="6330F5"/>
+          </a:solidFill>
+          <a:ln w="12700">
+            <a:solidFill>
+              <a:srgbClr val="6330F5"/>
+            </a:solidFill>
+            <a:prstDash val="solid"/>
+          </a:ln>
+        </p:spPr>
+      </p:sp>
+      <p:sp>
+        <p:nvSpPr>
+          <p:cNvPr id="4" name="Text 2"/>
+          <p:cNvSpPr/>
+          <p:nvPr/>
+        </p:nvSpPr>
+        <p:spPr>
+          <a:xfrm>
+            <a:off x="502920" y="713232"/>
+            <a:ext cx="7772400" cy="548640"/>
+          </a:xfrm>
+          <a:prstGeom prst="rect">
+            <a:avLst/>
+          </a:prstGeom>
+          <a:noFill/>
+          <a:ln/>
+        </p:spPr>
+        <p:txBody>
+          <a:bodyPr wrap="square" lIns="0" tIns="0" rIns="0" bIns="0" rtlCol="0" anchor="t"/>
+          <a:lstStyle/>
+          <a:p>
+            <a:pPr indent="0" marL="0">
+              <a:lnSpc>
+                <a:spcPct val="110000"/>
+              </a:lnSpc>
+              <a:buNone/>
+            </a:pPr>
+            <a:r>
+              <a:rPr lang="en-US" sz="2600" dirty="0">
+                <a:solidFill>
+                  <a:srgbClr val="0C0A09"/>
+                </a:solidFill>
+                <a:latin typeface="Nanum Myeongjo" pitchFamily="34" charset="0"/>
+                <a:ea typeface="Nanum Myeongjo" pitchFamily="34" charset="-122"/>
+                <a:cs typeface="Nanum Myeongjo" pitchFamily="34" charset="-120"/>
+              </a:rPr>
+              <a:t>Table with a </a:t>
+            </a:r>
+            <a:pPr indent="0" marL="0">
+              <a:lnSpc>
+                <a:spcPct val="110000"/>
+              </a:lnSpc>
+              <a:buNone/>
+            </a:pPr>
+            <a:r>
+              <a:rPr lang="en-US" sz="2600" i="1" dirty="0">
+                <a:solidFill>
+                  <a:srgbClr val="6330F5"/>
+                </a:solidFill>
+                <a:latin typeface="Nanum Myeongjo" pitchFamily="34" charset="0"/>
+                <a:ea typeface="Nanum Myeongjo" pitchFamily="34" charset="-122"/>
+                <a:cs typeface="Nanum Myeongjo" pitchFamily="34" charset="-120"/>
+              </a:rPr>
+              <a:t>row label column.</a:t>
+            </a:r>
+            <a:endParaRPr lang="en-US" sz="2600" dirty="0"/>
+          </a:p>
+        </p:txBody>
+      </p:sp>
+      <p:graphicFrame>
+        <p:nvGraphicFramePr>
+          <p:cNvPr id="12" name="Table 0"/>
+          <p:cNvGraphicFramePr>
+            <a:graphicFrameLocks noGrp="1"/>
+          </p:cNvGraphicFramePr>
+          <p:nvPr>
+            <p:extLst>
+              <p:ext uri="{D42A27DB-BD31-4B8C-83A1-F6EECF244321}">
+                <p14:modId xmlns:p14="http://schemas.microsoft.com/office/powerpoint/2010/main" val="1579011935"/>
+              </p:ext>
+            </p:extLst>
+          </p:nvPr>
+        </p:nvGraphicFramePr>
+        <p:xfrm>
+          <a:off x="502920" y="1417320"/>
+          <a:ext cx="5120640" cy="914400"/>
+        </p:xfrm>
+        <a:graphic>
+          <a:graphicData uri="http://schemas.openxmlformats.org/drawingml/2006/table">
+            <a:tbl>
+              <a:tblPr/>
+              <a:tblGrid>
+                <a:gridCol w="1371600"/>
+                <a:gridCol w="1874520"/>
+                <a:gridCol w="1874520"/>
+              </a:tblGrid>
+              <a:tr h="475488">
+                <a:tc>
+                  <a:txBody>
+                    <a:bodyPr/>
+                    <a:lstStyle/>
+                    <a:p>
+                      <a:pPr algn="l" indent="0" marL="0">
+                        <a:buNone/>
+                      </a:pPr>
+                      <a:r>
+                        <a:rPr lang="en-US" sz="900" spc="100" kern="0" dirty="0">
+                          <a:solidFill>
+                            <a:srgbClr val="44403C"/>
+                          </a:solidFill>
+                          <a:latin typeface="JetBrains Mono" pitchFamily="34" charset="0"/>
+                          <a:ea typeface="JetBrains Mono" pitchFamily="34" charset="-122"/>
+                          <a:cs typeface="JetBrains Mono" pitchFamily="34" charset="-120"/>
+                        </a:rPr>
+                        <a:t>ROW LABEL</a:t>
+                      </a:r>
+                      <a:endParaRPr lang="en-US" sz="900" dirty="0">
+                        <a:latin typeface="JetBrains Mono" charset="0"/>
+                        <a:ea typeface="JetBrains Mono" charset="0"/>
+                        <a:cs typeface="JetBrains Mono" charset="0"/>
+                      </a:endParaRPr>
+                    </a:p>
+                  </a:txBody>
+                  <a:tcPr marL="114300" marR="114300" marT="114300" marB="114300" anchor="ctr">
+                    <a:lnL w="6350" cap="flat" cmpd="sng" algn="ctr">
+                      <a:solidFill>
+                        <a:srgbClr val="E7E5E4"/>
+                      </a:solidFill>
+                      <a:prstDash val="solid"/>
+                      <a:round/>
+                      <a:headEnd type="none" w="med" len="med"/>
+                      <a:tailEnd type="none" w="med" len="med"/>
+                    </a:lnL>
+                    <a:lnR w="6350" cap="flat" cmpd="sng" algn="ctr">
+                      <a:solidFill>
+                        <a:srgbClr val="E7E5E4"/>
+                      </a:solidFill>
+                      <a:prstDash val="solid"/>
+                      <a:round/>
+                      <a:headEnd type="none" w="med" len="med"/>
+                      <a:tailEnd type="none" w="med" len="med"/>
+                    </a:lnR>
+                    <a:lnT w="6350" cap="flat" cmpd="sng" algn="ctr">
+                      <a:solidFill>
+                        <a:srgbClr val="E7E5E4"/>
+                      </a:solidFill>
+                      <a:prstDash val="solid"/>
+                      <a:round/>
+                      <a:headEnd type="none" w="med" len="med"/>
+                      <a:tailEnd type="none" w="med" len="med"/>
+                    </a:lnT>
+                    <a:lnB w="6350" cap="flat" cmpd="sng" algn="ctr">
+                      <a:solidFill>
+                        <a:srgbClr val="E7E5E4"/>
+                      </a:solidFill>
+                      <a:prstDash val="solid"/>
+                      <a:round/>
+                      <a:headEnd type="none" w="med" len="med"/>
+                      <a:tailEnd type="none" w="med" len="med"/>
+                    </a:lnB>
+                    <a:solidFill>
+                      <a:srgbClr val="FFFFFF"/>
+                    </a:solidFill>
+                  </a:tcPr>
+                </a:tc>
+                <a:tc>
+                  <a:txBody>
+                    <a:bodyPr/>
+                    <a:lstStyle/>
+                    <a:p>
+                      <a:pPr algn="l" indent="0" marL="0">
+                        <a:buNone/>
+                      </a:pPr>
+                      <a:r>
+                        <a:rPr lang="en-US" sz="1200" dirty="0">
+                          <a:solidFill>
+                            <a:srgbClr val="57534E"/>
+                          </a:solidFill>
+                          <a:latin typeface="Inter" pitchFamily="34" charset="0"/>
+                          <a:ea typeface="Inter" pitchFamily="34" charset="-122"/>
+                          <a:cs typeface="Inter" pitchFamily="34" charset="-120"/>
+                        </a:rPr>
+                        <a:t>Row data</a:t>
+                      </a:r>
+                      <a:endParaRPr lang="en-US" sz="1200" dirty="0">
+                        <a:latin typeface="Inter" charset="0"/>
+                        <a:ea typeface="Inter" charset="0"/>
+                        <a:cs typeface="Inter" charset="0"/>
+                      </a:endParaRPr>
+                    </a:p>
+                  </a:txBody>
+                  <a:tcPr marL="114300" marR="114300" marT="114300" marB="114300" anchor="ctr">
+                    <a:lnL w="6350" cap="flat" cmpd="sng" algn="ctr">
+                      <a:solidFill>
+                        <a:srgbClr val="E7E5E4"/>
+                      </a:solidFill>
+                      <a:prstDash val="solid"/>
+                      <a:round/>
+                      <a:headEnd type="none" w="med" len="med"/>
+                      <a:tailEnd type="none" w="med" len="med"/>
+                    </a:lnL>
+                    <a:lnR w="6350" cap="flat" cmpd="sng" algn="ctr">
+                      <a:solidFill>
+                        <a:srgbClr val="E7E5E4"/>
+                      </a:solidFill>
+                      <a:prstDash val="solid"/>
+                      <a:round/>
+                      <a:headEnd type="none" w="med" len="med"/>
+                      <a:tailEnd type="none" w="med" len="med"/>
+                    </a:lnR>
+                    <a:lnT w="6350" cap="flat" cmpd="sng" algn="ctr">
+                      <a:solidFill>
+                        <a:srgbClr val="E7E5E4"/>
+                      </a:solidFill>
+                      <a:prstDash val="solid"/>
+                      <a:round/>
+                      <a:headEnd type="none" w="med" len="med"/>
+                      <a:tailEnd type="none" w="med" len="med"/>
+                    </a:lnT>
+                    <a:lnB w="6350" cap="flat" cmpd="sng" algn="ctr">
+                      <a:solidFill>
+                        <a:srgbClr val="E7E5E4"/>
+                      </a:solidFill>
+                      <a:prstDash val="solid"/>
+                      <a:round/>
+                      <a:headEnd type="none" w="med" len="med"/>
+                      <a:tailEnd type="none" w="med" len="med"/>
+                    </a:lnB>
+                    <a:solidFill>
+                      <a:srgbClr val="FFFFFF"/>
+                    </a:solidFill>
+                  </a:tcPr>
+                </a:tc>
+                <a:tc>
+                  <a:txBody>
+                    <a:bodyPr/>
+                    <a:lstStyle/>
+                    <a:p>
+                      <a:pPr algn="l" indent="0" marL="0">
+                        <a:buNone/>
+                      </a:pPr>
+                      <a:r>
+                        <a:rPr lang="en-US" sz="1200" dirty="0">
+                          <a:solidFill>
+                            <a:srgbClr val="57534E"/>
+                          </a:solidFill>
+                          <a:latin typeface="Inter" pitchFamily="34" charset="0"/>
+                          <a:ea typeface="Inter" pitchFamily="34" charset="-122"/>
+                          <a:cs typeface="Inter" pitchFamily="34" charset="-120"/>
+                        </a:rPr>
+                        <a:t>Row data</a:t>
+                      </a:r>
+                      <a:endParaRPr lang="en-US" sz="1200" dirty="0">
+                        <a:latin typeface="Inter" charset="0"/>
+                        <a:ea typeface="Inter" charset="0"/>
+                        <a:cs typeface="Inter" charset="0"/>
+                      </a:endParaRPr>
+                    </a:p>
+                  </a:txBody>
+                  <a:tcPr marL="114300" marR="114300" marT="114300" marB="114300" anchor="ctr">
+                    <a:lnL w="6350" cap="flat" cmpd="sng" algn="ctr">
+                      <a:solidFill>
+                        <a:srgbClr val="E7E5E4"/>
+                      </a:solidFill>
+                      <a:prstDash val="solid"/>
+                      <a:round/>
+                      <a:headEnd type="none" w="med" len="med"/>
+                      <a:tailEnd type="none" w="med" len="med"/>
+                    </a:lnL>
+                    <a:lnR w="6350" cap="flat" cmpd="sng" algn="ctr">
+                      <a:solidFill>
+                        <a:srgbClr val="E7E5E4"/>
+                      </a:solidFill>
+                      <a:prstDash val="solid"/>
+                      <a:round/>
+                      <a:headEnd type="none" w="med" len="med"/>
+                      <a:tailEnd type="none" w="med" len="med"/>
+                    </a:lnR>
+                    <a:lnT w="6350" cap="flat" cmpd="sng" algn="ctr">
+                      <a:solidFill>
+                        <a:srgbClr val="E7E5E4"/>
+                      </a:solidFill>
+                      <a:prstDash val="solid"/>
+                      <a:round/>
+                      <a:headEnd type="none" w="med" len="med"/>
+                      <a:tailEnd type="none" w="med" len="med"/>
+                    </a:lnT>
+                    <a:lnB w="6350" cap="flat" cmpd="sng" algn="ctr">
+                      <a:solidFill>
+                        <a:srgbClr val="E7E5E4"/>
+                      </a:solidFill>
+                      <a:prstDash val="solid"/>
+                      <a:round/>
+                      <a:headEnd type="none" w="med" len="med"/>
+                      <a:tailEnd type="none" w="med" len="med"/>
+                    </a:lnB>
+                    <a:solidFill>
+                      <a:srgbClr val="FFFFFF"/>
+                    </a:solidFill>
+                  </a:tcPr>
+                </a:tc>
+              </a:tr>
+              <a:tr h="475488">
+                <a:tc>
+                  <a:txBody>
+                    <a:bodyPr/>
+                    <a:lstStyle/>
+                    <a:p>
+                      <a:pPr algn="l" indent="0" marL="0">
+                        <a:buNone/>
+                      </a:pPr>
+                      <a:r>
+                        <a:rPr lang="en-US" sz="900" spc="100" kern="0" dirty="0">
+                          <a:solidFill>
+                            <a:srgbClr val="44403C"/>
+                          </a:solidFill>
+                          <a:latin typeface="JetBrains Mono" pitchFamily="34" charset="0"/>
+                          <a:ea typeface="JetBrains Mono" pitchFamily="34" charset="-122"/>
+                          <a:cs typeface="JetBrains Mono" pitchFamily="34" charset="-120"/>
+                        </a:rPr>
+                        <a:t>ROW LABEL</a:t>
+                      </a:r>
+                      <a:endParaRPr lang="en-US" sz="900" dirty="0">
+                        <a:latin typeface="JetBrains Mono" charset="0"/>
+                        <a:ea typeface="JetBrains Mono" charset="0"/>
+                        <a:cs typeface="JetBrains Mono" charset="0"/>
+                      </a:endParaRPr>
+                    </a:p>
+                  </a:txBody>
+                  <a:tcPr marL="114300" marR="114300" marT="114300" marB="114300" anchor="ctr">
+                    <a:lnL w="6350" cap="flat" cmpd="sng" algn="ctr">
+                      <a:solidFill>
+                        <a:srgbClr val="E7E5E4"/>
+                      </a:solidFill>
+                      <a:prstDash val="solid"/>
+                      <a:round/>
+                      <a:headEnd type="none" w="med" len="med"/>
+                      <a:tailEnd type="none" w="med" len="med"/>
+                    </a:lnL>
+                    <a:lnR w="6350" cap="flat" cmpd="sng" algn="ctr">
+                      <a:solidFill>
+                        <a:srgbClr val="E7E5E4"/>
+                      </a:solidFill>
+                      <a:prstDash val="solid"/>
+                      <a:round/>
+                      <a:headEnd type="none" w="med" len="med"/>
+                      <a:tailEnd type="none" w="med" len="med"/>
+                    </a:lnR>
+                    <a:lnT w="6350" cap="flat" cmpd="sng" algn="ctr">
+                      <a:solidFill>
+                        <a:srgbClr val="E7E5E4"/>
+                      </a:solidFill>
+                      <a:prstDash val="solid"/>
+                      <a:round/>
+                      <a:headEnd type="none" w="med" len="med"/>
+                      <a:tailEnd type="none" w="med" len="med"/>
+                    </a:lnT>
+                    <a:lnB w="6350" cap="flat" cmpd="sng" algn="ctr">
+                      <a:solidFill>
+                        <a:srgbClr val="E7E5E4"/>
+                      </a:solidFill>
+                      <a:prstDash val="solid"/>
+                      <a:round/>
+                      <a:headEnd type="none" w="med" len="med"/>
+                      <a:tailEnd type="none" w="med" len="med"/>
+                    </a:lnB>
+                    <a:solidFill>
+                      <a:srgbClr val="FFFFFF"/>
+                    </a:solidFill>
+                  </a:tcPr>
+                </a:tc>
+                <a:tc>
+                  <a:txBody>
+                    <a:bodyPr/>
+                    <a:lstStyle/>
+                    <a:p>
+                      <a:pPr algn="l" indent="0" marL="0">
+                        <a:buNone/>
+                      </a:pPr>
+                      <a:r>
+                        <a:rPr lang="en-US" sz="1200" dirty="0">
+                          <a:solidFill>
+                            <a:srgbClr val="57534E"/>
+                          </a:solidFill>
+                          <a:latin typeface="Inter" pitchFamily="34" charset="0"/>
+                          <a:ea typeface="Inter" pitchFamily="34" charset="-122"/>
+                          <a:cs typeface="Inter" pitchFamily="34" charset="-120"/>
+                        </a:rPr>
+                        <a:t>Row data</a:t>
+                      </a:r>
+                      <a:endParaRPr lang="en-US" sz="1200" dirty="0">
+                        <a:latin typeface="Inter" charset="0"/>
+                        <a:ea typeface="Inter" charset="0"/>
+                        <a:cs typeface="Inter" charset="0"/>
+                      </a:endParaRPr>
+                    </a:p>
+                  </a:txBody>
+                  <a:tcPr marL="114300" marR="114300" marT="114300" marB="114300" anchor="ctr">
+                    <a:lnL w="6350" cap="flat" cmpd="sng" algn="ctr">
+                      <a:solidFill>
+                        <a:srgbClr val="E7E5E4"/>
+                      </a:solidFill>
+                      <a:prstDash val="solid"/>
+                      <a:round/>
+                      <a:headEnd type="none" w="med" len="med"/>
+                      <a:tailEnd type="none" w="med" len="med"/>
+                    </a:lnL>
+                    <a:lnR w="6350" cap="flat" cmpd="sng" algn="ctr">
+                      <a:solidFill>
+                        <a:srgbClr val="E7E5E4"/>
+                      </a:solidFill>
+                      <a:prstDash val="solid"/>
+                      <a:round/>
+                      <a:headEnd type="none" w="med" len="med"/>
+                      <a:tailEnd type="none" w="med" len="med"/>
+                    </a:lnR>
+                    <a:lnT w="6350" cap="flat" cmpd="sng" algn="ctr">
+                      <a:solidFill>
+                        <a:srgbClr val="E7E5E4"/>
+                      </a:solidFill>
+                      <a:prstDash val="solid"/>
+                      <a:round/>
+                      <a:headEnd type="none" w="med" len="med"/>
+                      <a:tailEnd type="none" w="med" len="med"/>
+                    </a:lnT>
+                    <a:lnB w="6350" cap="flat" cmpd="sng" algn="ctr">
+                      <a:solidFill>
+                        <a:srgbClr val="E7E5E4"/>
+                      </a:solidFill>
+                      <a:prstDash val="solid"/>
+                      <a:round/>
+                      <a:headEnd type="none" w="med" len="med"/>
+                      <a:tailEnd type="none" w="med" len="med"/>
+                    </a:lnB>
+                    <a:solidFill>
+                      <a:srgbClr val="FFFFFF"/>
+                    </a:solidFill>
+                  </a:tcPr>
+                </a:tc>
+                <a:tc>
+                  <a:txBody>
+                    <a:bodyPr/>
+                    <a:lstStyle/>
+                    <a:p>
+                      <a:pPr algn="l" indent="0" marL="0">
+                        <a:buNone/>
+                      </a:pPr>
+                      <a:r>
+                        <a:rPr lang="en-US" sz="1200" dirty="0">
+                          <a:solidFill>
+                            <a:srgbClr val="57534E"/>
+                          </a:solidFill>
+                          <a:latin typeface="Inter" pitchFamily="34" charset="0"/>
+                          <a:ea typeface="Inter" pitchFamily="34" charset="-122"/>
+                          <a:cs typeface="Inter" pitchFamily="34" charset="-120"/>
+                        </a:rPr>
+                        <a:t>Row data</a:t>
+                      </a:r>
+                      <a:endParaRPr lang="en-US" sz="1200" dirty="0">
+                        <a:latin typeface="Inter" charset="0"/>
+                        <a:ea typeface="Inter" charset="0"/>
+                        <a:cs typeface="Inter" charset="0"/>
+                      </a:endParaRPr>
+                    </a:p>
+                  </a:txBody>
+                  <a:tcPr marL="114300" marR="114300" marT="114300" marB="114300" anchor="ctr">
+                    <a:lnL w="6350" cap="flat" cmpd="sng" algn="ctr">
+                      <a:solidFill>
+                        <a:srgbClr val="E7E5E4"/>
+                      </a:solidFill>
+                      <a:prstDash val="solid"/>
+                      <a:round/>
+                      <a:headEnd type="none" w="med" len="med"/>
+                      <a:tailEnd type="none" w="med" len="med"/>
+                    </a:lnL>
+                    <a:lnR w="6350" cap="flat" cmpd="sng" algn="ctr">
+                      <a:solidFill>
+                        <a:srgbClr val="E7E5E4"/>
+                      </a:solidFill>
+                      <a:prstDash val="solid"/>
+                      <a:round/>
+                      <a:headEnd type="none" w="med" len="med"/>
+                      <a:tailEnd type="none" w="med" len="med"/>
+                    </a:lnR>
+                    <a:lnT w="6350" cap="flat" cmpd="sng" algn="ctr">
+                      <a:solidFill>
+                        <a:srgbClr val="E7E5E4"/>
+                      </a:solidFill>
+                      <a:prstDash val="solid"/>
+                      <a:round/>
+                      <a:headEnd type="none" w="med" len="med"/>
+                      <a:tailEnd type="none" w="med" len="med"/>
+                    </a:lnT>
+                    <a:lnB w="6350" cap="flat" cmpd="sng" algn="ctr">
+                      <a:solidFill>
+                        <a:srgbClr val="E7E5E4"/>
+                      </a:solidFill>
+                      <a:prstDash val="solid"/>
+                      <a:round/>
+                      <a:headEnd type="none" w="med" len="med"/>
+                      <a:tailEnd type="none" w="med" len="med"/>
+                    </a:lnB>
+                    <a:solidFill>
+                      <a:srgbClr val="FFFFFF"/>
+                    </a:solidFill>
+                  </a:tcPr>
+                </a:tc>
+              </a:tr>
+              <a:tr h="475488">
+                <a:tc>
+                  <a:txBody>
+                    <a:bodyPr/>
+                    <a:lstStyle/>
+                    <a:p>
+                      <a:pPr algn="l" indent="0" marL="0">
+                        <a:buNone/>
+                      </a:pPr>
+                      <a:r>
+                        <a:rPr lang="en-US" sz="900" spc="100" kern="0" dirty="0">
+                          <a:solidFill>
+                            <a:srgbClr val="44403C"/>
+                          </a:solidFill>
+                          <a:latin typeface="JetBrains Mono" pitchFamily="34" charset="0"/>
+                          <a:ea typeface="JetBrains Mono" pitchFamily="34" charset="-122"/>
+                          <a:cs typeface="JetBrains Mono" pitchFamily="34" charset="-120"/>
+                        </a:rPr>
+                        <a:t>ROW LABEL</a:t>
+                      </a:r>
+                      <a:endParaRPr lang="en-US" sz="900" dirty="0">
+                        <a:latin typeface="JetBrains Mono" charset="0"/>
+                        <a:ea typeface="JetBrains Mono" charset="0"/>
+                        <a:cs typeface="JetBrains Mono" charset="0"/>
+                      </a:endParaRPr>
+                    </a:p>
+                  </a:txBody>
+                  <a:tcPr marL="114300" marR="114300" marT="114300" marB="114300" anchor="ctr">
+                    <a:lnL w="6350" cap="flat" cmpd="sng" algn="ctr">
+                      <a:solidFill>
+                        <a:srgbClr val="E7E5E4"/>
+                      </a:solidFill>
+                      <a:prstDash val="solid"/>
+                      <a:round/>
+                      <a:headEnd type="none" w="med" len="med"/>
+                      <a:tailEnd type="none" w="med" len="med"/>
+                    </a:lnL>
+                    <a:lnR w="6350" cap="flat" cmpd="sng" algn="ctr">
+                      <a:solidFill>
+                        <a:srgbClr val="E7E5E4"/>
+                      </a:solidFill>
+                      <a:prstDash val="solid"/>
+                      <a:round/>
+                      <a:headEnd type="none" w="med" len="med"/>
+                      <a:tailEnd type="none" w="med" len="med"/>
+                    </a:lnR>
+                    <a:lnT w="6350" cap="flat" cmpd="sng" algn="ctr">
+                      <a:solidFill>
+                        <a:srgbClr val="E7E5E4"/>
+                      </a:solidFill>
+                      <a:prstDash val="solid"/>
+                      <a:round/>
+                      <a:headEnd type="none" w="med" len="med"/>
+                      <a:tailEnd type="none" w="med" len="med"/>
+                    </a:lnT>
+                    <a:lnB w="6350" cap="flat" cmpd="sng" algn="ctr">
+                      <a:solidFill>
+                        <a:srgbClr val="E7E5E4"/>
+                      </a:solidFill>
+                      <a:prstDash val="solid"/>
+                      <a:round/>
+                      <a:headEnd type="none" w="med" len="med"/>
+                      <a:tailEnd type="none" w="med" len="med"/>
+                    </a:lnB>
+                    <a:solidFill>
+                      <a:srgbClr val="FFFFFF"/>
+                    </a:solidFill>
+                  </a:tcPr>
+                </a:tc>
+                <a:tc>
+                  <a:txBody>
+                    <a:bodyPr/>
+                    <a:lstStyle/>
+                    <a:p>
+                      <a:pPr algn="l" indent="0" marL="0">
+                        <a:buNone/>
+                      </a:pPr>
+                      <a:r>
+                        <a:rPr lang="en-US" sz="1200" dirty="0">
+                          <a:solidFill>
+                            <a:srgbClr val="57534E"/>
+                          </a:solidFill>
+                          <a:latin typeface="Inter" pitchFamily="34" charset="0"/>
+                          <a:ea typeface="Inter" pitchFamily="34" charset="-122"/>
+                          <a:cs typeface="Inter" pitchFamily="34" charset="-120"/>
+                        </a:rPr>
+                        <a:t>Row data</a:t>
+                      </a:r>
+                      <a:endParaRPr lang="en-US" sz="1200" dirty="0">
+                        <a:latin typeface="Inter" charset="0"/>
+                        <a:ea typeface="Inter" charset="0"/>
+                        <a:cs typeface="Inter" charset="0"/>
+                      </a:endParaRPr>
+                    </a:p>
+                  </a:txBody>
+                  <a:tcPr marL="114300" marR="114300" marT="114300" marB="114300" anchor="ctr">
+                    <a:lnL w="6350" cap="flat" cmpd="sng" algn="ctr">
+                      <a:solidFill>
+                        <a:srgbClr val="E7E5E4"/>
+                      </a:solidFill>
+                      <a:prstDash val="solid"/>
+                      <a:round/>
+                      <a:headEnd type="none" w="med" len="med"/>
+                      <a:tailEnd type="none" w="med" len="med"/>
+                    </a:lnL>
+                    <a:lnR w="6350" cap="flat" cmpd="sng" algn="ctr">
+                      <a:solidFill>
+                        <a:srgbClr val="E7E5E4"/>
+                      </a:solidFill>
+                      <a:prstDash val="solid"/>
+                      <a:round/>
+                      <a:headEnd type="none" w="med" len="med"/>
+                      <a:tailEnd type="none" w="med" len="med"/>
+                    </a:lnR>
+                    <a:lnT w="6350" cap="flat" cmpd="sng" algn="ctr">
+                      <a:solidFill>
+                        <a:srgbClr val="E7E5E4"/>
+                      </a:solidFill>
+                      <a:prstDash val="solid"/>
+                      <a:round/>
+                      <a:headEnd type="none" w="med" len="med"/>
+                      <a:tailEnd type="none" w="med" len="med"/>
+                    </a:lnT>
+                    <a:lnB w="6350" cap="flat" cmpd="sng" algn="ctr">
+                      <a:solidFill>
+                        <a:srgbClr val="E7E5E4"/>
+                      </a:solidFill>
+                      <a:prstDash val="solid"/>
+                      <a:round/>
+                      <a:headEnd type="none" w="med" len="med"/>
+                      <a:tailEnd type="none" w="med" len="med"/>
+                    </a:lnB>
+                    <a:solidFill>
+                      <a:srgbClr val="FFFFFF"/>
+                    </a:solidFill>
+                  </a:tcPr>
+                </a:tc>
+                <a:tc>
+                  <a:txBody>
+                    <a:bodyPr/>
+                    <a:lstStyle/>
+                    <a:p>
+                      <a:pPr algn="l" indent="0" marL="0">
+                        <a:buNone/>
+                      </a:pPr>
+                      <a:r>
+                        <a:rPr lang="en-US" sz="1200" dirty="0">
+                          <a:solidFill>
+                            <a:srgbClr val="57534E"/>
+                          </a:solidFill>
+                          <a:latin typeface="Inter" pitchFamily="34" charset="0"/>
+                          <a:ea typeface="Inter" pitchFamily="34" charset="-122"/>
+                          <a:cs typeface="Inter" pitchFamily="34" charset="-120"/>
+                        </a:rPr>
+                        <a:t>Row data</a:t>
+                      </a:r>
+                      <a:endParaRPr lang="en-US" sz="1200" dirty="0">
+                        <a:latin typeface="Inter" charset="0"/>
+                        <a:ea typeface="Inter" charset="0"/>
+                        <a:cs typeface="Inter" charset="0"/>
+                      </a:endParaRPr>
+                    </a:p>
+                  </a:txBody>
+                  <a:tcPr marL="114300" marR="114300" marT="114300" marB="114300" anchor="ctr">
+                    <a:lnL w="6350" cap="flat" cmpd="sng" algn="ctr">
+                      <a:solidFill>
+                        <a:srgbClr val="E7E5E4"/>
+                      </a:solidFill>
+                      <a:prstDash val="solid"/>
+                      <a:round/>
+                      <a:headEnd type="none" w="med" len="med"/>
+                      <a:tailEnd type="none" w="med" len="med"/>
+                    </a:lnL>
+                    <a:lnR w="6350" cap="flat" cmpd="sng" algn="ctr">
+                      <a:solidFill>
+                        <a:srgbClr val="E7E5E4"/>
+                      </a:solidFill>
+                      <a:prstDash val="solid"/>
+                      <a:round/>
+                      <a:headEnd type="none" w="med" len="med"/>
+                      <a:tailEnd type="none" w="med" len="med"/>
+                    </a:lnR>
+                    <a:lnT w="6350" cap="flat" cmpd="sng" algn="ctr">
+                      <a:solidFill>
+                        <a:srgbClr val="E7E5E4"/>
+                      </a:solidFill>
+                      <a:prstDash val="solid"/>
+                      <a:round/>
+                      <a:headEnd type="none" w="med" len="med"/>
+                      <a:tailEnd type="none" w="med" len="med"/>
+                    </a:lnT>
+                    <a:lnB w="6350" cap="flat" cmpd="sng" algn="ctr">
+                      <a:solidFill>
+                        <a:srgbClr val="E7E5E4"/>
+                      </a:solidFill>
+                      <a:prstDash val="solid"/>
+                      <a:round/>
+                      <a:headEnd type="none" w="med" len="med"/>
+                      <a:tailEnd type="none" w="med" len="med"/>
+                    </a:lnB>
+                    <a:solidFill>
+                      <a:srgbClr val="FFFFFF"/>
+                    </a:solidFill>
+                  </a:tcPr>
+                </a:tc>
+              </a:tr>
+              <a:tr h="475488">
+                <a:tc>
+                  <a:txBody>
+                    <a:bodyPr/>
+                    <a:lstStyle/>
+                    <a:p>
+                      <a:pPr algn="l" indent="0" marL="0">
+                        <a:buNone/>
+                      </a:pPr>
+                      <a:r>
+                        <a:rPr lang="en-US" sz="900" spc="100" kern="0" dirty="0">
+                          <a:solidFill>
+                            <a:srgbClr val="44403C"/>
+                          </a:solidFill>
+                          <a:latin typeface="JetBrains Mono" pitchFamily="34" charset="0"/>
+                          <a:ea typeface="JetBrains Mono" pitchFamily="34" charset="-122"/>
+                          <a:cs typeface="JetBrains Mono" pitchFamily="34" charset="-120"/>
+                        </a:rPr>
+                        <a:t>ROW LABEL</a:t>
+                      </a:r>
+                      <a:endParaRPr lang="en-US" sz="900" dirty="0">
+                        <a:latin typeface="JetBrains Mono" charset="0"/>
+                        <a:ea typeface="JetBrains Mono" charset="0"/>
+                        <a:cs typeface="JetBrains Mono" charset="0"/>
+                      </a:endParaRPr>
+                    </a:p>
+                  </a:txBody>
+                  <a:tcPr marL="114300" marR="114300" marT="114300" marB="114300" anchor="ctr">
+                    <a:lnL w="6350" cap="flat" cmpd="sng" algn="ctr">
+                      <a:solidFill>
+                        <a:srgbClr val="E7E5E4"/>
+                      </a:solidFill>
+                      <a:prstDash val="solid"/>
+                      <a:round/>
+                      <a:headEnd type="none" w="med" len="med"/>
+                      <a:tailEnd type="none" w="med" len="med"/>
+                    </a:lnL>
+                    <a:lnR w="6350" cap="flat" cmpd="sng" algn="ctr">
+                      <a:solidFill>
+                        <a:srgbClr val="E7E5E4"/>
+                      </a:solidFill>
+                      <a:prstDash val="solid"/>
+                      <a:round/>
+                      <a:headEnd type="none" w="med" len="med"/>
+                      <a:tailEnd type="none" w="med" len="med"/>
+                    </a:lnR>
+                    <a:lnT w="6350" cap="flat" cmpd="sng" algn="ctr">
+                      <a:solidFill>
+                        <a:srgbClr val="E7E5E4"/>
+                      </a:solidFill>
+                      <a:prstDash val="solid"/>
+                      <a:round/>
+                      <a:headEnd type="none" w="med" len="med"/>
+                      <a:tailEnd type="none" w="med" len="med"/>
+                    </a:lnT>
+                    <a:lnB w="6350" cap="flat" cmpd="sng" algn="ctr">
+                      <a:solidFill>
+                        <a:srgbClr val="E7E5E4"/>
+                      </a:solidFill>
+                      <a:prstDash val="solid"/>
+                      <a:round/>
+                      <a:headEnd type="none" w="med" len="med"/>
+                      <a:tailEnd type="none" w="med" len="med"/>
+                    </a:lnB>
+                    <a:solidFill>
+                      <a:srgbClr val="FFFFFF"/>
+                    </a:solidFill>
+                  </a:tcPr>
+                </a:tc>
+                <a:tc>
+                  <a:txBody>
+                    <a:bodyPr/>
+                    <a:lstStyle/>
+                    <a:p>
+                      <a:pPr algn="l" indent="0" marL="0">
+                        <a:buNone/>
+                      </a:pPr>
+                      <a:r>
+                        <a:rPr lang="en-US" sz="1200" dirty="0">
+                          <a:solidFill>
+                            <a:srgbClr val="57534E"/>
+                          </a:solidFill>
+                          <a:latin typeface="Inter" pitchFamily="34" charset="0"/>
+                          <a:ea typeface="Inter" pitchFamily="34" charset="-122"/>
+                          <a:cs typeface="Inter" pitchFamily="34" charset="-120"/>
+                        </a:rPr>
+                        <a:t>Row data</a:t>
+                      </a:r>
+                      <a:endParaRPr lang="en-US" sz="1200" dirty="0">
+                        <a:latin typeface="Inter" charset="0"/>
+                        <a:ea typeface="Inter" charset="0"/>
+                        <a:cs typeface="Inter" charset="0"/>
+                      </a:endParaRPr>
+                    </a:p>
+                  </a:txBody>
+                  <a:tcPr marL="114300" marR="114300" marT="114300" marB="114300" anchor="ctr">
+                    <a:lnL w="6350" cap="flat" cmpd="sng" algn="ctr">
+                      <a:solidFill>
+                        <a:srgbClr val="E7E5E4"/>
+                      </a:solidFill>
+                      <a:prstDash val="solid"/>
+                      <a:round/>
+                      <a:headEnd type="none" w="med" len="med"/>
+                      <a:tailEnd type="none" w="med" len="med"/>
+                    </a:lnL>
+                    <a:lnR w="6350" cap="flat" cmpd="sng" algn="ctr">
+                      <a:solidFill>
+                        <a:srgbClr val="E7E5E4"/>
+                      </a:solidFill>
+                      <a:prstDash val="solid"/>
+                      <a:round/>
+                      <a:headEnd type="none" w="med" len="med"/>
+                      <a:tailEnd type="none" w="med" len="med"/>
+                    </a:lnR>
+                    <a:lnT w="6350" cap="flat" cmpd="sng" algn="ctr">
+                      <a:solidFill>
+                        <a:srgbClr val="E7E5E4"/>
+                      </a:solidFill>
+                      <a:prstDash val="solid"/>
+                      <a:round/>
+                      <a:headEnd type="none" w="med" len="med"/>
+                      <a:tailEnd type="none" w="med" len="med"/>
+                    </a:lnT>
+                    <a:lnB w="6350" cap="flat" cmpd="sng" algn="ctr">
+                      <a:solidFill>
+                        <a:srgbClr val="E7E5E4"/>
+                      </a:solidFill>
+                      <a:prstDash val="solid"/>
+                      <a:round/>
+                      <a:headEnd type="none" w="med" len="med"/>
+                      <a:tailEnd type="none" w="med" len="med"/>
+                    </a:lnB>
+                    <a:solidFill>
+                      <a:srgbClr val="FFFFFF"/>
+                    </a:solidFill>
+                  </a:tcPr>
+                </a:tc>
+                <a:tc>
+                  <a:txBody>
+                    <a:bodyPr/>
+                    <a:lstStyle/>
+                    <a:p>
+                      <a:pPr algn="l" indent="0" marL="0">
+                        <a:buNone/>
+                      </a:pPr>
+                      <a:r>
+                        <a:rPr lang="en-US" sz="1200" dirty="0">
+                          <a:solidFill>
+                            <a:srgbClr val="57534E"/>
+                          </a:solidFill>
+                          <a:latin typeface="Inter" pitchFamily="34" charset="0"/>
+                          <a:ea typeface="Inter" pitchFamily="34" charset="-122"/>
+                          <a:cs typeface="Inter" pitchFamily="34" charset="-120"/>
+                        </a:rPr>
+                        <a:t>Row data</a:t>
+                      </a:r>
+                      <a:endParaRPr lang="en-US" sz="1200" dirty="0">
+                        <a:latin typeface="Inter" charset="0"/>
+                        <a:ea typeface="Inter" charset="0"/>
+                        <a:cs typeface="Inter" charset="0"/>
+                      </a:endParaRPr>
+                    </a:p>
+                  </a:txBody>
+                  <a:tcPr marL="114300" marR="114300" marT="114300" marB="114300" anchor="ctr">
+                    <a:lnL w="6350" cap="flat" cmpd="sng" algn="ctr">
+                      <a:solidFill>
+                        <a:srgbClr val="E7E5E4"/>
+                      </a:solidFill>
+                      <a:prstDash val="solid"/>
+                      <a:round/>
+                      <a:headEnd type="none" w="med" len="med"/>
+                      <a:tailEnd type="none" w="med" len="med"/>
+                    </a:lnL>
+                    <a:lnR w="6350" cap="flat" cmpd="sng" algn="ctr">
+                      <a:solidFill>
+                        <a:srgbClr val="E7E5E4"/>
+                      </a:solidFill>
+                      <a:prstDash val="solid"/>
+                      <a:round/>
+                      <a:headEnd type="none" w="med" len="med"/>
+                      <a:tailEnd type="none" w="med" len="med"/>
+                    </a:lnR>
+                    <a:lnT w="6350" cap="flat" cmpd="sng" algn="ctr">
+                      <a:solidFill>
+                        <a:srgbClr val="E7E5E4"/>
+                      </a:solidFill>
+                      <a:prstDash val="solid"/>
+                      <a:round/>
+                      <a:headEnd type="none" w="med" len="med"/>
+                      <a:tailEnd type="none" w="med" len="med"/>
+                    </a:lnT>
+                    <a:lnB w="6350" cap="flat" cmpd="sng" algn="ctr">
+                      <a:solidFill>
+                        <a:srgbClr val="E7E5E4"/>
+                      </a:solidFill>
+                      <a:prstDash val="solid"/>
+                      <a:round/>
+                      <a:headEnd type="none" w="med" len="med"/>
+                      <a:tailEnd type="none" w="med" len="med"/>
+                    </a:lnB>
+                    <a:solidFill>
+                      <a:srgbClr val="FFFFFF"/>
+                    </a:solidFill>
+                  </a:tcPr>
+                </a:tc>
+              </a:tr>
+              <a:tr h="475488">
+                <a:tc>
+                  <a:txBody>
+                    <a:bodyPr/>
+                    <a:lstStyle/>
+                    <a:p>
+                      <a:pPr algn="l" indent="0" marL="0">
+                        <a:buNone/>
+                      </a:pPr>
+                      <a:r>
+                        <a:rPr lang="en-US" sz="900" spc="100" kern="0" dirty="0">
+                          <a:solidFill>
+                            <a:srgbClr val="44403C"/>
+                          </a:solidFill>
+                          <a:latin typeface="JetBrains Mono" pitchFamily="34" charset="0"/>
+                          <a:ea typeface="JetBrains Mono" pitchFamily="34" charset="-122"/>
+                          <a:cs typeface="JetBrains Mono" pitchFamily="34" charset="-120"/>
+                        </a:rPr>
+                        <a:t>ROW LABEL</a:t>
+                      </a:r>
+                      <a:endParaRPr lang="en-US" sz="900" dirty="0">
+                        <a:latin typeface="JetBrains Mono" charset="0"/>
+                        <a:ea typeface="JetBrains Mono" charset="0"/>
+                        <a:cs typeface="JetBrains Mono" charset="0"/>
+                      </a:endParaRPr>
+                    </a:p>
+                  </a:txBody>
+                  <a:tcPr marL="114300" marR="114300" marT="114300" marB="114300" anchor="ctr">
+                    <a:lnL w="6350" cap="flat" cmpd="sng" algn="ctr">
+                      <a:solidFill>
+                        <a:srgbClr val="E7E5E4"/>
+                      </a:solidFill>
+                      <a:prstDash val="solid"/>
+                      <a:round/>
+                      <a:headEnd type="none" w="med" len="med"/>
+                      <a:tailEnd type="none" w="med" len="med"/>
+                    </a:lnL>
+                    <a:lnR w="6350" cap="flat" cmpd="sng" algn="ctr">
+                      <a:solidFill>
+                        <a:srgbClr val="E7E5E4"/>
+                      </a:solidFill>
+                      <a:prstDash val="solid"/>
+                      <a:round/>
+                      <a:headEnd type="none" w="med" len="med"/>
+                      <a:tailEnd type="none" w="med" len="med"/>
+                    </a:lnR>
+                    <a:lnT w="6350" cap="flat" cmpd="sng" algn="ctr">
+                      <a:solidFill>
+                        <a:srgbClr val="E7E5E4"/>
+                      </a:solidFill>
+                      <a:prstDash val="solid"/>
+                      <a:round/>
+                      <a:headEnd type="none" w="med" len="med"/>
+                      <a:tailEnd type="none" w="med" len="med"/>
+                    </a:lnT>
+                    <a:lnB w="6350" cap="flat" cmpd="sng" algn="ctr">
+                      <a:solidFill>
+                        <a:srgbClr val="E7E5E4"/>
+                      </a:solidFill>
+                      <a:prstDash val="solid"/>
+                      <a:round/>
+                      <a:headEnd type="none" w="med" len="med"/>
+                      <a:tailEnd type="none" w="med" len="med"/>
+                    </a:lnB>
+                    <a:solidFill>
+                      <a:srgbClr val="FFFFFF"/>
+                    </a:solidFill>
+                  </a:tcPr>
+                </a:tc>
+                <a:tc>
+                  <a:txBody>
+                    <a:bodyPr/>
+                    <a:lstStyle/>
+                    <a:p>
+                      <a:pPr algn="l" indent="0" marL="0">
+                        <a:buNone/>
+                      </a:pPr>
+                      <a:r>
+                        <a:rPr lang="en-US" sz="1200" dirty="0">
+                          <a:solidFill>
+                            <a:srgbClr val="57534E"/>
+                          </a:solidFill>
+                          <a:latin typeface="Inter" pitchFamily="34" charset="0"/>
+                          <a:ea typeface="Inter" pitchFamily="34" charset="-122"/>
+                          <a:cs typeface="Inter" pitchFamily="34" charset="-120"/>
+                        </a:rPr>
+                        <a:t>Row data</a:t>
+                      </a:r>
+                      <a:endParaRPr lang="en-US" sz="1200" dirty="0">
+                        <a:latin typeface="Inter" charset="0"/>
+                        <a:ea typeface="Inter" charset="0"/>
+                        <a:cs typeface="Inter" charset="0"/>
+                      </a:endParaRPr>
+                    </a:p>
+                  </a:txBody>
+                  <a:tcPr marL="114300" marR="114300" marT="114300" marB="114300" anchor="ctr">
+                    <a:lnL w="6350" cap="flat" cmpd="sng" algn="ctr">
+                      <a:solidFill>
+                        <a:srgbClr val="E7E5E4"/>
+                      </a:solidFill>
+                      <a:prstDash val="solid"/>
+                      <a:round/>
+                      <a:headEnd type="none" w="med" len="med"/>
+                      <a:tailEnd type="none" w="med" len="med"/>
+                    </a:lnL>
+                    <a:lnR w="6350" cap="flat" cmpd="sng" algn="ctr">
+                      <a:solidFill>
+                        <a:srgbClr val="E7E5E4"/>
+                      </a:solidFill>
+                      <a:prstDash val="solid"/>
+                      <a:round/>
+                      <a:headEnd type="none" w="med" len="med"/>
+                      <a:tailEnd type="none" w="med" len="med"/>
+                    </a:lnR>
+                    <a:lnT w="6350" cap="flat" cmpd="sng" algn="ctr">
+                      <a:solidFill>
+                        <a:srgbClr val="E7E5E4"/>
+                      </a:solidFill>
+                      <a:prstDash val="solid"/>
+                      <a:round/>
+                      <a:headEnd type="none" w="med" len="med"/>
+                      <a:tailEnd type="none" w="med" len="med"/>
+                    </a:lnT>
+                    <a:lnB w="6350" cap="flat" cmpd="sng" algn="ctr">
+                      <a:solidFill>
+                        <a:srgbClr val="E7E5E4"/>
+                      </a:solidFill>
+                      <a:prstDash val="solid"/>
+                      <a:round/>
+                      <a:headEnd type="none" w="med" len="med"/>
+                      <a:tailEnd type="none" w="med" len="med"/>
+                    </a:lnB>
+                    <a:solidFill>
+                      <a:srgbClr val="FFFFFF"/>
+                    </a:solidFill>
+                  </a:tcPr>
+                </a:tc>
+                <a:tc>
+                  <a:txBody>
+                    <a:bodyPr/>
+                    <a:lstStyle/>
+                    <a:p>
+                      <a:pPr algn="l" indent="0" marL="0">
+                        <a:buNone/>
+                      </a:pPr>
+                      <a:r>
+                        <a:rPr lang="en-US" sz="1200" dirty="0">
+                          <a:solidFill>
+                            <a:srgbClr val="57534E"/>
+                          </a:solidFill>
+                          <a:latin typeface="Inter" pitchFamily="34" charset="0"/>
+                          <a:ea typeface="Inter" pitchFamily="34" charset="-122"/>
+                          <a:cs typeface="Inter" pitchFamily="34" charset="-120"/>
+                        </a:rPr>
+                        <a:t>Row data</a:t>
+                      </a:r>
+                      <a:endParaRPr lang="en-US" sz="1200" dirty="0">
+                        <a:latin typeface="Inter" charset="0"/>
+                        <a:ea typeface="Inter" charset="0"/>
+                        <a:cs typeface="Inter" charset="0"/>
+                      </a:endParaRPr>
+                    </a:p>
+                  </a:txBody>
+                  <a:tcPr marL="114300" marR="114300" marT="114300" marB="114300" anchor="ctr">
+                    <a:lnL w="6350" cap="flat" cmpd="sng" algn="ctr">
+                      <a:solidFill>
+                        <a:srgbClr val="E7E5E4"/>
+                      </a:solidFill>
+                      <a:prstDash val="solid"/>
+                      <a:round/>
+                      <a:headEnd type="none" w="med" len="med"/>
+                      <a:tailEnd type="none" w="med" len="med"/>
+                    </a:lnL>
+                    <a:lnR w="6350" cap="flat" cmpd="sng" algn="ctr">
+                      <a:solidFill>
+                        <a:srgbClr val="E7E5E4"/>
+                      </a:solidFill>
+                      <a:prstDash val="solid"/>
+                      <a:round/>
+                      <a:headEnd type="none" w="med" len="med"/>
+                      <a:tailEnd type="none" w="med" len="med"/>
+                    </a:lnR>
+                    <a:lnT w="6350" cap="flat" cmpd="sng" algn="ctr">
+                      <a:solidFill>
+                        <a:srgbClr val="E7E5E4"/>
+                      </a:solidFill>
+                      <a:prstDash val="solid"/>
+                      <a:round/>
+                      <a:headEnd type="none" w="med" len="med"/>
+                      <a:tailEnd type="none" w="med" len="med"/>
+                    </a:lnT>
+                    <a:lnB w="6350" cap="flat" cmpd="sng" algn="ctr">
+                      <a:solidFill>
+                        <a:srgbClr val="E7E5E4"/>
+                      </a:solidFill>
+                      <a:prstDash val="solid"/>
+                      <a:round/>
+                      <a:headEnd type="none" w="med" len="med"/>
+                      <a:tailEnd type="none" w="med" len="med"/>
+                    </a:lnB>
+                    <a:solidFill>
+                      <a:srgbClr val="FFFFFF"/>
+                    </a:solidFill>
+                  </a:tcPr>
+                </a:tc>
+              </a:tr>
+              <a:tr h="475488">
+                <a:tc>
+                  <a:txBody>
+                    <a:bodyPr/>
+                    <a:lstStyle/>
+                    <a:p>
+                      <a:pPr algn="l" indent="0" marL="0">
+                        <a:buNone/>
+                      </a:pPr>
+                      <a:r>
+                        <a:rPr lang="en-US" sz="900" spc="100" kern="0" dirty="0">
+                          <a:solidFill>
+                            <a:srgbClr val="44403C"/>
+                          </a:solidFill>
+                          <a:latin typeface="JetBrains Mono" pitchFamily="34" charset="0"/>
+                          <a:ea typeface="JetBrains Mono" pitchFamily="34" charset="-122"/>
+                          <a:cs typeface="JetBrains Mono" pitchFamily="34" charset="-120"/>
+                        </a:rPr>
+                        <a:t>ROW LABEL</a:t>
+                      </a:r>
+                      <a:endParaRPr lang="en-US" sz="900" dirty="0">
+                        <a:latin typeface="JetBrains Mono" charset="0"/>
+                        <a:ea typeface="JetBrains Mono" charset="0"/>
+                        <a:cs typeface="JetBrains Mono" charset="0"/>
+                      </a:endParaRPr>
+                    </a:p>
+                  </a:txBody>
+                  <a:tcPr marL="114300" marR="114300" marT="114300" marB="114300" anchor="ctr">
+                    <a:lnL w="6350" cap="flat" cmpd="sng" algn="ctr">
+                      <a:solidFill>
+                        <a:srgbClr val="E7E5E4"/>
+                      </a:solidFill>
+                      <a:prstDash val="solid"/>
+                      <a:round/>
+                      <a:headEnd type="none" w="med" len="med"/>
+                      <a:tailEnd type="none" w="med" len="med"/>
+                    </a:lnL>
+                    <a:lnR w="6350" cap="flat" cmpd="sng" algn="ctr">
+                      <a:solidFill>
+                        <a:srgbClr val="E7E5E4"/>
+                      </a:solidFill>
+                      <a:prstDash val="solid"/>
+                      <a:round/>
+                      <a:headEnd type="none" w="med" len="med"/>
+                      <a:tailEnd type="none" w="med" len="med"/>
+                    </a:lnR>
+                    <a:lnT w="6350" cap="flat" cmpd="sng" algn="ctr">
+                      <a:solidFill>
+                        <a:srgbClr val="E7E5E4"/>
+                      </a:solidFill>
+                      <a:prstDash val="solid"/>
+                      <a:round/>
+                      <a:headEnd type="none" w="med" len="med"/>
+                      <a:tailEnd type="none" w="med" len="med"/>
+                    </a:lnT>
+                    <a:lnB w="6350" cap="flat" cmpd="sng" algn="ctr">
+                      <a:solidFill>
+                        <a:srgbClr val="E7E5E4"/>
+                      </a:solidFill>
+                      <a:prstDash val="solid"/>
+                      <a:round/>
+                      <a:headEnd type="none" w="med" len="med"/>
+                      <a:tailEnd type="none" w="med" len="med"/>
+                    </a:lnB>
+                    <a:solidFill>
+                      <a:srgbClr val="FFFFFF"/>
+                    </a:solidFill>
+                  </a:tcPr>
+                </a:tc>
+                <a:tc>
+                  <a:txBody>
+                    <a:bodyPr/>
+                    <a:lstStyle/>
+                    <a:p>
+                      <a:pPr algn="l" indent="0" marL="0">
+                        <a:buNone/>
+                      </a:pPr>
+                      <a:r>
+                        <a:rPr lang="en-US" sz="1200" dirty="0">
+                          <a:solidFill>
+                            <a:srgbClr val="57534E"/>
+                          </a:solidFill>
+                          <a:latin typeface="Inter" pitchFamily="34" charset="0"/>
+                          <a:ea typeface="Inter" pitchFamily="34" charset="-122"/>
+                          <a:cs typeface="Inter" pitchFamily="34" charset="-120"/>
+                        </a:rPr>
+                        <a:t>Row data</a:t>
+                      </a:r>
+                      <a:endParaRPr lang="en-US" sz="1200" dirty="0">
+                        <a:latin typeface="Inter" charset="0"/>
+                        <a:ea typeface="Inter" charset="0"/>
+                        <a:cs typeface="Inter" charset="0"/>
+                      </a:endParaRPr>
+                    </a:p>
+                  </a:txBody>
+                  <a:tcPr marL="114300" marR="114300" marT="114300" marB="114300" anchor="ctr">
+                    <a:lnL w="6350" cap="flat" cmpd="sng" algn="ctr">
+                      <a:solidFill>
+                        <a:srgbClr val="E7E5E4"/>
+                      </a:solidFill>
+                      <a:prstDash val="solid"/>
+                      <a:round/>
+                      <a:headEnd type="none" w="med" len="med"/>
+                      <a:tailEnd type="none" w="med" len="med"/>
+                    </a:lnL>
+                    <a:lnR w="6350" cap="flat" cmpd="sng" algn="ctr">
+                      <a:solidFill>
+                        <a:srgbClr val="E7E5E4"/>
+                      </a:solidFill>
+                      <a:prstDash val="solid"/>
+                      <a:round/>
+                      <a:headEnd type="none" w="med" len="med"/>
+                      <a:tailEnd type="none" w="med" len="med"/>
+                    </a:lnR>
+                    <a:lnT w="6350" cap="flat" cmpd="sng" algn="ctr">
+                      <a:solidFill>
+                        <a:srgbClr val="E7E5E4"/>
+                      </a:solidFill>
+                      <a:prstDash val="solid"/>
+                      <a:round/>
+                      <a:headEnd type="none" w="med" len="med"/>
+                      <a:tailEnd type="none" w="med" len="med"/>
+                    </a:lnT>
+                    <a:lnB w="6350" cap="flat" cmpd="sng" algn="ctr">
+                      <a:solidFill>
+                        <a:srgbClr val="E7E5E4"/>
+                      </a:solidFill>
+                      <a:prstDash val="solid"/>
+                      <a:round/>
+                      <a:headEnd type="none" w="med" len="med"/>
+                      <a:tailEnd type="none" w="med" len="med"/>
+                    </a:lnB>
+                    <a:solidFill>
+                      <a:srgbClr val="FFFFFF"/>
+                    </a:solidFill>
+                  </a:tcPr>
+                </a:tc>
+                <a:tc>
+                  <a:txBody>
+                    <a:bodyPr/>
+                    <a:lstStyle/>
+                    <a:p>
+                      <a:pPr algn="l" indent="0" marL="0">
+                        <a:buNone/>
+                      </a:pPr>
+                      <a:r>
+                        <a:rPr lang="en-US" sz="1200" dirty="0">
+                          <a:solidFill>
+                            <a:srgbClr val="57534E"/>
+                          </a:solidFill>
+                          <a:latin typeface="Inter" pitchFamily="34" charset="0"/>
+                          <a:ea typeface="Inter" pitchFamily="34" charset="-122"/>
+                          <a:cs typeface="Inter" pitchFamily="34" charset="-120"/>
+                        </a:rPr>
+                        <a:t>Row data</a:t>
+                      </a:r>
+                      <a:endParaRPr lang="en-US" sz="1200" dirty="0">
+                        <a:latin typeface="Inter" charset="0"/>
+                        <a:ea typeface="Inter" charset="0"/>
+                        <a:cs typeface="Inter" charset="0"/>
+                      </a:endParaRPr>
+                    </a:p>
+                  </a:txBody>
+                  <a:tcPr marL="114300" marR="114300" marT="114300" marB="114300" anchor="ctr">
+                    <a:lnL w="6350" cap="flat" cmpd="sng" algn="ctr">
+                      <a:solidFill>
+                        <a:srgbClr val="E7E5E4"/>
+                      </a:solidFill>
+                      <a:prstDash val="solid"/>
+                      <a:round/>
+                      <a:headEnd type="none" w="med" len="med"/>
+                      <a:tailEnd type="none" w="med" len="med"/>
+                    </a:lnL>
+                    <a:lnR w="6350" cap="flat" cmpd="sng" algn="ctr">
+                      <a:solidFill>
+                        <a:srgbClr val="E7E5E4"/>
+                      </a:solidFill>
+                      <a:prstDash val="solid"/>
+                      <a:round/>
+                      <a:headEnd type="none" w="med" len="med"/>
+                      <a:tailEnd type="none" w="med" len="med"/>
+                    </a:lnR>
+                    <a:lnT w="6350" cap="flat" cmpd="sng" algn="ctr">
+                      <a:solidFill>
+                        <a:srgbClr val="E7E5E4"/>
+                      </a:solidFill>
+                      <a:prstDash val="solid"/>
+                      <a:round/>
+                      <a:headEnd type="none" w="med" len="med"/>
+                      <a:tailEnd type="none" w="med" len="med"/>
+                    </a:lnT>
+                    <a:lnB w="6350" cap="flat" cmpd="sng" algn="ctr">
+                      <a:solidFill>
+                        <a:srgbClr val="E7E5E4"/>
+                      </a:solidFill>
+                      <a:prstDash val="solid"/>
+                      <a:round/>
+                      <a:headEnd type="none" w="med" len="med"/>
+                      <a:tailEnd type="none" w="med" len="med"/>
+                    </a:lnB>
+                    <a:solidFill>
+                      <a:srgbClr val="FFFFFF"/>
+                    </a:solidFill>
+                  </a:tcPr>
+                </a:tc>
+              </a:tr>
+            </a:tbl>
+          </a:graphicData>
+        </a:graphic>
+      </p:graphicFrame>
+      <p:sp>
+        <p:nvSpPr>
+          <p:cNvPr id="6" name="Shape 3"/>
+          <p:cNvSpPr/>
+          <p:nvPr/>
+        </p:nvSpPr>
+        <p:spPr>
+          <a:xfrm>
+            <a:off x="502920" y="1890065"/>
+            <a:ext cx="5120640" cy="5486"/>
+          </a:xfrm>
+          <a:prstGeom prst="rect">
+            <a:avLst/>
+          </a:prstGeom>
+          <a:solidFill>
+            <a:srgbClr val="E7E5E4"/>
+          </a:solidFill>
+          <a:ln w="12700">
+            <a:solidFill>
+              <a:srgbClr val="E7E5E4"/>
+            </a:solidFill>
+            <a:prstDash val="solid"/>
+          </a:ln>
+        </p:spPr>
+      </p:sp>
+      <p:sp>
+        <p:nvSpPr>
+          <p:cNvPr id="7" name="Shape 4"/>
+          <p:cNvSpPr/>
+          <p:nvPr/>
+        </p:nvSpPr>
+        <p:spPr>
+          <a:xfrm>
+            <a:off x="502920" y="2365553"/>
+            <a:ext cx="5120640" cy="5486"/>
+          </a:xfrm>
+          <a:prstGeom prst="rect">
+            <a:avLst/>
+          </a:prstGeom>
+          <a:solidFill>
+            <a:srgbClr val="E7E5E4"/>
+          </a:solidFill>
+          <a:ln w="12700">
+            <a:solidFill>
+              <a:srgbClr val="E7E5E4"/>
+            </a:solidFill>
+            <a:prstDash val="solid"/>
+          </a:ln>
+        </p:spPr>
+      </p:sp>
+      <p:sp>
+        <p:nvSpPr>
+          <p:cNvPr id="8" name="Shape 5"/>
+          <p:cNvSpPr/>
+          <p:nvPr/>
+        </p:nvSpPr>
+        <p:spPr>
+          <a:xfrm>
+            <a:off x="502920" y="2841041"/>
+            <a:ext cx="5120640" cy="5486"/>
+          </a:xfrm>
+          <a:prstGeom prst="rect">
+            <a:avLst/>
+          </a:prstGeom>
+          <a:solidFill>
+            <a:srgbClr val="E7E5E4"/>
+          </a:solidFill>
+          <a:ln w="12700">
+            <a:solidFill>
+              <a:srgbClr val="E7E5E4"/>
+            </a:solidFill>
+            <a:prstDash val="solid"/>
+          </a:ln>
+        </p:spPr>
+      </p:sp>
+      <p:sp>
+        <p:nvSpPr>
+          <p:cNvPr id="9" name="Shape 6"/>
+          <p:cNvSpPr/>
+          <p:nvPr/>
+        </p:nvSpPr>
+        <p:spPr>
+          <a:xfrm>
+            <a:off x="502920" y="3316529"/>
+            <a:ext cx="5120640" cy="5486"/>
+          </a:xfrm>
+          <a:prstGeom prst="rect">
+            <a:avLst/>
+          </a:prstGeom>
+          <a:solidFill>
+            <a:srgbClr val="E7E5E4"/>
+          </a:solidFill>
+          <a:ln w="12700">
+            <a:solidFill>
+              <a:srgbClr val="E7E5E4"/>
+            </a:solidFill>
+            <a:prstDash val="solid"/>
+          </a:ln>
+        </p:spPr>
+      </p:sp>
+      <p:sp>
+        <p:nvSpPr>
+          <p:cNvPr id="10" name="Shape 7"/>
+          <p:cNvSpPr/>
+          <p:nvPr/>
+        </p:nvSpPr>
+        <p:spPr>
+          <a:xfrm>
+            <a:off x="502920" y="3792017"/>
+            <a:ext cx="5120640" cy="5486"/>
+          </a:xfrm>
+          <a:prstGeom prst="rect">
+            <a:avLst/>
+          </a:prstGeom>
+          <a:solidFill>
+            <a:srgbClr val="E7E5E4"/>
+          </a:solidFill>
+          <a:ln w="12700">
+            <a:solidFill>
+              <a:srgbClr val="E7E5E4"/>
+            </a:solidFill>
+            <a:prstDash val="solid"/>
+          </a:ln>
+        </p:spPr>
+      </p:sp>
+      <p:sp>
+        <p:nvSpPr>
+          <p:cNvPr id="11" name="Shape 8"/>
+          <p:cNvSpPr/>
+          <p:nvPr/>
+        </p:nvSpPr>
+        <p:spPr>
+          <a:xfrm>
+            <a:off x="502920" y="4267505"/>
+            <a:ext cx="5120640" cy="5486"/>
+          </a:xfrm>
+          <a:prstGeom prst="rect">
+            <a:avLst/>
+          </a:prstGeom>
+          <a:solidFill>
+            <a:srgbClr val="E7E5E4"/>
+          </a:solidFill>
+          <a:ln w="12700">
+            <a:solidFill>
+              <a:srgbClr val="E7E5E4"/>
+            </a:solidFill>
+            <a:prstDash val="solid"/>
+          </a:ln>
+        </p:spPr>
+      </p:sp>
+      <p:sp>
+        <p:nvSpPr>
+          <p:cNvPr id="12" name="Text 9"/>
+          <p:cNvSpPr/>
+          <p:nvPr/>
+        </p:nvSpPr>
+        <p:spPr>
+          <a:xfrm>
+            <a:off x="5806440" y="1417320"/>
+            <a:ext cx="4572000" cy="164592"/>
+          </a:xfrm>
+          <a:prstGeom prst="rect">
+            <a:avLst/>
+          </a:prstGeom>
+          <a:noFill/>
+          <a:ln/>
+        </p:spPr>
+        <p:txBody>
+          <a:bodyPr wrap="square" lIns="0" tIns="0" rIns="0" bIns="0" rtlCol="0" anchor="ctr"/>
+          <a:lstStyle/>
+          <a:p>
+            <a:pPr indent="0" marL="0">
+              <a:buNone/>
+            </a:pPr>
+            <a:r>
+              <a:rPr lang="en-US" sz="850" spc="150" kern="0" dirty="0">
+                <a:solidFill>
+                  <a:srgbClr val="78716C"/>
+                </a:solidFill>
+                <a:latin typeface="JetBrains Mono" pitchFamily="34" charset="0"/>
+                <a:ea typeface="JetBrains Mono" pitchFamily="34" charset="-122"/>
+                <a:cs typeface="JetBrains Mono" pitchFamily="34" charset="-120"/>
+              </a:rPr>
+              <a:t>CONTEXT</a:t>
+            </a:r>
+            <a:endParaRPr lang="en-US" sz="850" dirty="0"/>
+          </a:p>
+        </p:txBody>
+      </p:sp>
+      <p:sp>
+        <p:nvSpPr>
+          <p:cNvPr id="13" name="Shape 10"/>
+          <p:cNvSpPr/>
+          <p:nvPr/>
+        </p:nvSpPr>
+        <p:spPr>
+          <a:xfrm>
+            <a:off x="5806440" y="1618488"/>
+            <a:ext cx="914400" cy="4572"/>
+          </a:xfrm>
+          <a:prstGeom prst="rect">
+            <a:avLst/>
+          </a:prstGeom>
+          <a:solidFill>
+            <a:srgbClr val="6330F5"/>
+          </a:solidFill>
+          <a:ln w="12700">
+            <a:solidFill>
+              <a:srgbClr val="6330F5"/>
+            </a:solidFill>
+            <a:prstDash val="solid"/>
+          </a:ln>
+        </p:spPr>
+      </p:sp>
+      <p:sp>
+        <p:nvSpPr>
+          <p:cNvPr id="14" name="Text 11"/>
+          <p:cNvSpPr/>
+          <p:nvPr/>
+        </p:nvSpPr>
+        <p:spPr>
+          <a:xfrm>
+            <a:off x="5806440" y="1764792"/>
+            <a:ext cx="2834640" cy="1097280"/>
+          </a:xfrm>
+          <a:prstGeom prst="rect">
+            <a:avLst/>
+          </a:prstGeom>
+          <a:noFill/>
+          <a:ln/>
+        </p:spPr>
+        <p:txBody>
+          <a:bodyPr wrap="square" lIns="0" tIns="0" rIns="0" bIns="0" rtlCol="0" anchor="t"/>
+          <a:lstStyle/>
+          <a:p>
+            <a:pPr indent="0" marL="0">
+              <a:lnSpc>
+                <a:spcPct val="115000"/>
+              </a:lnSpc>
+              <a:buNone/>
+            </a:pPr>
+            <a:r>
+              <a:rPr lang="en-US" sz="2200" dirty="0">
+                <a:solidFill>
+                  <a:srgbClr val="0C0A09"/>
+                </a:solidFill>
+                <a:latin typeface="Nanum Myeongjo" pitchFamily="34" charset="0"/>
+                <a:ea typeface="Nanum Myeongjo" pitchFamily="34" charset="-122"/>
+                <a:cs typeface="Nanum Myeongjo" pitchFamily="34" charset="-120"/>
+              </a:rPr>
+              <a:t>Use this space to </a:t>
+            </a:r>
+            <a:pPr indent="0" marL="0">
+              <a:lnSpc>
+                <a:spcPct val="115000"/>
+              </a:lnSpc>
+              <a:buNone/>
+            </a:pPr>
+            <a:r>
+              <a:rPr lang="en-US" sz="2200" i="1" dirty="0">
+                <a:solidFill>
+                  <a:srgbClr val="6330F5"/>
+                </a:solidFill>
+                <a:latin typeface="Nanum Myeongjo" pitchFamily="34" charset="0"/>
+                <a:ea typeface="Nanum Myeongjo" pitchFamily="34" charset="-122"/>
+                <a:cs typeface="Nanum Myeongjo" pitchFamily="34" charset="-120"/>
+              </a:rPr>
+              <a:t>frame the data.</a:t>
+            </a:r>
+            <a:endParaRPr lang="en-US" sz="2200" dirty="0"/>
+          </a:p>
+        </p:txBody>
+      </p:sp>
+      <p:sp>
+        <p:nvSpPr>
+          <p:cNvPr id="15" name="Text 12"/>
+          <p:cNvSpPr/>
+          <p:nvPr/>
+        </p:nvSpPr>
+        <p:spPr>
+          <a:xfrm>
+            <a:off x="5806440" y="3017520"/>
+            <a:ext cx="2834640" cy="1554480"/>
+          </a:xfrm>
+          <a:prstGeom prst="rect">
+            <a:avLst/>
+          </a:prstGeom>
+          <a:noFill/>
+          <a:ln/>
+        </p:spPr>
+        <p:txBody>
+          <a:bodyPr wrap="square" lIns="0" tIns="0" rIns="0" bIns="0" rtlCol="0" anchor="t"/>
+          <a:lstStyle/>
+          <a:p>
+            <a:pPr indent="0" marL="0">
+              <a:lnSpc>
+                <a:spcPct val="150000"/>
+              </a:lnSpc>
+              <a:buNone/>
+            </a:pPr>
+            <a:r>
+              <a:rPr lang="en-US" sz="1200" dirty="0">
+                <a:solidFill>
+                  <a:srgbClr val="57534E"/>
+                </a:solidFill>
+                <a:latin typeface="Inter" pitchFamily="34" charset="0"/>
+                <a:ea typeface="Inter" pitchFamily="34" charset="-122"/>
+                <a:cs typeface="Inter" pitchFamily="34" charset="-120"/>
+              </a:rPr>
+              <a:t>Provide the narrative context that the table cannot. What should the reader conclude? What action does this support?</a:t>
+            </a:r>
+            <a:endParaRPr lang="en-US" sz="1200" dirty="0"/>
+          </a:p>
+        </p:txBody>
+      </p:sp>
+    </p:spTree>
+  </p:cSld>
+  <p:clrMapOvr>
+    <a:masterClrMapping/>
+  </p:clrMapOvr>
+</p:sld>
+</file>
+
+<file path=ppt/slides/slide12.xml><?xml version="1.0" encoding="utf-8"?>
+<p:sld xmlns:a="http://schemas.openxmlformats.org/drawingml/2006/main" xmlns:r="http://schemas.openxmlformats.org/officeDocument/2006/relationships" xmlns:p="http://schemas.openxmlformats.org/presentationml/2006/main">
+  <p:cSld name="Slide 12">
+    <p:bg>
+      <p:bgPr>
+        <a:solidFill>
+          <a:srgbClr val="F5F0EC"/>
+        </a:solidFill>
+      </p:bgPr>
+    </p:bg>
+    <p:spTree>
+      <p:nvGrpSpPr>
+        <p:cNvPr id="1" name=""/>
+        <p:cNvGrpSpPr/>
+        <p:nvPr/>
+      </p:nvGrpSpPr>
+      <p:grpSpPr>
+        <a:xfrm>
+          <a:off x="0" y="0"/>
+          <a:ext cx="0" cy="0"/>
+          <a:chOff x="0" y="0"/>
+          <a:chExt cx="0" cy="0"/>
+        </a:xfrm>
+      </p:grpSpPr>
+      <p:sp>
+        <p:nvSpPr>
+          <p:cNvPr id="2" name="Text 0"/>
+          <p:cNvSpPr/>
+          <p:nvPr/>
+        </p:nvSpPr>
+        <p:spPr>
+          <a:xfrm>
+            <a:off x="502920" y="384048"/>
+            <a:ext cx="4572000" cy="164592"/>
+          </a:xfrm>
+          <a:prstGeom prst="rect">
+            <a:avLst/>
+          </a:prstGeom>
+          <a:noFill/>
+          <a:ln/>
+        </p:spPr>
+        <p:txBody>
+          <a:bodyPr wrap="square" lIns="0" tIns="0" rIns="0" bIns="0" rtlCol="0" anchor="ctr"/>
+          <a:lstStyle/>
+          <a:p>
+            <a:pPr indent="0" marL="0">
+              <a:buNone/>
+            </a:pPr>
+            <a:r>
+              <a:rPr lang="en-US" sz="850" spc="150" kern="0" dirty="0">
+                <a:solidFill>
+                  <a:srgbClr val="78716C"/>
+                </a:solidFill>
+                <a:latin typeface="JetBrains Mono" pitchFamily="34" charset="0"/>
+                <a:ea typeface="JetBrains Mono" pitchFamily="34" charset="-122"/>
+                <a:cs typeface="JetBrains Mono" pitchFamily="34" charset="-120"/>
+              </a:rPr>
+              <a:t>DATA</a:t>
+            </a:r>
+            <a:endParaRPr lang="en-US" sz="850" dirty="0"/>
+          </a:p>
+        </p:txBody>
+      </p:sp>
+      <p:sp>
+        <p:nvSpPr>
+          <p:cNvPr id="3" name="Shape 1"/>
+          <p:cNvSpPr/>
+          <p:nvPr/>
+        </p:nvSpPr>
+        <p:spPr>
+          <a:xfrm>
+            <a:off x="502920" y="585216"/>
+            <a:ext cx="914400" cy="4572"/>
+          </a:xfrm>
+          <a:prstGeom prst="rect">
+            <a:avLst/>
+          </a:prstGeom>
+          <a:solidFill>
+            <a:srgbClr val="6330F5"/>
+          </a:solidFill>
+          <a:ln w="12700">
+            <a:solidFill>
+              <a:srgbClr val="6330F5"/>
+            </a:solidFill>
+            <a:prstDash val="solid"/>
+          </a:ln>
+        </p:spPr>
+      </p:sp>
+      <p:sp>
+        <p:nvSpPr>
+          <p:cNvPr id="4" name="Text 2"/>
+          <p:cNvSpPr/>
+          <p:nvPr/>
+        </p:nvSpPr>
+        <p:spPr>
+          <a:xfrm>
+            <a:off x="502920" y="713232"/>
+            <a:ext cx="7772400" cy="548640"/>
+          </a:xfrm>
+          <a:prstGeom prst="rect">
+            <a:avLst/>
+          </a:prstGeom>
+          <a:noFill/>
+          <a:ln/>
+        </p:spPr>
+        <p:txBody>
+          <a:bodyPr wrap="square" lIns="0" tIns="0" rIns="0" bIns="0" rtlCol="0" anchor="t"/>
+          <a:lstStyle/>
+          <a:p>
+            <a:pPr indent="0" marL="0">
+              <a:lnSpc>
+                <a:spcPct val="110000"/>
+              </a:lnSpc>
+              <a:buNone/>
+            </a:pPr>
+            <a:r>
+              <a:rPr lang="en-US" sz="2600" dirty="0">
+                <a:solidFill>
+                  <a:srgbClr val="0C0A09"/>
+                </a:solidFill>
+                <a:latin typeface="Nanum Myeongjo" pitchFamily="34" charset="0"/>
+                <a:ea typeface="Nanum Myeongjo" pitchFamily="34" charset="-122"/>
+                <a:cs typeface="Nanum Myeongjo" pitchFamily="34" charset="-120"/>
+              </a:rPr>
+              <a:t>Table with headers </a:t>
+            </a:r>
+            <a:pPr indent="0" marL="0">
+              <a:lnSpc>
+                <a:spcPct val="110000"/>
+              </a:lnSpc>
+              <a:buNone/>
+            </a:pPr>
+            <a:r>
+              <a:rPr lang="en-US" sz="2600" i="1" dirty="0">
+                <a:solidFill>
+                  <a:srgbClr val="6330F5"/>
+                </a:solidFill>
+                <a:latin typeface="Nanum Myeongjo" pitchFamily="34" charset="0"/>
+                <a:ea typeface="Nanum Myeongjo" pitchFamily="34" charset="-122"/>
+                <a:cs typeface="Nanum Myeongjo" pitchFamily="34" charset="-120"/>
+              </a:rPr>
+              <a:t>and labels.</a:t>
+            </a:r>
+            <a:endParaRPr lang="en-US" sz="2600" dirty="0"/>
+          </a:p>
+        </p:txBody>
+      </p:sp>
+      <p:graphicFrame>
+        <p:nvGraphicFramePr>
+          <p:cNvPr id="13" name="Table 0"/>
+          <p:cNvGraphicFramePr>
+            <a:graphicFrameLocks noGrp="1"/>
+          </p:cNvGraphicFramePr>
+          <p:nvPr>
+            <p:extLst>
+              <p:ext uri="{D42A27DB-BD31-4B8C-83A1-F6EECF244321}">
+                <p14:modId xmlns:p14="http://schemas.microsoft.com/office/powerpoint/2010/main" val="1579011935"/>
+              </p:ext>
+            </p:extLst>
+          </p:nvPr>
+        </p:nvGraphicFramePr>
+        <p:xfrm>
+          <a:off x="502920" y="1417320"/>
+          <a:ext cx="5120640" cy="914400"/>
+        </p:xfrm>
+        <a:graphic>
+          <a:graphicData uri="http://schemas.openxmlformats.org/drawingml/2006/table">
+            <a:tbl>
+              <a:tblPr/>
+              <a:tblGrid>
+                <a:gridCol w="1371600"/>
+                <a:gridCol w="1252728"/>
+                <a:gridCol w="1252728"/>
+                <a:gridCol w="1243584"/>
+              </a:tblGrid>
+              <a:tr h="475488">
+                <a:tc>
+                  <a:txBody>
+                    <a:bodyPr/>
+                    <a:lstStyle/>
+                    <a:p>
+                      <a:pPr algn="l" indent="0" marL="0">
+                        <a:buNone/>
+                      </a:pPr>
+                      <a:endParaRPr lang="en-US" sz="900" dirty="0">
+                        <a:latin typeface="JetBrains Mono" charset="0"/>
+                        <a:ea typeface="JetBrains Mono" charset="0"/>
+                        <a:cs typeface="JetBrains Mono" charset="0"/>
+                      </a:endParaRPr>
+                    </a:p>
+                  </a:txBody>
+                  <a:tcPr marL="114300" marR="114300" marT="114300" marB="114300" anchor="ctr">
+                    <a:lnL w="6350" cap="flat" cmpd="sng" algn="ctr">
+                      <a:solidFill>
+                        <a:srgbClr val="E7E5E4"/>
+                      </a:solidFill>
+                      <a:prstDash val="solid"/>
+                      <a:round/>
+                      <a:headEnd type="none" w="med" len="med"/>
+                      <a:tailEnd type="none" w="med" len="med"/>
+                    </a:lnL>
+                    <a:lnR w="6350" cap="flat" cmpd="sng" algn="ctr">
+                      <a:solidFill>
+                        <a:srgbClr val="E7E5E4"/>
+                      </a:solidFill>
+                      <a:prstDash val="solid"/>
+                      <a:round/>
+                      <a:headEnd type="none" w="med" len="med"/>
+                      <a:tailEnd type="none" w="med" len="med"/>
+                    </a:lnR>
+                    <a:lnT w="6350" cap="flat" cmpd="sng" algn="ctr">
+                      <a:solidFill>
+                        <a:srgbClr val="E7E5E4"/>
+                      </a:solidFill>
+                      <a:prstDash val="solid"/>
+                      <a:round/>
+                      <a:headEnd type="none" w="med" len="med"/>
+                      <a:tailEnd type="none" w="med" len="med"/>
+                    </a:lnT>
+                    <a:lnB w="6350" cap="flat" cmpd="sng" algn="ctr">
+                      <a:solidFill>
+                        <a:srgbClr val="E7E5E4"/>
+                      </a:solidFill>
+                      <a:prstDash val="solid"/>
+                      <a:round/>
+                      <a:headEnd type="none" w="med" len="med"/>
+                      <a:tailEnd type="none" w="med" len="med"/>
+                    </a:lnB>
+                    <a:solidFill>
+                      <a:srgbClr val="FFFFFF"/>
+                    </a:solidFill>
+                  </a:tcPr>
+                </a:tc>
+                <a:tc>
+                  <a:txBody>
+                    <a:bodyPr/>
+                    <a:lstStyle/>
+                    <a:p>
+                      <a:pPr algn="l" indent="0" marL="0">
+                        <a:buNone/>
+                      </a:pPr>
+                      <a:r>
+                        <a:rPr lang="en-US" sz="900" spc="100" kern="0" dirty="0">
+                          <a:solidFill>
+                            <a:srgbClr val="78716C"/>
+                          </a:solidFill>
+                          <a:latin typeface="JetBrains Mono" pitchFamily="34" charset="0"/>
+                          <a:ea typeface="JetBrains Mono" pitchFamily="34" charset="-122"/>
+                          <a:cs typeface="JetBrains Mono" pitchFamily="34" charset="-120"/>
+                        </a:rPr>
+                        <a:t>COLUMN</a:t>
+                      </a:r>
+                      <a:endParaRPr lang="en-US" sz="900" dirty="0">
+                        <a:latin typeface="JetBrains Mono" charset="0"/>
+                        <a:ea typeface="JetBrains Mono" charset="0"/>
+                        <a:cs typeface="JetBrains Mono" charset="0"/>
+                      </a:endParaRPr>
+                    </a:p>
+                  </a:txBody>
+                  <a:tcPr marL="114300" marR="114300" marT="114300" marB="114300" anchor="ctr">
+                    <a:lnL w="6350" cap="flat" cmpd="sng" algn="ctr">
+                      <a:solidFill>
+                        <a:srgbClr val="E7E5E4"/>
+                      </a:solidFill>
+                      <a:prstDash val="solid"/>
+                      <a:round/>
+                      <a:headEnd type="none" w="med" len="med"/>
+                      <a:tailEnd type="none" w="med" len="med"/>
+                    </a:lnL>
+                    <a:lnR w="6350" cap="flat" cmpd="sng" algn="ctr">
+                      <a:solidFill>
+                        <a:srgbClr val="E7E5E4"/>
+                      </a:solidFill>
+                      <a:prstDash val="solid"/>
+                      <a:round/>
+                      <a:headEnd type="none" w="med" len="med"/>
+                      <a:tailEnd type="none" w="med" len="med"/>
+                    </a:lnR>
+                    <a:lnT w="6350" cap="flat" cmpd="sng" algn="ctr">
+                      <a:solidFill>
+                        <a:srgbClr val="E7E5E4"/>
+                      </a:solidFill>
+                      <a:prstDash val="solid"/>
+                      <a:round/>
+                      <a:headEnd type="none" w="med" len="med"/>
+                      <a:tailEnd type="none" w="med" len="med"/>
+                    </a:lnT>
+                    <a:lnB w="6350" cap="flat" cmpd="sng" algn="ctr">
+                      <a:solidFill>
+                        <a:srgbClr val="E7E5E4"/>
+                      </a:solidFill>
+                      <a:prstDash val="solid"/>
+                      <a:round/>
+                      <a:headEnd type="none" w="med" len="med"/>
+                      <a:tailEnd type="none" w="med" len="med"/>
+                    </a:lnB>
+                    <a:solidFill>
+                      <a:srgbClr val="FFFFFF"/>
+                    </a:solidFill>
+                  </a:tcPr>
+                </a:tc>
+                <a:tc>
+                  <a:txBody>
+                    <a:bodyPr/>
+                    <a:lstStyle/>
+                    <a:p>
+                      <a:pPr algn="l" indent="0" marL="0">
+                        <a:buNone/>
+                      </a:pPr>
+                      <a:r>
+                        <a:rPr lang="en-US" sz="900" spc="100" kern="0" dirty="0">
+                          <a:solidFill>
+                            <a:srgbClr val="78716C"/>
+                          </a:solidFill>
+                          <a:latin typeface="JetBrains Mono" pitchFamily="34" charset="0"/>
+                          <a:ea typeface="JetBrains Mono" pitchFamily="34" charset="-122"/>
+                          <a:cs typeface="JetBrains Mono" pitchFamily="34" charset="-120"/>
+                        </a:rPr>
+                        <a:t>COLUMN</a:t>
+                      </a:r>
+                      <a:endParaRPr lang="en-US" sz="900" dirty="0">
+                        <a:latin typeface="JetBrains Mono" charset="0"/>
+                        <a:ea typeface="JetBrains Mono" charset="0"/>
+                        <a:cs typeface="JetBrains Mono" charset="0"/>
+                      </a:endParaRPr>
+                    </a:p>
+                  </a:txBody>
+                  <a:tcPr marL="114300" marR="114300" marT="114300" marB="114300" anchor="ctr">
+                    <a:lnL w="6350" cap="flat" cmpd="sng" algn="ctr">
+                      <a:solidFill>
+                        <a:srgbClr val="E7E5E4"/>
+                      </a:solidFill>
+                      <a:prstDash val="solid"/>
+                      <a:round/>
+                      <a:headEnd type="none" w="med" len="med"/>
+                      <a:tailEnd type="none" w="med" len="med"/>
+                    </a:lnL>
+                    <a:lnR w="6350" cap="flat" cmpd="sng" algn="ctr">
+                      <a:solidFill>
+                        <a:srgbClr val="E7E5E4"/>
+                      </a:solidFill>
+                      <a:prstDash val="solid"/>
+                      <a:round/>
+                      <a:headEnd type="none" w="med" len="med"/>
+                      <a:tailEnd type="none" w="med" len="med"/>
+                    </a:lnR>
+                    <a:lnT w="6350" cap="flat" cmpd="sng" algn="ctr">
+                      <a:solidFill>
+                        <a:srgbClr val="E7E5E4"/>
+                      </a:solidFill>
+                      <a:prstDash val="solid"/>
+                      <a:round/>
+                      <a:headEnd type="none" w="med" len="med"/>
+                      <a:tailEnd type="none" w="med" len="med"/>
+                    </a:lnT>
+                    <a:lnB w="6350" cap="flat" cmpd="sng" algn="ctr">
+                      <a:solidFill>
+                        <a:srgbClr val="E7E5E4"/>
+                      </a:solidFill>
+                      <a:prstDash val="solid"/>
+                      <a:round/>
+                      <a:headEnd type="none" w="med" len="med"/>
+                      <a:tailEnd type="none" w="med" len="med"/>
+                    </a:lnB>
+                    <a:solidFill>
+                      <a:srgbClr val="FFFFFF"/>
+                    </a:solidFill>
+                  </a:tcPr>
+                </a:tc>
+                <a:tc>
+                  <a:txBody>
+                    <a:bodyPr/>
+                    <a:lstStyle/>
+                    <a:p>
+                      <a:pPr algn="l" indent="0" marL="0">
+                        <a:buNone/>
+                      </a:pPr>
+                      <a:r>
+                        <a:rPr lang="en-US" sz="900" spc="100" kern="0" dirty="0">
+                          <a:solidFill>
+                            <a:srgbClr val="78716C"/>
+                          </a:solidFill>
+                          <a:latin typeface="JetBrains Mono" pitchFamily="34" charset="0"/>
+                          <a:ea typeface="JetBrains Mono" pitchFamily="34" charset="-122"/>
+                          <a:cs typeface="JetBrains Mono" pitchFamily="34" charset="-120"/>
+                        </a:rPr>
+                        <a:t>COLUMN</a:t>
+                      </a:r>
+                      <a:endParaRPr lang="en-US" sz="900" dirty="0">
+                        <a:latin typeface="JetBrains Mono" charset="0"/>
+                        <a:ea typeface="JetBrains Mono" charset="0"/>
+                        <a:cs typeface="JetBrains Mono" charset="0"/>
+                      </a:endParaRPr>
+                    </a:p>
+                  </a:txBody>
+                  <a:tcPr marL="114300" marR="114300" marT="114300" marB="114300" anchor="ctr">
+                    <a:lnL w="6350" cap="flat" cmpd="sng" algn="ctr">
+                      <a:solidFill>
+                        <a:srgbClr val="E7E5E4"/>
+                      </a:solidFill>
+                      <a:prstDash val="solid"/>
+                      <a:round/>
+                      <a:headEnd type="none" w="med" len="med"/>
+                      <a:tailEnd type="none" w="med" len="med"/>
+                    </a:lnL>
+                    <a:lnR w="6350" cap="flat" cmpd="sng" algn="ctr">
+                      <a:solidFill>
+                        <a:srgbClr val="E7E5E4"/>
+                      </a:solidFill>
+                      <a:prstDash val="solid"/>
+                      <a:round/>
+                      <a:headEnd type="none" w="med" len="med"/>
+                      <a:tailEnd type="none" w="med" len="med"/>
+                    </a:lnR>
+                    <a:lnT w="6350" cap="flat" cmpd="sng" algn="ctr">
+                      <a:solidFill>
+                        <a:srgbClr val="E7E5E4"/>
+                      </a:solidFill>
+                      <a:prstDash val="solid"/>
+                      <a:round/>
+                      <a:headEnd type="none" w="med" len="med"/>
+                      <a:tailEnd type="none" w="med" len="med"/>
+                    </a:lnT>
+                    <a:lnB w="6350" cap="flat" cmpd="sng" algn="ctr">
+                      <a:solidFill>
+                        <a:srgbClr val="E7E5E4"/>
+                      </a:solidFill>
+                      <a:prstDash val="solid"/>
+                      <a:round/>
+                      <a:headEnd type="none" w="med" len="med"/>
+                      <a:tailEnd type="none" w="med" len="med"/>
+                    </a:lnB>
+                    <a:solidFill>
+                      <a:srgbClr val="FFFFFF"/>
+                    </a:solidFill>
+                  </a:tcPr>
+                </a:tc>
+              </a:tr>
+              <a:tr h="475488">
+                <a:tc>
+                  <a:txBody>
+                    <a:bodyPr/>
+                    <a:lstStyle/>
+                    <a:p>
+                      <a:pPr algn="l" indent="0" marL="0">
+                        <a:buNone/>
+                      </a:pPr>
+                      <a:r>
+                        <a:rPr lang="en-US" sz="900" spc="100" kern="0" dirty="0">
+                          <a:solidFill>
+                            <a:srgbClr val="44403C"/>
+                          </a:solidFill>
+                          <a:latin typeface="JetBrains Mono" pitchFamily="34" charset="0"/>
+                          <a:ea typeface="JetBrains Mono" pitchFamily="34" charset="-122"/>
+                          <a:cs typeface="JetBrains Mono" pitchFamily="34" charset="-120"/>
+                        </a:rPr>
+                        <a:t>ROW LABEL</a:t>
+                      </a:r>
+                      <a:endParaRPr lang="en-US" sz="900" dirty="0">
+                        <a:latin typeface="JetBrains Mono" charset="0"/>
+                        <a:ea typeface="JetBrains Mono" charset="0"/>
+                        <a:cs typeface="JetBrains Mono" charset="0"/>
+                      </a:endParaRPr>
+                    </a:p>
+                  </a:txBody>
+                  <a:tcPr marL="114300" marR="114300" marT="114300" marB="114300" anchor="ctr">
+                    <a:lnL w="6350" cap="flat" cmpd="sng" algn="ctr">
+                      <a:solidFill>
+                        <a:srgbClr val="E7E5E4"/>
+                      </a:solidFill>
+                      <a:prstDash val="solid"/>
+                      <a:round/>
+                      <a:headEnd type="none" w="med" len="med"/>
+                      <a:tailEnd type="none" w="med" len="med"/>
+                    </a:lnL>
+                    <a:lnR w="6350" cap="flat" cmpd="sng" algn="ctr">
+                      <a:solidFill>
+                        <a:srgbClr val="E7E5E4"/>
+                      </a:solidFill>
+                      <a:prstDash val="solid"/>
+                      <a:round/>
+                      <a:headEnd type="none" w="med" len="med"/>
+                      <a:tailEnd type="none" w="med" len="med"/>
+                    </a:lnR>
+                    <a:lnT w="6350" cap="flat" cmpd="sng" algn="ctr">
+                      <a:solidFill>
+                        <a:srgbClr val="E7E5E4"/>
+                      </a:solidFill>
+                      <a:prstDash val="solid"/>
+                      <a:round/>
+                      <a:headEnd type="none" w="med" len="med"/>
+                      <a:tailEnd type="none" w="med" len="med"/>
+                    </a:lnT>
+                    <a:lnB w="6350" cap="flat" cmpd="sng" algn="ctr">
+                      <a:solidFill>
+                        <a:srgbClr val="E7E5E4"/>
+                      </a:solidFill>
+                      <a:prstDash val="solid"/>
+                      <a:round/>
+                      <a:headEnd type="none" w="med" len="med"/>
+                      <a:tailEnd type="none" w="med" len="med"/>
+                    </a:lnB>
+                    <a:solidFill>
+                      <a:srgbClr val="FFFFFF"/>
+                    </a:solidFill>
+                  </a:tcPr>
+                </a:tc>
+                <a:tc>
+                  <a:txBody>
+                    <a:bodyPr/>
+                    <a:lstStyle/>
+                    <a:p>
+                      <a:pPr algn="l" indent="0" marL="0">
+                        <a:buNone/>
+                      </a:pPr>
+                      <a:r>
+                        <a:rPr lang="en-US" sz="1200" dirty="0">
+                          <a:solidFill>
+                            <a:srgbClr val="57534E"/>
+                          </a:solidFill>
+                          <a:latin typeface="Inter" pitchFamily="34" charset="0"/>
+                          <a:ea typeface="Inter" pitchFamily="34" charset="-122"/>
+                          <a:cs typeface="Inter" pitchFamily="34" charset="-120"/>
+                        </a:rPr>
+                        <a:t>Row data</a:t>
+                      </a:r>
+                      <a:endParaRPr lang="en-US" sz="1200" dirty="0">
+                        <a:latin typeface="Inter" charset="0"/>
+                        <a:ea typeface="Inter" charset="0"/>
+                        <a:cs typeface="Inter" charset="0"/>
+                      </a:endParaRPr>
+                    </a:p>
+                  </a:txBody>
+                  <a:tcPr marL="114300" marR="114300" marT="114300" marB="114300" anchor="ctr">
+                    <a:lnL w="6350" cap="flat" cmpd="sng" algn="ctr">
+                      <a:solidFill>
+                        <a:srgbClr val="E7E5E4"/>
+                      </a:solidFill>
+                      <a:prstDash val="solid"/>
+                      <a:round/>
+                      <a:headEnd type="none" w="med" len="med"/>
+                      <a:tailEnd type="none" w="med" len="med"/>
+                    </a:lnL>
+                    <a:lnR w="6350" cap="flat" cmpd="sng" algn="ctr">
+                      <a:solidFill>
+                        <a:srgbClr val="E7E5E4"/>
+                      </a:solidFill>
+                      <a:prstDash val="solid"/>
+                      <a:round/>
+                      <a:headEnd type="none" w="med" len="med"/>
+                      <a:tailEnd type="none" w="med" len="med"/>
+                    </a:lnR>
+                    <a:lnT w="6350" cap="flat" cmpd="sng" algn="ctr">
+                      <a:solidFill>
+                        <a:srgbClr val="E7E5E4"/>
+                      </a:solidFill>
+                      <a:prstDash val="solid"/>
+                      <a:round/>
+                      <a:headEnd type="none" w="med" len="med"/>
+                      <a:tailEnd type="none" w="med" len="med"/>
+                    </a:lnT>
+                    <a:lnB w="6350" cap="flat" cmpd="sng" algn="ctr">
+                      <a:solidFill>
+                        <a:srgbClr val="E7E5E4"/>
+                      </a:solidFill>
+                      <a:prstDash val="solid"/>
+                      <a:round/>
+                      <a:headEnd type="none" w="med" len="med"/>
+                      <a:tailEnd type="none" w="med" len="med"/>
+                    </a:lnB>
+                    <a:solidFill>
+                      <a:srgbClr val="FFFFFF"/>
+                    </a:solidFill>
+                  </a:tcPr>
+                </a:tc>
+                <a:tc>
+                  <a:txBody>
+                    <a:bodyPr/>
+                    <a:lstStyle/>
+                    <a:p>
+                      <a:pPr algn="l" indent="0" marL="0">
+                        <a:buNone/>
+                      </a:pPr>
+                      <a:r>
+                        <a:rPr lang="en-US" sz="1200" dirty="0">
+                          <a:solidFill>
+                            <a:srgbClr val="57534E"/>
+                          </a:solidFill>
+                          <a:latin typeface="Inter" pitchFamily="34" charset="0"/>
+                          <a:ea typeface="Inter" pitchFamily="34" charset="-122"/>
+                          <a:cs typeface="Inter" pitchFamily="34" charset="-120"/>
+                        </a:rPr>
+                        <a:t>Row data</a:t>
+                      </a:r>
+                      <a:endParaRPr lang="en-US" sz="1200" dirty="0">
+                        <a:latin typeface="Inter" charset="0"/>
+                        <a:ea typeface="Inter" charset="0"/>
+                        <a:cs typeface="Inter" charset="0"/>
+                      </a:endParaRPr>
+                    </a:p>
+                  </a:txBody>
+                  <a:tcPr marL="114300" marR="114300" marT="114300" marB="114300" anchor="ctr">
+                    <a:lnL w="6350" cap="flat" cmpd="sng" algn="ctr">
+                      <a:solidFill>
+                        <a:srgbClr val="E7E5E4"/>
+                      </a:solidFill>
+                      <a:prstDash val="solid"/>
+                      <a:round/>
+                      <a:headEnd type="none" w="med" len="med"/>
+                      <a:tailEnd type="none" w="med" len="med"/>
+                    </a:lnL>
+                    <a:lnR w="6350" cap="flat" cmpd="sng" algn="ctr">
+                      <a:solidFill>
+                        <a:srgbClr val="E7E5E4"/>
+                      </a:solidFill>
+                      <a:prstDash val="solid"/>
+                      <a:round/>
+                      <a:headEnd type="none" w="med" len="med"/>
+                      <a:tailEnd type="none" w="med" len="med"/>
+                    </a:lnR>
+                    <a:lnT w="6350" cap="flat" cmpd="sng" algn="ctr">
+                      <a:solidFill>
+                        <a:srgbClr val="E7E5E4"/>
+                      </a:solidFill>
+                      <a:prstDash val="solid"/>
+                      <a:round/>
+                      <a:headEnd type="none" w="med" len="med"/>
+                      <a:tailEnd type="none" w="med" len="med"/>
+                    </a:lnT>
+                    <a:lnB w="6350" cap="flat" cmpd="sng" algn="ctr">
+                      <a:solidFill>
+                        <a:srgbClr val="E7E5E4"/>
+                      </a:solidFill>
+                      <a:prstDash val="solid"/>
+                      <a:round/>
+                      <a:headEnd type="none" w="med" len="med"/>
+                      <a:tailEnd type="none" w="med" len="med"/>
+                    </a:lnB>
+                    <a:solidFill>
+                      <a:srgbClr val="FFFFFF"/>
+                    </a:solidFill>
+                  </a:tcPr>
+                </a:tc>
+                <a:tc>
+                  <a:txBody>
+                    <a:bodyPr/>
+                    <a:lstStyle/>
+                    <a:p>
+                      <a:pPr algn="l" indent="0" marL="0">
+                        <a:buNone/>
+                      </a:pPr>
+                      <a:r>
+                        <a:rPr lang="en-US" sz="1200" dirty="0">
+                          <a:solidFill>
+                            <a:srgbClr val="57534E"/>
+                          </a:solidFill>
+                          <a:latin typeface="Inter" pitchFamily="34" charset="0"/>
+                          <a:ea typeface="Inter" pitchFamily="34" charset="-122"/>
+                          <a:cs typeface="Inter" pitchFamily="34" charset="-120"/>
+                        </a:rPr>
+                        <a:t>Row data</a:t>
+                      </a:r>
+                      <a:endParaRPr lang="en-US" sz="1200" dirty="0">
+                        <a:latin typeface="Inter" charset="0"/>
+                        <a:ea typeface="Inter" charset="0"/>
+                        <a:cs typeface="Inter" charset="0"/>
+                      </a:endParaRPr>
+                    </a:p>
+                  </a:txBody>
+                  <a:tcPr marL="114300" marR="114300" marT="114300" marB="114300" anchor="ctr">
+                    <a:lnL w="6350" cap="flat" cmpd="sng" algn="ctr">
+                      <a:solidFill>
+                        <a:srgbClr val="E7E5E4"/>
+                      </a:solidFill>
+                      <a:prstDash val="solid"/>
+                      <a:round/>
+                      <a:headEnd type="none" w="med" len="med"/>
+                      <a:tailEnd type="none" w="med" len="med"/>
+                    </a:lnL>
+                    <a:lnR w="6350" cap="flat" cmpd="sng" algn="ctr">
+                      <a:solidFill>
+                        <a:srgbClr val="E7E5E4"/>
+                      </a:solidFill>
+                      <a:prstDash val="solid"/>
+                      <a:round/>
+                      <a:headEnd type="none" w="med" len="med"/>
+                      <a:tailEnd type="none" w="med" len="med"/>
+                    </a:lnR>
+                    <a:lnT w="6350" cap="flat" cmpd="sng" algn="ctr">
+                      <a:solidFill>
+                        <a:srgbClr val="E7E5E4"/>
+                      </a:solidFill>
+                      <a:prstDash val="solid"/>
+                      <a:round/>
+                      <a:headEnd type="none" w="med" len="med"/>
+                      <a:tailEnd type="none" w="med" len="med"/>
+                    </a:lnT>
+                    <a:lnB w="6350" cap="flat" cmpd="sng" algn="ctr">
+                      <a:solidFill>
+                        <a:srgbClr val="E7E5E4"/>
+                      </a:solidFill>
+                      <a:prstDash val="solid"/>
+                      <a:round/>
+                      <a:headEnd type="none" w="med" len="med"/>
+                      <a:tailEnd type="none" w="med" len="med"/>
+                    </a:lnB>
+                    <a:solidFill>
+                      <a:srgbClr val="FFFFFF"/>
+                    </a:solidFill>
+                  </a:tcPr>
+                </a:tc>
+              </a:tr>
+              <a:tr h="475488">
+                <a:tc>
+                  <a:txBody>
+                    <a:bodyPr/>
+                    <a:lstStyle/>
+                    <a:p>
+                      <a:pPr algn="l" indent="0" marL="0">
+                        <a:buNone/>
+                      </a:pPr>
+                      <a:r>
+                        <a:rPr lang="en-US" sz="900" spc="100" kern="0" dirty="0">
+                          <a:solidFill>
+                            <a:srgbClr val="44403C"/>
+                          </a:solidFill>
+                          <a:latin typeface="JetBrains Mono" pitchFamily="34" charset="0"/>
+                          <a:ea typeface="JetBrains Mono" pitchFamily="34" charset="-122"/>
+                          <a:cs typeface="JetBrains Mono" pitchFamily="34" charset="-120"/>
+                        </a:rPr>
+                        <a:t>ROW LABEL</a:t>
+                      </a:r>
+                      <a:endParaRPr lang="en-US" sz="900" dirty="0">
+                        <a:latin typeface="JetBrains Mono" charset="0"/>
+                        <a:ea typeface="JetBrains Mono" charset="0"/>
+                        <a:cs typeface="JetBrains Mono" charset="0"/>
+                      </a:endParaRPr>
+                    </a:p>
+                  </a:txBody>
+                  <a:tcPr marL="114300" marR="114300" marT="114300" marB="114300" anchor="ctr">
+                    <a:lnL w="6350" cap="flat" cmpd="sng" algn="ctr">
+                      <a:solidFill>
+                        <a:srgbClr val="E7E5E4"/>
+                      </a:solidFill>
+                      <a:prstDash val="solid"/>
+                      <a:round/>
+                      <a:headEnd type="none" w="med" len="med"/>
+                      <a:tailEnd type="none" w="med" len="med"/>
+                    </a:lnL>
+                    <a:lnR w="6350" cap="flat" cmpd="sng" algn="ctr">
+                      <a:solidFill>
+                        <a:srgbClr val="E7E5E4"/>
+                      </a:solidFill>
+                      <a:prstDash val="solid"/>
+                      <a:round/>
+                      <a:headEnd type="none" w="med" len="med"/>
+                      <a:tailEnd type="none" w="med" len="med"/>
+                    </a:lnR>
+                    <a:lnT w="6350" cap="flat" cmpd="sng" algn="ctr">
+                      <a:solidFill>
+                        <a:srgbClr val="E7E5E4"/>
+                      </a:solidFill>
+                      <a:prstDash val="solid"/>
+                      <a:round/>
+                      <a:headEnd type="none" w="med" len="med"/>
+                      <a:tailEnd type="none" w="med" len="med"/>
+                    </a:lnT>
+                    <a:lnB w="6350" cap="flat" cmpd="sng" algn="ctr">
+                      <a:solidFill>
+                        <a:srgbClr val="E7E5E4"/>
+                      </a:solidFill>
+                      <a:prstDash val="solid"/>
+                      <a:round/>
+                      <a:headEnd type="none" w="med" len="med"/>
+                      <a:tailEnd type="none" w="med" len="med"/>
+                    </a:lnB>
+                    <a:solidFill>
+                      <a:srgbClr val="FFFFFF"/>
+                    </a:solidFill>
+                  </a:tcPr>
+                </a:tc>
+                <a:tc>
+                  <a:txBody>
+                    <a:bodyPr/>
+                    <a:lstStyle/>
+                    <a:p>
+                      <a:pPr algn="l" indent="0" marL="0">
+                        <a:buNone/>
+                      </a:pPr>
+                      <a:r>
+                        <a:rPr lang="en-US" sz="1200" dirty="0">
+                          <a:solidFill>
+                            <a:srgbClr val="57534E"/>
+                          </a:solidFill>
+                          <a:latin typeface="Inter" pitchFamily="34" charset="0"/>
+                          <a:ea typeface="Inter" pitchFamily="34" charset="-122"/>
+                          <a:cs typeface="Inter" pitchFamily="34" charset="-120"/>
+                        </a:rPr>
+                        <a:t>Row data</a:t>
+                      </a:r>
+                      <a:endParaRPr lang="en-US" sz="1200" dirty="0">
+                        <a:latin typeface="Inter" charset="0"/>
+                        <a:ea typeface="Inter" charset="0"/>
+                        <a:cs typeface="Inter" charset="0"/>
+                      </a:endParaRPr>
+                    </a:p>
+                  </a:txBody>
+                  <a:tcPr marL="114300" marR="114300" marT="114300" marB="114300" anchor="ctr">
+                    <a:lnL w="6350" cap="flat" cmpd="sng" algn="ctr">
+                      <a:solidFill>
+                        <a:srgbClr val="E7E5E4"/>
+                      </a:solidFill>
+                      <a:prstDash val="solid"/>
+                      <a:round/>
+                      <a:headEnd type="none" w="med" len="med"/>
+                      <a:tailEnd type="none" w="med" len="med"/>
+                    </a:lnL>
+                    <a:lnR w="6350" cap="flat" cmpd="sng" algn="ctr">
+                      <a:solidFill>
+                        <a:srgbClr val="E7E5E4"/>
+                      </a:solidFill>
+                      <a:prstDash val="solid"/>
+                      <a:round/>
+                      <a:headEnd type="none" w="med" len="med"/>
+                      <a:tailEnd type="none" w="med" len="med"/>
+                    </a:lnR>
+                    <a:lnT w="6350" cap="flat" cmpd="sng" algn="ctr">
+                      <a:solidFill>
+                        <a:srgbClr val="E7E5E4"/>
+                      </a:solidFill>
+                      <a:prstDash val="solid"/>
+                      <a:round/>
+                      <a:headEnd type="none" w="med" len="med"/>
+                      <a:tailEnd type="none" w="med" len="med"/>
+                    </a:lnT>
+                    <a:lnB w="6350" cap="flat" cmpd="sng" algn="ctr">
+                      <a:solidFill>
+                        <a:srgbClr val="E7E5E4"/>
+                      </a:solidFill>
+                      <a:prstDash val="solid"/>
+                      <a:round/>
+                      <a:headEnd type="none" w="med" len="med"/>
+                      <a:tailEnd type="none" w="med" len="med"/>
+                    </a:lnB>
+                    <a:solidFill>
+                      <a:srgbClr val="FFFFFF"/>
+                    </a:solidFill>
+                  </a:tcPr>
+                </a:tc>
+                <a:tc>
+                  <a:txBody>
+                    <a:bodyPr/>
+                    <a:lstStyle/>
+                    <a:p>
+                      <a:pPr algn="l" indent="0" marL="0">
+                        <a:buNone/>
+                      </a:pPr>
+                      <a:r>
+                        <a:rPr lang="en-US" sz="1200" dirty="0">
+                          <a:solidFill>
+                            <a:srgbClr val="57534E"/>
+                          </a:solidFill>
+                          <a:latin typeface="Inter" pitchFamily="34" charset="0"/>
+                          <a:ea typeface="Inter" pitchFamily="34" charset="-122"/>
+                          <a:cs typeface="Inter" pitchFamily="34" charset="-120"/>
+                        </a:rPr>
+                        <a:t>Row data</a:t>
+                      </a:r>
+                      <a:endParaRPr lang="en-US" sz="1200" dirty="0">
+                        <a:latin typeface="Inter" charset="0"/>
+                        <a:ea typeface="Inter" charset="0"/>
+                        <a:cs typeface="Inter" charset="0"/>
+                      </a:endParaRPr>
+                    </a:p>
+                  </a:txBody>
+                  <a:tcPr marL="114300" marR="114300" marT="114300" marB="114300" anchor="ctr">
+                    <a:lnL w="6350" cap="flat" cmpd="sng" algn="ctr">
+                      <a:solidFill>
+                        <a:srgbClr val="E7E5E4"/>
+                      </a:solidFill>
+                      <a:prstDash val="solid"/>
+                      <a:round/>
+                      <a:headEnd type="none" w="med" len="med"/>
+                      <a:tailEnd type="none" w="med" len="med"/>
+                    </a:lnL>
+                    <a:lnR w="6350" cap="flat" cmpd="sng" algn="ctr">
+                      <a:solidFill>
+                        <a:srgbClr val="E7E5E4"/>
+                      </a:solidFill>
+                      <a:prstDash val="solid"/>
+                      <a:round/>
+                      <a:headEnd type="none" w="med" len="med"/>
+                      <a:tailEnd type="none" w="med" len="med"/>
+                    </a:lnR>
+                    <a:lnT w="6350" cap="flat" cmpd="sng" algn="ctr">
+                      <a:solidFill>
+                        <a:srgbClr val="E7E5E4"/>
+                      </a:solidFill>
+                      <a:prstDash val="solid"/>
+                      <a:round/>
+                      <a:headEnd type="none" w="med" len="med"/>
+                      <a:tailEnd type="none" w="med" len="med"/>
+                    </a:lnT>
+                    <a:lnB w="6350" cap="flat" cmpd="sng" algn="ctr">
+                      <a:solidFill>
+                        <a:srgbClr val="E7E5E4"/>
+                      </a:solidFill>
+                      <a:prstDash val="solid"/>
+                      <a:round/>
+                      <a:headEnd type="none" w="med" len="med"/>
+                      <a:tailEnd type="none" w="med" len="med"/>
+                    </a:lnB>
+                    <a:solidFill>
+                      <a:srgbClr val="FFFFFF"/>
+                    </a:solidFill>
+                  </a:tcPr>
+                </a:tc>
+                <a:tc>
+                  <a:txBody>
+                    <a:bodyPr/>
+                    <a:lstStyle/>
+                    <a:p>
+                      <a:pPr algn="l" indent="0" marL="0">
+                        <a:buNone/>
+                      </a:pPr>
+                      <a:r>
+                        <a:rPr lang="en-US" sz="1200" dirty="0">
+                          <a:solidFill>
+                            <a:srgbClr val="57534E"/>
+                          </a:solidFill>
+                          <a:latin typeface="Inter" pitchFamily="34" charset="0"/>
+                          <a:ea typeface="Inter" pitchFamily="34" charset="-122"/>
+                          <a:cs typeface="Inter" pitchFamily="34" charset="-120"/>
+                        </a:rPr>
+                        <a:t>Row data</a:t>
+                      </a:r>
+                      <a:endParaRPr lang="en-US" sz="1200" dirty="0">
+                        <a:latin typeface="Inter" charset="0"/>
+                        <a:ea typeface="Inter" charset="0"/>
+                        <a:cs typeface="Inter" charset="0"/>
+                      </a:endParaRPr>
+                    </a:p>
+                  </a:txBody>
+                  <a:tcPr marL="114300" marR="114300" marT="114300" marB="114300" anchor="ctr">
+                    <a:lnL w="6350" cap="flat" cmpd="sng" algn="ctr">
+                      <a:solidFill>
+                        <a:srgbClr val="E7E5E4"/>
+                      </a:solidFill>
+                      <a:prstDash val="solid"/>
+                      <a:round/>
+                      <a:headEnd type="none" w="med" len="med"/>
+                      <a:tailEnd type="none" w="med" len="med"/>
+                    </a:lnL>
+                    <a:lnR w="6350" cap="flat" cmpd="sng" algn="ctr">
+                      <a:solidFill>
+                        <a:srgbClr val="E7E5E4"/>
+                      </a:solidFill>
+                      <a:prstDash val="solid"/>
+                      <a:round/>
+                      <a:headEnd type="none" w="med" len="med"/>
+                      <a:tailEnd type="none" w="med" len="med"/>
+                    </a:lnR>
+                    <a:lnT w="6350" cap="flat" cmpd="sng" algn="ctr">
+                      <a:solidFill>
+                        <a:srgbClr val="E7E5E4"/>
+                      </a:solidFill>
+                      <a:prstDash val="solid"/>
+                      <a:round/>
+                      <a:headEnd type="none" w="med" len="med"/>
+                      <a:tailEnd type="none" w="med" len="med"/>
+                    </a:lnT>
+                    <a:lnB w="6350" cap="flat" cmpd="sng" algn="ctr">
+                      <a:solidFill>
+                        <a:srgbClr val="E7E5E4"/>
+                      </a:solidFill>
+                      <a:prstDash val="solid"/>
+                      <a:round/>
+                      <a:headEnd type="none" w="med" len="med"/>
+                      <a:tailEnd type="none" w="med" len="med"/>
+                    </a:lnB>
+                    <a:solidFill>
+                      <a:srgbClr val="FFFFFF"/>
+                    </a:solidFill>
+                  </a:tcPr>
+                </a:tc>
+              </a:tr>
+              <a:tr h="475488">
+                <a:tc>
+                  <a:txBody>
+                    <a:bodyPr/>
+                    <a:lstStyle/>
+                    <a:p>
+                      <a:pPr algn="l" indent="0" marL="0">
+                        <a:buNone/>
+                      </a:pPr>
+                      <a:r>
+                        <a:rPr lang="en-US" sz="900" spc="100" kern="0" dirty="0">
+                          <a:solidFill>
+                            <a:srgbClr val="44403C"/>
+                          </a:solidFill>
+                          <a:latin typeface="JetBrains Mono" pitchFamily="34" charset="0"/>
+                          <a:ea typeface="JetBrains Mono" pitchFamily="34" charset="-122"/>
+                          <a:cs typeface="JetBrains Mono" pitchFamily="34" charset="-120"/>
+                        </a:rPr>
+                        <a:t>ROW LABEL</a:t>
+                      </a:r>
+                      <a:endParaRPr lang="en-US" sz="900" dirty="0">
+                        <a:latin typeface="JetBrains Mono" charset="0"/>
+                        <a:ea typeface="JetBrains Mono" charset="0"/>
+                        <a:cs typeface="JetBrains Mono" charset="0"/>
+                      </a:endParaRPr>
+                    </a:p>
+                  </a:txBody>
+                  <a:tcPr marL="114300" marR="114300" marT="114300" marB="114300" anchor="ctr">
+                    <a:lnL w="6350" cap="flat" cmpd="sng" algn="ctr">
+                      <a:solidFill>
+                        <a:srgbClr val="E7E5E4"/>
+                      </a:solidFill>
+                      <a:prstDash val="solid"/>
+                      <a:round/>
+                      <a:headEnd type="none" w="med" len="med"/>
+                      <a:tailEnd type="none" w="med" len="med"/>
+                    </a:lnL>
+                    <a:lnR w="6350" cap="flat" cmpd="sng" algn="ctr">
+                      <a:solidFill>
+                        <a:srgbClr val="E7E5E4"/>
+                      </a:solidFill>
+                      <a:prstDash val="solid"/>
+                      <a:round/>
+                      <a:headEnd type="none" w="med" len="med"/>
+                      <a:tailEnd type="none" w="med" len="med"/>
+                    </a:lnR>
+                    <a:lnT w="6350" cap="flat" cmpd="sng" algn="ctr">
+                      <a:solidFill>
+                        <a:srgbClr val="E7E5E4"/>
+                      </a:solidFill>
+                      <a:prstDash val="solid"/>
+                      <a:round/>
+                      <a:headEnd type="none" w="med" len="med"/>
+                      <a:tailEnd type="none" w="med" len="med"/>
+                    </a:lnT>
+                    <a:lnB w="6350" cap="flat" cmpd="sng" algn="ctr">
+                      <a:solidFill>
+                        <a:srgbClr val="E7E5E4"/>
+                      </a:solidFill>
+                      <a:prstDash val="solid"/>
+                      <a:round/>
+                      <a:headEnd type="none" w="med" len="med"/>
+                      <a:tailEnd type="none" w="med" len="med"/>
+                    </a:lnB>
+                    <a:solidFill>
+                      <a:srgbClr val="FFFFFF"/>
+                    </a:solidFill>
+                  </a:tcPr>
+                </a:tc>
+                <a:tc>
+                  <a:txBody>
+                    <a:bodyPr/>
+                    <a:lstStyle/>
+                    <a:p>
+                      <a:pPr algn="l" indent="0" marL="0">
+                        <a:buNone/>
+                      </a:pPr>
+                      <a:r>
+                        <a:rPr lang="en-US" sz="1200" dirty="0">
+                          <a:solidFill>
+                            <a:srgbClr val="57534E"/>
+                          </a:solidFill>
+                          <a:latin typeface="Inter" pitchFamily="34" charset="0"/>
+                          <a:ea typeface="Inter" pitchFamily="34" charset="-122"/>
+                          <a:cs typeface="Inter" pitchFamily="34" charset="-120"/>
+                        </a:rPr>
+                        <a:t>Row data</a:t>
+                      </a:r>
+                      <a:endParaRPr lang="en-US" sz="1200" dirty="0">
+                        <a:latin typeface="Inter" charset="0"/>
+                        <a:ea typeface="Inter" charset="0"/>
+                        <a:cs typeface="Inter" charset="0"/>
+                      </a:endParaRPr>
+                    </a:p>
+                  </a:txBody>
+                  <a:tcPr marL="114300" marR="114300" marT="114300" marB="114300" anchor="ctr">
+                    <a:lnL w="6350" cap="flat" cmpd="sng" algn="ctr">
+                      <a:solidFill>
+                        <a:srgbClr val="E7E5E4"/>
+                      </a:solidFill>
+                      <a:prstDash val="solid"/>
+                      <a:round/>
+                      <a:headEnd type="none" w="med" len="med"/>
+                      <a:tailEnd type="none" w="med" len="med"/>
+                    </a:lnL>
+                    <a:lnR w="6350" cap="flat" cmpd="sng" algn="ctr">
+                      <a:solidFill>
+                        <a:srgbClr val="E7E5E4"/>
+                      </a:solidFill>
+                      <a:prstDash val="solid"/>
+                      <a:round/>
+                      <a:headEnd type="none" w="med" len="med"/>
+                      <a:tailEnd type="none" w="med" len="med"/>
+                    </a:lnR>
+                    <a:lnT w="6350" cap="flat" cmpd="sng" algn="ctr">
+                      <a:solidFill>
+                        <a:srgbClr val="E7E5E4"/>
+                      </a:solidFill>
+                      <a:prstDash val="solid"/>
+                      <a:round/>
+                      <a:headEnd type="none" w="med" len="med"/>
+                      <a:tailEnd type="none" w="med" len="med"/>
+                    </a:lnT>
+                    <a:lnB w="6350" cap="flat" cmpd="sng" algn="ctr">
+                      <a:solidFill>
+                        <a:srgbClr val="E7E5E4"/>
+                      </a:solidFill>
+                      <a:prstDash val="solid"/>
+                      <a:round/>
+                      <a:headEnd type="none" w="med" len="med"/>
+                      <a:tailEnd type="none" w="med" len="med"/>
+                    </a:lnB>
+                    <a:solidFill>
+                      <a:srgbClr val="FFFFFF"/>
+                    </a:solidFill>
+                  </a:tcPr>
+                </a:tc>
+                <a:tc>
+                  <a:txBody>
+                    <a:bodyPr/>
+                    <a:lstStyle/>
+                    <a:p>
+                      <a:pPr algn="l" indent="0" marL="0">
+                        <a:buNone/>
+                      </a:pPr>
+                      <a:r>
+                        <a:rPr lang="en-US" sz="1200" dirty="0">
+                          <a:solidFill>
+                            <a:srgbClr val="57534E"/>
+                          </a:solidFill>
+                          <a:latin typeface="Inter" pitchFamily="34" charset="0"/>
+                          <a:ea typeface="Inter" pitchFamily="34" charset="-122"/>
+                          <a:cs typeface="Inter" pitchFamily="34" charset="-120"/>
+                        </a:rPr>
+                        <a:t>Row data</a:t>
+                      </a:r>
+                      <a:endParaRPr lang="en-US" sz="1200" dirty="0">
+                        <a:latin typeface="Inter" charset="0"/>
+                        <a:ea typeface="Inter" charset="0"/>
+                        <a:cs typeface="Inter" charset="0"/>
+                      </a:endParaRPr>
+                    </a:p>
+                  </a:txBody>
+                  <a:tcPr marL="114300" marR="114300" marT="114300" marB="114300" anchor="ctr">
+                    <a:lnL w="6350" cap="flat" cmpd="sng" algn="ctr">
+                      <a:solidFill>
+                        <a:srgbClr val="E7E5E4"/>
+                      </a:solidFill>
+                      <a:prstDash val="solid"/>
+                      <a:round/>
+                      <a:headEnd type="none" w="med" len="med"/>
+                      <a:tailEnd type="none" w="med" len="med"/>
+                    </a:lnL>
+                    <a:lnR w="6350" cap="flat" cmpd="sng" algn="ctr">
+                      <a:solidFill>
+                        <a:srgbClr val="E7E5E4"/>
+                      </a:solidFill>
+                      <a:prstDash val="solid"/>
+                      <a:round/>
+                      <a:headEnd type="none" w="med" len="med"/>
+                      <a:tailEnd type="none" w="med" len="med"/>
+                    </a:lnR>
+                    <a:lnT w="6350" cap="flat" cmpd="sng" algn="ctr">
+                      <a:solidFill>
+                        <a:srgbClr val="E7E5E4"/>
+                      </a:solidFill>
+                      <a:prstDash val="solid"/>
+                      <a:round/>
+                      <a:headEnd type="none" w="med" len="med"/>
+                      <a:tailEnd type="none" w="med" len="med"/>
+                    </a:lnT>
+                    <a:lnB w="6350" cap="flat" cmpd="sng" algn="ctr">
+                      <a:solidFill>
+                        <a:srgbClr val="E7E5E4"/>
+                      </a:solidFill>
+                      <a:prstDash val="solid"/>
+                      <a:round/>
+                      <a:headEnd type="none" w="med" len="med"/>
+                      <a:tailEnd type="none" w="med" len="med"/>
+                    </a:lnB>
+                    <a:solidFill>
+                      <a:srgbClr val="FFFFFF"/>
+                    </a:solidFill>
+                  </a:tcPr>
+                </a:tc>
+                <a:tc>
+                  <a:txBody>
+                    <a:bodyPr/>
+                    <a:lstStyle/>
+                    <a:p>
+                      <a:pPr algn="l" indent="0" marL="0">
+                        <a:buNone/>
+                      </a:pPr>
+                      <a:r>
+                        <a:rPr lang="en-US" sz="1200" dirty="0">
+                          <a:solidFill>
+                            <a:srgbClr val="57534E"/>
+                          </a:solidFill>
+                          <a:latin typeface="Inter" pitchFamily="34" charset="0"/>
+                          <a:ea typeface="Inter" pitchFamily="34" charset="-122"/>
+                          <a:cs typeface="Inter" pitchFamily="34" charset="-120"/>
+                        </a:rPr>
+                        <a:t>Row data</a:t>
+                      </a:r>
+                      <a:endParaRPr lang="en-US" sz="1200" dirty="0">
+                        <a:latin typeface="Inter" charset="0"/>
+                        <a:ea typeface="Inter" charset="0"/>
+                        <a:cs typeface="Inter" charset="0"/>
+                      </a:endParaRPr>
+                    </a:p>
+                  </a:txBody>
+                  <a:tcPr marL="114300" marR="114300" marT="114300" marB="114300" anchor="ctr">
+                    <a:lnL w="6350" cap="flat" cmpd="sng" algn="ctr">
+                      <a:solidFill>
+                        <a:srgbClr val="E7E5E4"/>
+                      </a:solidFill>
+                      <a:prstDash val="solid"/>
+                      <a:round/>
+                      <a:headEnd type="none" w="med" len="med"/>
+                      <a:tailEnd type="none" w="med" len="med"/>
+                    </a:lnL>
+                    <a:lnR w="6350" cap="flat" cmpd="sng" algn="ctr">
+                      <a:solidFill>
+                        <a:srgbClr val="E7E5E4"/>
+                      </a:solidFill>
+                      <a:prstDash val="solid"/>
+                      <a:round/>
+                      <a:headEnd type="none" w="med" len="med"/>
+                      <a:tailEnd type="none" w="med" len="med"/>
+                    </a:lnR>
+                    <a:lnT w="6350" cap="flat" cmpd="sng" algn="ctr">
+                      <a:solidFill>
+                        <a:srgbClr val="E7E5E4"/>
+                      </a:solidFill>
+                      <a:prstDash val="solid"/>
+                      <a:round/>
+                      <a:headEnd type="none" w="med" len="med"/>
+                      <a:tailEnd type="none" w="med" len="med"/>
+                    </a:lnT>
+                    <a:lnB w="6350" cap="flat" cmpd="sng" algn="ctr">
+                      <a:solidFill>
+                        <a:srgbClr val="E7E5E4"/>
+                      </a:solidFill>
+                      <a:prstDash val="solid"/>
+                      <a:round/>
+                      <a:headEnd type="none" w="med" len="med"/>
+                      <a:tailEnd type="none" w="med" len="med"/>
+                    </a:lnB>
+                    <a:solidFill>
+                      <a:srgbClr val="FFFFFF"/>
+                    </a:solidFill>
+                  </a:tcPr>
+                </a:tc>
+              </a:tr>
+              <a:tr h="475488">
+                <a:tc>
+                  <a:txBody>
+                    <a:bodyPr/>
+                    <a:lstStyle/>
+                    <a:p>
+                      <a:pPr algn="l" indent="0" marL="0">
+                        <a:buNone/>
+                      </a:pPr>
+                      <a:r>
+                        <a:rPr lang="en-US" sz="900" spc="100" kern="0" dirty="0">
+                          <a:solidFill>
+                            <a:srgbClr val="44403C"/>
+                          </a:solidFill>
+                          <a:latin typeface="JetBrains Mono" pitchFamily="34" charset="0"/>
+                          <a:ea typeface="JetBrains Mono" pitchFamily="34" charset="-122"/>
+                          <a:cs typeface="JetBrains Mono" pitchFamily="34" charset="-120"/>
+                        </a:rPr>
+                        <a:t>ROW LABEL</a:t>
+                      </a:r>
+                      <a:endParaRPr lang="en-US" sz="900" dirty="0">
+                        <a:latin typeface="JetBrains Mono" charset="0"/>
+                        <a:ea typeface="JetBrains Mono" charset="0"/>
+                        <a:cs typeface="JetBrains Mono" charset="0"/>
+                      </a:endParaRPr>
+                    </a:p>
+                  </a:txBody>
+                  <a:tcPr marL="114300" marR="114300" marT="114300" marB="114300" anchor="ctr">
+                    <a:lnL w="6350" cap="flat" cmpd="sng" algn="ctr">
+                      <a:solidFill>
+                        <a:srgbClr val="E7E5E4"/>
+                      </a:solidFill>
+                      <a:prstDash val="solid"/>
+                      <a:round/>
+                      <a:headEnd type="none" w="med" len="med"/>
+                      <a:tailEnd type="none" w="med" len="med"/>
+                    </a:lnL>
+                    <a:lnR w="6350" cap="flat" cmpd="sng" algn="ctr">
+                      <a:solidFill>
+                        <a:srgbClr val="E7E5E4"/>
+                      </a:solidFill>
+                      <a:prstDash val="solid"/>
+                      <a:round/>
+                      <a:headEnd type="none" w="med" len="med"/>
+                      <a:tailEnd type="none" w="med" len="med"/>
+                    </a:lnR>
+                    <a:lnT w="6350" cap="flat" cmpd="sng" algn="ctr">
+                      <a:solidFill>
+                        <a:srgbClr val="E7E5E4"/>
+                      </a:solidFill>
+                      <a:prstDash val="solid"/>
+                      <a:round/>
+                      <a:headEnd type="none" w="med" len="med"/>
+                      <a:tailEnd type="none" w="med" len="med"/>
+                    </a:lnT>
+                    <a:lnB w="6350" cap="flat" cmpd="sng" algn="ctr">
+                      <a:solidFill>
+                        <a:srgbClr val="E7E5E4"/>
+                      </a:solidFill>
+                      <a:prstDash val="solid"/>
+                      <a:round/>
+                      <a:headEnd type="none" w="med" len="med"/>
+                      <a:tailEnd type="none" w="med" len="med"/>
+                    </a:lnB>
+                    <a:solidFill>
+                      <a:srgbClr val="FFFFFF"/>
+                    </a:solidFill>
+                  </a:tcPr>
+                </a:tc>
+                <a:tc>
+                  <a:txBody>
+                    <a:bodyPr/>
+                    <a:lstStyle/>
+                    <a:p>
+                      <a:pPr algn="l" indent="0" marL="0">
+                        <a:buNone/>
+                      </a:pPr>
+                      <a:r>
+                        <a:rPr lang="en-US" sz="1200" dirty="0">
+                          <a:solidFill>
+                            <a:srgbClr val="57534E"/>
+                          </a:solidFill>
+                          <a:latin typeface="Inter" pitchFamily="34" charset="0"/>
+                          <a:ea typeface="Inter" pitchFamily="34" charset="-122"/>
+                          <a:cs typeface="Inter" pitchFamily="34" charset="-120"/>
+                        </a:rPr>
+                        <a:t>Row data</a:t>
+                      </a:r>
+                      <a:endParaRPr lang="en-US" sz="1200" dirty="0">
+                        <a:latin typeface="Inter" charset="0"/>
+                        <a:ea typeface="Inter" charset="0"/>
+                        <a:cs typeface="Inter" charset="0"/>
+                      </a:endParaRPr>
+                    </a:p>
+                  </a:txBody>
+                  <a:tcPr marL="114300" marR="114300" marT="114300" marB="114300" anchor="ctr">
+                    <a:lnL w="6350" cap="flat" cmpd="sng" algn="ctr">
+                      <a:solidFill>
+                        <a:srgbClr val="E7E5E4"/>
+                      </a:solidFill>
+                      <a:prstDash val="solid"/>
+                      <a:round/>
+                      <a:headEnd type="none" w="med" len="med"/>
+                      <a:tailEnd type="none" w="med" len="med"/>
+                    </a:lnL>
+                    <a:lnR w="6350" cap="flat" cmpd="sng" algn="ctr">
+                      <a:solidFill>
+                        <a:srgbClr val="E7E5E4"/>
+                      </a:solidFill>
+                      <a:prstDash val="solid"/>
+                      <a:round/>
+                      <a:headEnd type="none" w="med" len="med"/>
+                      <a:tailEnd type="none" w="med" len="med"/>
+                    </a:lnR>
+                    <a:lnT w="6350" cap="flat" cmpd="sng" algn="ctr">
+                      <a:solidFill>
+                        <a:srgbClr val="E7E5E4"/>
+                      </a:solidFill>
+                      <a:prstDash val="solid"/>
+                      <a:round/>
+                      <a:headEnd type="none" w="med" len="med"/>
+                      <a:tailEnd type="none" w="med" len="med"/>
+                    </a:lnT>
+                    <a:lnB w="6350" cap="flat" cmpd="sng" algn="ctr">
+                      <a:solidFill>
+                        <a:srgbClr val="E7E5E4"/>
+                      </a:solidFill>
+                      <a:prstDash val="solid"/>
+                      <a:round/>
+                      <a:headEnd type="none" w="med" len="med"/>
+                      <a:tailEnd type="none" w="med" len="med"/>
+                    </a:lnB>
+                    <a:solidFill>
+                      <a:srgbClr val="FFFFFF"/>
+                    </a:solidFill>
+                  </a:tcPr>
+                </a:tc>
+                <a:tc>
+                  <a:txBody>
+                    <a:bodyPr/>
+                    <a:lstStyle/>
+                    <a:p>
+                      <a:pPr algn="l" indent="0" marL="0">
+                        <a:buNone/>
+                      </a:pPr>
+                      <a:r>
+                        <a:rPr lang="en-US" sz="1200" dirty="0">
+                          <a:solidFill>
+                            <a:srgbClr val="57534E"/>
+                          </a:solidFill>
+                          <a:latin typeface="Inter" pitchFamily="34" charset="0"/>
+                          <a:ea typeface="Inter" pitchFamily="34" charset="-122"/>
+                          <a:cs typeface="Inter" pitchFamily="34" charset="-120"/>
+                        </a:rPr>
+                        <a:t>Row data</a:t>
+                      </a:r>
+                      <a:endParaRPr lang="en-US" sz="1200" dirty="0">
+                        <a:latin typeface="Inter" charset="0"/>
+                        <a:ea typeface="Inter" charset="0"/>
+                        <a:cs typeface="Inter" charset="0"/>
+                      </a:endParaRPr>
+                    </a:p>
+                  </a:txBody>
+                  <a:tcPr marL="114300" marR="114300" marT="114300" marB="114300" anchor="ctr">
+                    <a:lnL w="6350" cap="flat" cmpd="sng" algn="ctr">
+                      <a:solidFill>
+                        <a:srgbClr val="E7E5E4"/>
+                      </a:solidFill>
+                      <a:prstDash val="solid"/>
+                      <a:round/>
+                      <a:headEnd type="none" w="med" len="med"/>
+                      <a:tailEnd type="none" w="med" len="med"/>
+                    </a:lnL>
+                    <a:lnR w="6350" cap="flat" cmpd="sng" algn="ctr">
+                      <a:solidFill>
+                        <a:srgbClr val="E7E5E4"/>
+                      </a:solidFill>
+                      <a:prstDash val="solid"/>
+                      <a:round/>
+                      <a:headEnd type="none" w="med" len="med"/>
+                      <a:tailEnd type="none" w="med" len="med"/>
+                    </a:lnR>
+                    <a:lnT w="6350" cap="flat" cmpd="sng" algn="ctr">
+                      <a:solidFill>
+                        <a:srgbClr val="E7E5E4"/>
+                      </a:solidFill>
+                      <a:prstDash val="solid"/>
+                      <a:round/>
+                      <a:headEnd type="none" w="med" len="med"/>
+                      <a:tailEnd type="none" w="med" len="med"/>
+                    </a:lnT>
+                    <a:lnB w="6350" cap="flat" cmpd="sng" algn="ctr">
+                      <a:solidFill>
+                        <a:srgbClr val="E7E5E4"/>
+                      </a:solidFill>
+                      <a:prstDash val="solid"/>
+                      <a:round/>
+                      <a:headEnd type="none" w="med" len="med"/>
+                      <a:tailEnd type="none" w="med" len="med"/>
+                    </a:lnB>
+                    <a:solidFill>
+                      <a:srgbClr val="FFFFFF"/>
+                    </a:solidFill>
+                  </a:tcPr>
+                </a:tc>
+                <a:tc>
+                  <a:txBody>
+                    <a:bodyPr/>
+                    <a:lstStyle/>
+                    <a:p>
+                      <a:pPr algn="l" indent="0" marL="0">
+                        <a:buNone/>
+                      </a:pPr>
+                      <a:r>
+                        <a:rPr lang="en-US" sz="1200" dirty="0">
+                          <a:solidFill>
+                            <a:srgbClr val="57534E"/>
+                          </a:solidFill>
+                          <a:latin typeface="Inter" pitchFamily="34" charset="0"/>
+                          <a:ea typeface="Inter" pitchFamily="34" charset="-122"/>
+                          <a:cs typeface="Inter" pitchFamily="34" charset="-120"/>
+                        </a:rPr>
+                        <a:t>Row data</a:t>
+                      </a:r>
+                      <a:endParaRPr lang="en-US" sz="1200" dirty="0">
+                        <a:latin typeface="Inter" charset="0"/>
+                        <a:ea typeface="Inter" charset="0"/>
+                        <a:cs typeface="Inter" charset="0"/>
+                      </a:endParaRPr>
+                    </a:p>
+                  </a:txBody>
+                  <a:tcPr marL="114300" marR="114300" marT="114300" marB="114300" anchor="ctr">
+                    <a:lnL w="6350" cap="flat" cmpd="sng" algn="ctr">
+                      <a:solidFill>
+                        <a:srgbClr val="E7E5E4"/>
+                      </a:solidFill>
+                      <a:prstDash val="solid"/>
+                      <a:round/>
+                      <a:headEnd type="none" w="med" len="med"/>
+                      <a:tailEnd type="none" w="med" len="med"/>
+                    </a:lnL>
+                    <a:lnR w="6350" cap="flat" cmpd="sng" algn="ctr">
+                      <a:solidFill>
+                        <a:srgbClr val="E7E5E4"/>
+                      </a:solidFill>
+                      <a:prstDash val="solid"/>
+                      <a:round/>
+                      <a:headEnd type="none" w="med" len="med"/>
+                      <a:tailEnd type="none" w="med" len="med"/>
+                    </a:lnR>
+                    <a:lnT w="6350" cap="flat" cmpd="sng" algn="ctr">
+                      <a:solidFill>
+                        <a:srgbClr val="E7E5E4"/>
+                      </a:solidFill>
+                      <a:prstDash val="solid"/>
+                      <a:round/>
+                      <a:headEnd type="none" w="med" len="med"/>
+                      <a:tailEnd type="none" w="med" len="med"/>
+                    </a:lnT>
+                    <a:lnB w="6350" cap="flat" cmpd="sng" algn="ctr">
+                      <a:solidFill>
+                        <a:srgbClr val="E7E5E4"/>
+                      </a:solidFill>
+                      <a:prstDash val="solid"/>
+                      <a:round/>
+                      <a:headEnd type="none" w="med" len="med"/>
+                      <a:tailEnd type="none" w="med" len="med"/>
+                    </a:lnB>
+                    <a:solidFill>
+                      <a:srgbClr val="FFFFFF"/>
+                    </a:solidFill>
+                  </a:tcPr>
+                </a:tc>
+              </a:tr>
+              <a:tr h="475488">
+                <a:tc>
+                  <a:txBody>
+                    <a:bodyPr/>
+                    <a:lstStyle/>
+                    <a:p>
+                      <a:pPr algn="l" indent="0" marL="0">
+                        <a:buNone/>
+                      </a:pPr>
+                      <a:r>
+                        <a:rPr lang="en-US" sz="900" spc="100" kern="0" dirty="0">
+                          <a:solidFill>
+                            <a:srgbClr val="44403C"/>
+                          </a:solidFill>
+                          <a:latin typeface="JetBrains Mono" pitchFamily="34" charset="0"/>
+                          <a:ea typeface="JetBrains Mono" pitchFamily="34" charset="-122"/>
+                          <a:cs typeface="JetBrains Mono" pitchFamily="34" charset="-120"/>
+                        </a:rPr>
+                        <a:t>ROW LABEL</a:t>
+                      </a:r>
+                      <a:endParaRPr lang="en-US" sz="900" dirty="0">
+                        <a:latin typeface="JetBrains Mono" charset="0"/>
+                        <a:ea typeface="JetBrains Mono" charset="0"/>
+                        <a:cs typeface="JetBrains Mono" charset="0"/>
+                      </a:endParaRPr>
+                    </a:p>
+                  </a:txBody>
+                  <a:tcPr marL="114300" marR="114300" marT="114300" marB="114300" anchor="ctr">
+                    <a:lnL w="6350" cap="flat" cmpd="sng" algn="ctr">
+                      <a:solidFill>
+                        <a:srgbClr val="E7E5E4"/>
+                      </a:solidFill>
+                      <a:prstDash val="solid"/>
+                      <a:round/>
+                      <a:headEnd type="none" w="med" len="med"/>
+                      <a:tailEnd type="none" w="med" len="med"/>
+                    </a:lnL>
+                    <a:lnR w="6350" cap="flat" cmpd="sng" algn="ctr">
+                      <a:solidFill>
+                        <a:srgbClr val="E7E5E4"/>
+                      </a:solidFill>
+                      <a:prstDash val="solid"/>
+                      <a:round/>
+                      <a:headEnd type="none" w="med" len="med"/>
+                      <a:tailEnd type="none" w="med" len="med"/>
+                    </a:lnR>
+                    <a:lnT w="6350" cap="flat" cmpd="sng" algn="ctr">
+                      <a:solidFill>
+                        <a:srgbClr val="E7E5E4"/>
+                      </a:solidFill>
+                      <a:prstDash val="solid"/>
+                      <a:round/>
+                      <a:headEnd type="none" w="med" len="med"/>
+                      <a:tailEnd type="none" w="med" len="med"/>
+                    </a:lnT>
+                    <a:lnB w="6350" cap="flat" cmpd="sng" algn="ctr">
+                      <a:solidFill>
+                        <a:srgbClr val="E7E5E4"/>
+                      </a:solidFill>
+                      <a:prstDash val="solid"/>
+                      <a:round/>
+                      <a:headEnd type="none" w="med" len="med"/>
+                      <a:tailEnd type="none" w="med" len="med"/>
+                    </a:lnB>
+                    <a:solidFill>
+                      <a:srgbClr val="FFFFFF"/>
+                    </a:solidFill>
+                  </a:tcPr>
+                </a:tc>
+                <a:tc>
+                  <a:txBody>
+                    <a:bodyPr/>
+                    <a:lstStyle/>
+                    <a:p>
+                      <a:pPr algn="l" indent="0" marL="0">
+                        <a:buNone/>
+                      </a:pPr>
+                      <a:r>
+                        <a:rPr lang="en-US" sz="1200" dirty="0">
+                          <a:solidFill>
+                            <a:srgbClr val="57534E"/>
+                          </a:solidFill>
+                          <a:latin typeface="Inter" pitchFamily="34" charset="0"/>
+                          <a:ea typeface="Inter" pitchFamily="34" charset="-122"/>
+                          <a:cs typeface="Inter" pitchFamily="34" charset="-120"/>
+                        </a:rPr>
+                        <a:t>Row data</a:t>
+                      </a:r>
+                      <a:endParaRPr lang="en-US" sz="1200" dirty="0">
+                        <a:latin typeface="Inter" charset="0"/>
+                        <a:ea typeface="Inter" charset="0"/>
+                        <a:cs typeface="Inter" charset="0"/>
+                      </a:endParaRPr>
+                    </a:p>
+                  </a:txBody>
+                  <a:tcPr marL="114300" marR="114300" marT="114300" marB="114300" anchor="ctr">
+                    <a:lnL w="6350" cap="flat" cmpd="sng" algn="ctr">
+                      <a:solidFill>
+                        <a:srgbClr val="E7E5E4"/>
+                      </a:solidFill>
+                      <a:prstDash val="solid"/>
+                      <a:round/>
+                      <a:headEnd type="none" w="med" len="med"/>
+                      <a:tailEnd type="none" w="med" len="med"/>
+                    </a:lnL>
+                    <a:lnR w="6350" cap="flat" cmpd="sng" algn="ctr">
+                      <a:solidFill>
+                        <a:srgbClr val="E7E5E4"/>
+                      </a:solidFill>
+                      <a:prstDash val="solid"/>
+                      <a:round/>
+                      <a:headEnd type="none" w="med" len="med"/>
+                      <a:tailEnd type="none" w="med" len="med"/>
+                    </a:lnR>
+                    <a:lnT w="6350" cap="flat" cmpd="sng" algn="ctr">
+                      <a:solidFill>
+                        <a:srgbClr val="E7E5E4"/>
+                      </a:solidFill>
+                      <a:prstDash val="solid"/>
+                      <a:round/>
+                      <a:headEnd type="none" w="med" len="med"/>
+                      <a:tailEnd type="none" w="med" len="med"/>
+                    </a:lnT>
+                    <a:lnB w="6350" cap="flat" cmpd="sng" algn="ctr">
+                      <a:solidFill>
+                        <a:srgbClr val="E7E5E4"/>
+                      </a:solidFill>
+                      <a:prstDash val="solid"/>
+                      <a:round/>
+                      <a:headEnd type="none" w="med" len="med"/>
+                      <a:tailEnd type="none" w="med" len="med"/>
+                    </a:lnB>
+                    <a:solidFill>
+                      <a:srgbClr val="FFFFFF"/>
+                    </a:solidFill>
+                  </a:tcPr>
+                </a:tc>
+                <a:tc>
+                  <a:txBody>
+                    <a:bodyPr/>
+                    <a:lstStyle/>
+                    <a:p>
+                      <a:pPr algn="l" indent="0" marL="0">
+                        <a:buNone/>
+                      </a:pPr>
+                      <a:r>
+                        <a:rPr lang="en-US" sz="1200" dirty="0">
+                          <a:solidFill>
+                            <a:srgbClr val="57534E"/>
+                          </a:solidFill>
+                          <a:latin typeface="Inter" pitchFamily="34" charset="0"/>
+                          <a:ea typeface="Inter" pitchFamily="34" charset="-122"/>
+                          <a:cs typeface="Inter" pitchFamily="34" charset="-120"/>
+                        </a:rPr>
+                        <a:t>Row data</a:t>
+                      </a:r>
+                      <a:endParaRPr lang="en-US" sz="1200" dirty="0">
+                        <a:latin typeface="Inter" charset="0"/>
+                        <a:ea typeface="Inter" charset="0"/>
+                        <a:cs typeface="Inter" charset="0"/>
+                      </a:endParaRPr>
+                    </a:p>
+                  </a:txBody>
+                  <a:tcPr marL="114300" marR="114300" marT="114300" marB="114300" anchor="ctr">
+                    <a:lnL w="6350" cap="flat" cmpd="sng" algn="ctr">
+                      <a:solidFill>
+                        <a:srgbClr val="E7E5E4"/>
+                      </a:solidFill>
+                      <a:prstDash val="solid"/>
+                      <a:round/>
+                      <a:headEnd type="none" w="med" len="med"/>
+                      <a:tailEnd type="none" w="med" len="med"/>
+                    </a:lnL>
+                    <a:lnR w="6350" cap="flat" cmpd="sng" algn="ctr">
+                      <a:solidFill>
+                        <a:srgbClr val="E7E5E4"/>
+                      </a:solidFill>
+                      <a:prstDash val="solid"/>
+                      <a:round/>
+                      <a:headEnd type="none" w="med" len="med"/>
+                      <a:tailEnd type="none" w="med" len="med"/>
+                    </a:lnR>
+                    <a:lnT w="6350" cap="flat" cmpd="sng" algn="ctr">
+                      <a:solidFill>
+                        <a:srgbClr val="E7E5E4"/>
+                      </a:solidFill>
+                      <a:prstDash val="solid"/>
+                      <a:round/>
+                      <a:headEnd type="none" w="med" len="med"/>
+                      <a:tailEnd type="none" w="med" len="med"/>
+                    </a:lnT>
+                    <a:lnB w="6350" cap="flat" cmpd="sng" algn="ctr">
+                      <a:solidFill>
+                        <a:srgbClr val="E7E5E4"/>
+                      </a:solidFill>
+                      <a:prstDash val="solid"/>
+                      <a:round/>
+                      <a:headEnd type="none" w="med" len="med"/>
+                      <a:tailEnd type="none" w="med" len="med"/>
+                    </a:lnB>
+                    <a:solidFill>
+                      <a:srgbClr val="FFFFFF"/>
+                    </a:solidFill>
+                  </a:tcPr>
+                </a:tc>
+                <a:tc>
+                  <a:txBody>
+                    <a:bodyPr/>
+                    <a:lstStyle/>
+                    <a:p>
+                      <a:pPr algn="l" indent="0" marL="0">
+                        <a:buNone/>
+                      </a:pPr>
+                      <a:r>
+                        <a:rPr lang="en-US" sz="1200" dirty="0">
+                          <a:solidFill>
+                            <a:srgbClr val="57534E"/>
+                          </a:solidFill>
+                          <a:latin typeface="Inter" pitchFamily="34" charset="0"/>
+                          <a:ea typeface="Inter" pitchFamily="34" charset="-122"/>
+                          <a:cs typeface="Inter" pitchFamily="34" charset="-120"/>
+                        </a:rPr>
+                        <a:t>Row data</a:t>
+                      </a:r>
+                      <a:endParaRPr lang="en-US" sz="1200" dirty="0">
+                        <a:latin typeface="Inter" charset="0"/>
+                        <a:ea typeface="Inter" charset="0"/>
+                        <a:cs typeface="Inter" charset="0"/>
+                      </a:endParaRPr>
+                    </a:p>
+                  </a:txBody>
+                  <a:tcPr marL="114300" marR="114300" marT="114300" marB="114300" anchor="ctr">
+                    <a:lnL w="6350" cap="flat" cmpd="sng" algn="ctr">
+                      <a:solidFill>
+                        <a:srgbClr val="E7E5E4"/>
+                      </a:solidFill>
+                      <a:prstDash val="solid"/>
+                      <a:round/>
+                      <a:headEnd type="none" w="med" len="med"/>
+                      <a:tailEnd type="none" w="med" len="med"/>
+                    </a:lnL>
+                    <a:lnR w="6350" cap="flat" cmpd="sng" algn="ctr">
+                      <a:solidFill>
+                        <a:srgbClr val="E7E5E4"/>
+                      </a:solidFill>
+                      <a:prstDash val="solid"/>
+                      <a:round/>
+                      <a:headEnd type="none" w="med" len="med"/>
+                      <a:tailEnd type="none" w="med" len="med"/>
+                    </a:lnR>
+                    <a:lnT w="6350" cap="flat" cmpd="sng" algn="ctr">
+                      <a:solidFill>
+                        <a:srgbClr val="E7E5E4"/>
+                      </a:solidFill>
+                      <a:prstDash val="solid"/>
+                      <a:round/>
+                      <a:headEnd type="none" w="med" len="med"/>
+                      <a:tailEnd type="none" w="med" len="med"/>
+                    </a:lnT>
+                    <a:lnB w="6350" cap="flat" cmpd="sng" algn="ctr">
+                      <a:solidFill>
+                        <a:srgbClr val="E7E5E4"/>
+                      </a:solidFill>
+                      <a:prstDash val="solid"/>
+                      <a:round/>
+                      <a:headEnd type="none" w="med" len="med"/>
+                      <a:tailEnd type="none" w="med" len="med"/>
+                    </a:lnB>
+                    <a:solidFill>
+                      <a:srgbClr val="FFFFFF"/>
+                    </a:solidFill>
+                  </a:tcPr>
+                </a:tc>
+              </a:tr>
+            </a:tbl>
+          </a:graphicData>
+        </a:graphic>
+      </p:graphicFrame>
+      <p:sp>
+        <p:nvSpPr>
+          <p:cNvPr id="6" name="Shape 3"/>
+          <p:cNvSpPr/>
+          <p:nvPr/>
+        </p:nvSpPr>
+        <p:spPr>
+          <a:xfrm>
+            <a:off x="502920" y="2365553"/>
+            <a:ext cx="5120640" cy="5486"/>
+          </a:xfrm>
+          <a:prstGeom prst="rect">
+            <a:avLst/>
+          </a:prstGeom>
+          <a:solidFill>
+            <a:srgbClr val="E7E5E4"/>
+          </a:solidFill>
+          <a:ln w="12700">
+            <a:solidFill>
+              <a:srgbClr val="E7E5E4"/>
+            </a:solidFill>
+            <a:prstDash val="solid"/>
+          </a:ln>
+        </p:spPr>
+      </p:sp>
+      <p:sp>
+        <p:nvSpPr>
+          <p:cNvPr id="7" name="Shape 4"/>
+          <p:cNvSpPr/>
+          <p:nvPr/>
+        </p:nvSpPr>
+        <p:spPr>
+          <a:xfrm>
+            <a:off x="502920" y="2841041"/>
+            <a:ext cx="5120640" cy="5486"/>
+          </a:xfrm>
+          <a:prstGeom prst="rect">
+            <a:avLst/>
+          </a:prstGeom>
+          <a:solidFill>
+            <a:srgbClr val="E7E5E4"/>
+          </a:solidFill>
+          <a:ln w="12700">
+            <a:solidFill>
+              <a:srgbClr val="E7E5E4"/>
+            </a:solidFill>
+            <a:prstDash val="solid"/>
+          </a:ln>
+        </p:spPr>
+      </p:sp>
+      <p:sp>
+        <p:nvSpPr>
+          <p:cNvPr id="8" name="Shape 5"/>
+          <p:cNvSpPr/>
+          <p:nvPr/>
+        </p:nvSpPr>
+        <p:spPr>
+          <a:xfrm>
+            <a:off x="502920" y="3316529"/>
+            <a:ext cx="5120640" cy="5486"/>
+          </a:xfrm>
+          <a:prstGeom prst="rect">
+            <a:avLst/>
+          </a:prstGeom>
+          <a:solidFill>
+            <a:srgbClr val="E7E5E4"/>
+          </a:solidFill>
+          <a:ln w="12700">
+            <a:solidFill>
+              <a:srgbClr val="E7E5E4"/>
+            </a:solidFill>
+            <a:prstDash val="solid"/>
+          </a:ln>
+        </p:spPr>
+      </p:sp>
+      <p:sp>
+        <p:nvSpPr>
+          <p:cNvPr id="9" name="Shape 6"/>
+          <p:cNvSpPr/>
+          <p:nvPr/>
+        </p:nvSpPr>
+        <p:spPr>
+          <a:xfrm>
+            <a:off x="502920" y="3792017"/>
+            <a:ext cx="5120640" cy="5486"/>
+          </a:xfrm>
+          <a:prstGeom prst="rect">
+            <a:avLst/>
+          </a:prstGeom>
+          <a:solidFill>
+            <a:srgbClr val="E7E5E4"/>
+          </a:solidFill>
+          <a:ln w="12700">
+            <a:solidFill>
+              <a:srgbClr val="E7E5E4"/>
+            </a:solidFill>
+            <a:prstDash val="solid"/>
+          </a:ln>
+        </p:spPr>
+      </p:sp>
+      <p:sp>
+        <p:nvSpPr>
+          <p:cNvPr id="10" name="Shape 7"/>
+          <p:cNvSpPr/>
+          <p:nvPr/>
+        </p:nvSpPr>
+        <p:spPr>
+          <a:xfrm>
+            <a:off x="502920" y="4267505"/>
+            <a:ext cx="5120640" cy="5486"/>
+          </a:xfrm>
+          <a:prstGeom prst="rect">
+            <a:avLst/>
+          </a:prstGeom>
+          <a:solidFill>
+            <a:srgbClr val="E7E5E4"/>
+          </a:solidFill>
+          <a:ln w="12700">
+            <a:solidFill>
+              <a:srgbClr val="E7E5E4"/>
+            </a:solidFill>
+            <a:prstDash val="solid"/>
+          </a:ln>
+        </p:spPr>
+      </p:sp>
+      <p:sp>
+        <p:nvSpPr>
+          <p:cNvPr id="11" name="Text 8"/>
+          <p:cNvSpPr/>
+          <p:nvPr/>
+        </p:nvSpPr>
+        <p:spPr>
+          <a:xfrm>
+            <a:off x="5806440" y="1417320"/>
+            <a:ext cx="4572000" cy="164592"/>
+          </a:xfrm>
+          <a:prstGeom prst="rect">
+            <a:avLst/>
+          </a:prstGeom>
+          <a:noFill/>
+          <a:ln/>
+        </p:spPr>
+        <p:txBody>
+          <a:bodyPr wrap="square" lIns="0" tIns="0" rIns="0" bIns="0" rtlCol="0" anchor="ctr"/>
+          <a:lstStyle/>
+          <a:p>
+            <a:pPr indent="0" marL="0">
+              <a:buNone/>
+            </a:pPr>
+            <a:r>
+              <a:rPr lang="en-US" sz="850" spc="150" kern="0" dirty="0">
+                <a:solidFill>
+                  <a:srgbClr val="78716C"/>
+                </a:solidFill>
+                <a:latin typeface="JetBrains Mono" pitchFamily="34" charset="0"/>
+                <a:ea typeface="JetBrains Mono" pitchFamily="34" charset="-122"/>
+                <a:cs typeface="JetBrains Mono" pitchFamily="34" charset="-120"/>
+              </a:rPr>
+              <a:t>CONTEXT</a:t>
+            </a:r>
+            <a:endParaRPr lang="en-US" sz="850" dirty="0"/>
+          </a:p>
+        </p:txBody>
+      </p:sp>
+      <p:sp>
+        <p:nvSpPr>
+          <p:cNvPr id="12" name="Shape 9"/>
+          <p:cNvSpPr/>
+          <p:nvPr/>
+        </p:nvSpPr>
+        <p:spPr>
+          <a:xfrm>
+            <a:off x="5806440" y="1618488"/>
+            <a:ext cx="914400" cy="4572"/>
+          </a:xfrm>
+          <a:prstGeom prst="rect">
+            <a:avLst/>
+          </a:prstGeom>
+          <a:solidFill>
+            <a:srgbClr val="6330F5"/>
+          </a:solidFill>
+          <a:ln w="12700">
+            <a:solidFill>
+              <a:srgbClr val="6330F5"/>
+            </a:solidFill>
+            <a:prstDash val="solid"/>
+          </a:ln>
+        </p:spPr>
+      </p:sp>
+      <p:sp>
+        <p:nvSpPr>
+          <p:cNvPr id="13" name="Text 10"/>
+          <p:cNvSpPr/>
+          <p:nvPr/>
+        </p:nvSpPr>
+        <p:spPr>
+          <a:xfrm>
+            <a:off x="5806440" y="1764792"/>
+            <a:ext cx="2834640" cy="1097280"/>
+          </a:xfrm>
+          <a:prstGeom prst="rect">
+            <a:avLst/>
+          </a:prstGeom>
+          <a:noFill/>
+          <a:ln/>
+        </p:spPr>
+        <p:txBody>
+          <a:bodyPr wrap="square" lIns="0" tIns="0" rIns="0" bIns="0" rtlCol="0" anchor="t"/>
+          <a:lstStyle/>
+          <a:p>
+            <a:pPr indent="0" marL="0">
+              <a:lnSpc>
+                <a:spcPct val="115000"/>
+              </a:lnSpc>
+              <a:buNone/>
+            </a:pPr>
+            <a:r>
+              <a:rPr lang="en-US" sz="2200" dirty="0">
+                <a:solidFill>
+                  <a:srgbClr val="0C0A09"/>
+                </a:solidFill>
+                <a:latin typeface="Nanum Myeongjo" pitchFamily="34" charset="0"/>
+                <a:ea typeface="Nanum Myeongjo" pitchFamily="34" charset="-122"/>
+                <a:cs typeface="Nanum Myeongjo" pitchFamily="34" charset="-120"/>
+              </a:rPr>
+              <a:t>Use this space to </a:t>
+            </a:r>
+            <a:pPr indent="0" marL="0">
+              <a:lnSpc>
+                <a:spcPct val="115000"/>
+              </a:lnSpc>
+              <a:buNone/>
+            </a:pPr>
+            <a:r>
+              <a:rPr lang="en-US" sz="2200" i="1" dirty="0">
+                <a:solidFill>
+                  <a:srgbClr val="6330F5"/>
+                </a:solidFill>
+                <a:latin typeface="Nanum Myeongjo" pitchFamily="34" charset="0"/>
+                <a:ea typeface="Nanum Myeongjo" pitchFamily="34" charset="-122"/>
+                <a:cs typeface="Nanum Myeongjo" pitchFamily="34" charset="-120"/>
+              </a:rPr>
+              <a:t>frame the data.</a:t>
+            </a:r>
+            <a:endParaRPr lang="en-US" sz="2200" dirty="0"/>
+          </a:p>
+        </p:txBody>
+      </p:sp>
+      <p:sp>
+        <p:nvSpPr>
+          <p:cNvPr id="14" name="Text 11"/>
+          <p:cNvSpPr/>
+          <p:nvPr/>
+        </p:nvSpPr>
+        <p:spPr>
+          <a:xfrm>
+            <a:off x="5806440" y="3017520"/>
+            <a:ext cx="2834640" cy="1554480"/>
+          </a:xfrm>
+          <a:prstGeom prst="rect">
+            <a:avLst/>
+          </a:prstGeom>
+          <a:noFill/>
+          <a:ln/>
+        </p:spPr>
+        <p:txBody>
+          <a:bodyPr wrap="square" lIns="0" tIns="0" rIns="0" bIns="0" rtlCol="0" anchor="t"/>
+          <a:lstStyle/>
+          <a:p>
+            <a:pPr indent="0" marL="0">
+              <a:lnSpc>
+                <a:spcPct val="150000"/>
+              </a:lnSpc>
+              <a:buNone/>
+            </a:pPr>
+            <a:r>
+              <a:rPr lang="en-US" sz="1200" dirty="0">
+                <a:solidFill>
+                  <a:srgbClr val="57534E"/>
+                </a:solidFill>
+                <a:latin typeface="Inter" pitchFamily="34" charset="0"/>
+                <a:ea typeface="Inter" pitchFamily="34" charset="-122"/>
+                <a:cs typeface="Inter" pitchFamily="34" charset="-120"/>
+              </a:rPr>
+              <a:t>Provide the narrative context that the table cannot. What should the reader conclude? What action does this support?</a:t>
+            </a:r>
+            <a:endParaRPr lang="en-US" sz="1200" dirty="0"/>
+          </a:p>
+        </p:txBody>
+      </p:sp>
+    </p:spTree>
+  </p:cSld>
+  <p:clrMapOvr>
+    <a:masterClrMapping/>
+  </p:clrMapOvr>
+</p:sld>
+</file>
+
+<file path=ppt/slides/slide13.xml><?xml version="1.0" encoding="utf-8"?>
+<p:sld xmlns:a="http://schemas.openxmlformats.org/drawingml/2006/main" xmlns:r="http://schemas.openxmlformats.org/officeDocument/2006/relationships" xmlns:p="http://schemas.openxmlformats.org/presentationml/2006/main">
+  <p:cSld name="Slide 13">
+    <p:bg>
+      <p:bgPr>
+        <a:solidFill>
+          <a:srgbClr val="F5F0EC"/>
+        </a:solidFill>
+      </p:bgPr>
+    </p:bg>
+    <p:spTree>
+      <p:nvGrpSpPr>
+        <p:cNvPr id="1" name=""/>
+        <p:cNvGrpSpPr/>
+        <p:nvPr/>
+      </p:nvGrpSpPr>
+      <p:grpSpPr>
+        <a:xfrm>
+          <a:off x="0" y="0"/>
+          <a:ext cx="0" cy="0"/>
+          <a:chOff x="0" y="0"/>
+          <a:chExt cx="0" cy="0"/>
+        </a:xfrm>
+      </p:grpSpPr>
+      <p:sp>
+        <p:nvSpPr>
+          <p:cNvPr id="2" name="Text 0"/>
+          <p:cNvSpPr/>
+          <p:nvPr/>
+        </p:nvSpPr>
+        <p:spPr>
+          <a:xfrm>
+            <a:off x="502920" y="384048"/>
+            <a:ext cx="4572000" cy="164592"/>
+          </a:xfrm>
+          <a:prstGeom prst="rect">
+            <a:avLst/>
+          </a:prstGeom>
+          <a:noFill/>
+          <a:ln/>
+        </p:spPr>
+        <p:txBody>
+          <a:bodyPr wrap="square" lIns="0" tIns="0" rIns="0" bIns="0" rtlCol="0" anchor="ctr"/>
+          <a:lstStyle/>
+          <a:p>
+            <a:pPr indent="0" marL="0">
+              <a:buNone/>
+            </a:pPr>
+            <a:r>
+              <a:rPr lang="en-US" sz="850" spc="150" kern="0" dirty="0">
+                <a:solidFill>
+                  <a:srgbClr val="78716C"/>
+                </a:solidFill>
+                <a:latin typeface="JetBrains Mono" pitchFamily="34" charset="0"/>
+                <a:ea typeface="JetBrains Mono" pitchFamily="34" charset="-122"/>
+                <a:cs typeface="JetBrains Mono" pitchFamily="34" charset="-120"/>
+              </a:rPr>
               <a:t>ROADMAP</a:t>
             </a:r>
             <a:endParaRPr lang="en-US" sz="850" dirty="0"/>
@@ -4154,7 +10585,7 @@
         <p:spPr>
           <a:xfrm>
             <a:off x="502920" y="585216"/>
-            <a:ext cx="914400" cy="10973"/>
+            <a:ext cx="914400" cy="4572"/>
           </a:xfrm>
           <a:prstGeom prst="rect">
             <a:avLst/>
@@ -4852,9 +11283,9 @@
 </p:sld>
 </file>
 
-<file path=ppt/slides/slide12.xml><?xml version="1.0" encoding="utf-8"?>
+<file path=ppt/slides/slide14.xml><?xml version="1.0" encoding="utf-8"?>
 <p:sld xmlns:a="http://schemas.openxmlformats.org/drawingml/2006/main" xmlns:r="http://schemas.openxmlformats.org/officeDocument/2006/relationships" xmlns:p="http://schemas.openxmlformats.org/presentationml/2006/main">
-  <p:cSld name="Slide 12">
+  <p:cSld name="Slide 14">
     <p:bg>
       <p:bgPr>
         <a:solidFill>
@@ -4924,7 +11355,7 @@
         <p:spPr>
           <a:xfrm>
             <a:off x="502920" y="585216"/>
-            <a:ext cx="914400" cy="10973"/>
+            <a:ext cx="914400" cy="4572"/>
           </a:xfrm>
           <a:prstGeom prst="rect">
             <a:avLst/>
@@ -5088,7 +11519,7 @@
               <a:buNone/>
             </a:pPr>
             <a:r>
-              <a:rPr lang="en-US" sz="1400" b="1" dirty="0">
+              <a:rPr lang="en-US" sz="1400" dirty="0">
                 <a:solidFill>
                   <a:srgbClr val="0C0A09"/>
                 </a:solidFill>
@@ -5127,17 +11558,17 @@
               <a:buNone/>
             </a:pPr>
             <a:r>
-              <a:rPr lang="en-US" sz="850" spc="80" kern="0" dirty="0">
+              <a:rPr lang="en-US" sz="800" spc="120" kern="0" dirty="0">
                 <a:solidFill>
-                  <a:srgbClr val="6330F5"/>
+                  <a:srgbClr val="78716C"/>
                 </a:solidFill>
                 <a:latin typeface="JetBrains Mono" pitchFamily="34" charset="0"/>
                 <a:ea typeface="JetBrains Mono" pitchFamily="34" charset="-122"/>
                 <a:cs typeface="JetBrains Mono" pitchFamily="34" charset="-120"/>
               </a:rPr>
-              <a:t>Co-founder &amp; CEO</a:t>
+              <a:t>CO-FOUNDER &amp; CEO</a:t>
             </a:r>
-            <a:endParaRPr lang="en-US" sz="850" dirty="0"/>
+            <a:endParaRPr lang="en-US" sz="800" dirty="0"/>
           </a:p>
         </p:txBody>
       </p:sp>
@@ -5272,7 +11703,7 @@
               <a:buNone/>
             </a:pPr>
             <a:r>
-              <a:rPr lang="en-US" sz="1400" b="1" dirty="0">
+              <a:rPr lang="en-US" sz="1400" dirty="0">
                 <a:solidFill>
                   <a:srgbClr val="0C0A09"/>
                 </a:solidFill>
@@ -5311,17 +11742,17 @@
               <a:buNone/>
             </a:pPr>
             <a:r>
-              <a:rPr lang="en-US" sz="850" spc="80" kern="0" dirty="0">
+              <a:rPr lang="en-US" sz="800" spc="120" kern="0" dirty="0">
                 <a:solidFill>
-                  <a:srgbClr val="6330F5"/>
+                  <a:srgbClr val="78716C"/>
                 </a:solidFill>
                 <a:latin typeface="JetBrains Mono" pitchFamily="34" charset="0"/>
                 <a:ea typeface="JetBrains Mono" pitchFamily="34" charset="-122"/>
                 <a:cs typeface="JetBrains Mono" pitchFamily="34" charset="-120"/>
               </a:rPr>
-              <a:t>Co-founder &amp; CTO</a:t>
+              <a:t>CO-FOUNDER &amp; CTO</a:t>
             </a:r>
-            <a:endParaRPr lang="en-US" sz="850" dirty="0"/>
+            <a:endParaRPr lang="en-US" sz="800" dirty="0"/>
           </a:p>
         </p:txBody>
       </p:sp>
@@ -5456,7 +11887,7 @@
               <a:buNone/>
             </a:pPr>
             <a:r>
-              <a:rPr lang="en-US" sz="1400" b="1" dirty="0">
+              <a:rPr lang="en-US" sz="1400" dirty="0">
                 <a:solidFill>
                   <a:srgbClr val="0C0A09"/>
                 </a:solidFill>
@@ -5495,17 +11926,17 @@
               <a:buNone/>
             </a:pPr>
             <a:r>
-              <a:rPr lang="en-US" sz="850" spc="80" kern="0" dirty="0">
+              <a:rPr lang="en-US" sz="800" spc="120" kern="0" dirty="0">
                 <a:solidFill>
-                  <a:srgbClr val="6330F5"/>
+                  <a:srgbClr val="78716C"/>
                 </a:solidFill>
                 <a:latin typeface="JetBrains Mono" pitchFamily="34" charset="0"/>
                 <a:ea typeface="JetBrains Mono" pitchFamily="34" charset="-122"/>
                 <a:cs typeface="JetBrains Mono" pitchFamily="34" charset="-120"/>
               </a:rPr>
-              <a:t>Chief Revenue Officer</a:t>
+              <a:t>CHIEF REVENUE OFFICER</a:t>
             </a:r>
-            <a:endParaRPr lang="en-US" sz="850" dirty="0"/>
+            <a:endParaRPr lang="en-US" sz="800" dirty="0"/>
           </a:p>
         </p:txBody>
       </p:sp>
@@ -5559,9 +11990,9 @@
 </p:sld>
 </file>
 
-<file path=ppt/slides/slide13.xml><?xml version="1.0" encoding="utf-8"?>
+<file path=ppt/slides/slide15.xml><?xml version="1.0" encoding="utf-8"?>
 <p:sld xmlns:a="http://schemas.openxmlformats.org/drawingml/2006/main" xmlns:r="http://schemas.openxmlformats.org/officeDocument/2006/relationships" xmlns:p="http://schemas.openxmlformats.org/presentationml/2006/main">
-  <p:cSld name="Slide 13">
+  <p:cSld name="Slide 15">
     <p:bg>
       <p:bgPr>
         <a:solidFill>
@@ -5585,20 +12016,14 @@
       </p:grpSpPr>
       <p:pic>
         <p:nvPicPr>
-          <p:cNvPr id="2" name="Image 0" descr="/sessions/sleepy-youthful-albattani/mnt/brand-system/assets/logos/wordmark-white.svg">    </p:cNvPr>
+          <p:cNvPr id="2" name="Image 0" descr="/sessions/sleepy-youthful-albattani/mnt/brand-system/assets/logos/wordmark-white.png">    </p:cNvPr>
           <p:cNvPicPr>
             <a:picLocks noChangeAspect="1"/>
           </p:cNvPicPr>
           <p:nvPr/>
         </p:nvPicPr>
         <p:blipFill>
-          <a:blip r:embed="rId1">
-            <a:extLst>
-              <a:ext uri="{96DAC541-7B7A-43D3-8B79-37D633B846F1}">
-                <asvg:svgBlip xmlns:asvg="http://schemas.microsoft.com/office/drawing/2016/SVG/main" r:embed="rId2"/>
-              </a:ext>
-            </a:extLst>
-          </a:blip>
+          <a:blip r:embed="rId1"/>
           <a:stretch>
             <a:fillRect/>
           </a:stretch>
@@ -5758,9 +12183,9 @@
 </p:sld>
 </file>
 
-<file path=ppt/slides/slide14.xml><?xml version="1.0" encoding="utf-8"?>
+<file path=ppt/slides/slide16.xml><?xml version="1.0" encoding="utf-8"?>
 <p:sld xmlns:a="http://schemas.openxmlformats.org/drawingml/2006/main" xmlns:r="http://schemas.openxmlformats.org/officeDocument/2006/relationships" xmlns:p="http://schemas.openxmlformats.org/presentationml/2006/main">
-  <p:cSld name="Slide 14">
+  <p:cSld name="Slide 16">
     <p:bg>
       <p:bgPr>
         <a:solidFill>
@@ -5830,7 +12255,7 @@
         <p:spPr>
           <a:xfrm>
             <a:off x="502920" y="2029968"/>
-            <a:ext cx="914400" cy="10973"/>
+            <a:ext cx="914400" cy="4572"/>
           </a:xfrm>
           <a:prstGeom prst="rect">
             <a:avLst/>
@@ -5924,6 +12349,688 @@
           </a:p>
         </p:txBody>
       </p:sp>
+    </p:spTree>
+  </p:cSld>
+  <p:clrMapOvr>
+    <a:masterClrMapping/>
+  </p:clrMapOvr>
+</p:sld>
+</file>
+
+<file path=ppt/slides/slide17.xml><?xml version="1.0" encoding="utf-8"?>
+<p:sld xmlns:a="http://schemas.openxmlformats.org/drawingml/2006/main" xmlns:r="http://schemas.openxmlformats.org/officeDocument/2006/relationships" xmlns:p="http://schemas.openxmlformats.org/presentationml/2006/main">
+  <p:cSld name="Slide 17">
+    <p:bg>
+      <p:bgPr>
+        <a:solidFill>
+          <a:srgbClr val="F5F0EC"/>
+        </a:solidFill>
+      </p:bgPr>
+    </p:bg>
+    <p:spTree>
+      <p:nvGrpSpPr>
+        <p:cNvPr id="1" name=""/>
+        <p:cNvGrpSpPr/>
+        <p:nvPr/>
+      </p:nvGrpSpPr>
+      <p:grpSpPr>
+        <a:xfrm>
+          <a:off x="0" y="0"/>
+          <a:ext cx="0" cy="0"/>
+          <a:chOff x="0" y="0"/>
+          <a:chExt cx="0" cy="0"/>
+        </a:xfrm>
+      </p:grpSpPr>
+      <p:sp>
+        <p:nvSpPr>
+          <p:cNvPr id="2" name="Text 0"/>
+          <p:cNvSpPr/>
+          <p:nvPr/>
+        </p:nvSpPr>
+        <p:spPr>
+          <a:xfrm>
+            <a:off x="502920" y="274320"/>
+            <a:ext cx="4572000" cy="164592"/>
+          </a:xfrm>
+          <a:prstGeom prst="rect">
+            <a:avLst/>
+          </a:prstGeom>
+          <a:noFill/>
+          <a:ln/>
+        </p:spPr>
+        <p:txBody>
+          <a:bodyPr wrap="square" lIns="0" tIns="0" rIns="0" bIns="0" rtlCol="0" anchor="ctr"/>
+          <a:lstStyle/>
+          <a:p>
+            <a:pPr indent="0" marL="0">
+              <a:buNone/>
+            </a:pPr>
+            <a:r>
+              <a:rPr lang="en-US" sz="850" spc="150" kern="0" dirty="0">
+                <a:solidFill>
+                  <a:srgbClr val="78716C"/>
+                </a:solidFill>
+                <a:latin typeface="JetBrains Mono" pitchFamily="34" charset="0"/>
+                <a:ea typeface="JetBrains Mono" pitchFamily="34" charset="-122"/>
+                <a:cs typeface="JetBrains Mono" pitchFamily="34" charset="-120"/>
+              </a:rPr>
+              <a:t>DATA</a:t>
+            </a:r>
+            <a:endParaRPr lang="en-US" sz="850" dirty="0"/>
+          </a:p>
+        </p:txBody>
+      </p:sp>
+      <p:sp>
+        <p:nvSpPr>
+          <p:cNvPr id="3" name="Shape 1"/>
+          <p:cNvSpPr/>
+          <p:nvPr/>
+        </p:nvSpPr>
+        <p:spPr>
+          <a:xfrm>
+            <a:off x="502920" y="475488"/>
+            <a:ext cx="914400" cy="4572"/>
+          </a:xfrm>
+          <a:prstGeom prst="rect">
+            <a:avLst/>
+          </a:prstGeom>
+          <a:solidFill>
+            <a:srgbClr val="6330F5"/>
+          </a:solidFill>
+          <a:ln w="12700">
+            <a:solidFill>
+              <a:srgbClr val="6330F5"/>
+            </a:solidFill>
+            <a:prstDash val="solid"/>
+          </a:ln>
+        </p:spPr>
+      </p:sp>
+      <p:sp>
+        <p:nvSpPr>
+          <p:cNvPr id="4" name="Text 2"/>
+          <p:cNvSpPr/>
+          <p:nvPr/>
+        </p:nvSpPr>
+        <p:spPr>
+          <a:xfrm>
+            <a:off x="502920" y="566928"/>
+            <a:ext cx="7772400" cy="548640"/>
+          </a:xfrm>
+          <a:prstGeom prst="rect">
+            <a:avLst/>
+          </a:prstGeom>
+          <a:noFill/>
+          <a:ln/>
+        </p:spPr>
+        <p:txBody>
+          <a:bodyPr wrap="square" lIns="0" tIns="0" rIns="0" bIns="0" rtlCol="0" anchor="t"/>
+          <a:lstStyle/>
+          <a:p>
+            <a:pPr indent="0" marL="0">
+              <a:lnSpc>
+                <a:spcPct val="110000"/>
+              </a:lnSpc>
+              <a:buNone/>
+            </a:pPr>
+            <a:r>
+              <a:rPr lang="en-US" sz="2600" dirty="0">
+                <a:solidFill>
+                  <a:srgbClr val="0C0A09"/>
+                </a:solidFill>
+                <a:latin typeface="Nanum Myeongjo" pitchFamily="34" charset="0"/>
+                <a:ea typeface="Nanum Myeongjo" pitchFamily="34" charset="-122"/>
+                <a:cs typeface="Nanum Myeongjo" pitchFamily="34" charset="-120"/>
+              </a:rPr>
+              <a:t>Revenue bridge · </a:t>
+            </a:r>
+            <a:pPr indent="0" marL="0">
+              <a:lnSpc>
+                <a:spcPct val="110000"/>
+              </a:lnSpc>
+              <a:buNone/>
+            </a:pPr>
+            <a:r>
+              <a:rPr lang="en-US" sz="2600" i="1" dirty="0">
+                <a:solidFill>
+                  <a:srgbClr val="6330F5"/>
+                </a:solidFill>
+                <a:latin typeface="Nanum Myeongjo" pitchFamily="34" charset="0"/>
+                <a:ea typeface="Nanum Myeongjo" pitchFamily="34" charset="-122"/>
+                <a:cs typeface="Nanum Myeongjo" pitchFamily="34" charset="-120"/>
+              </a:rPr>
+              <a:t>period over period.</a:t>
+            </a:r>
+            <a:endParaRPr lang="en-US" sz="2600" dirty="0"/>
+          </a:p>
+        </p:txBody>
+      </p:sp>
+      <p:graphicFrame>
+        <p:nvGraphicFramePr>
+          <p:cNvPr id="5" name="Chart 0" descr=""/>
+          <p:cNvGraphicFramePr/>
+          <p:nvPr/>
+        </p:nvGraphicFramePr>
+        <p:xfrm>
+          <a:off x="502920" y="1234440"/>
+          <a:ext cx="8138160" cy="3566160"/>
+        </p:xfrm>
+        <a:graphic xmlns:a="http://schemas.openxmlformats.org/drawingml/2006/main">
+          <a:graphicData uri="http://schemas.openxmlformats.org/drawingml/2006/chart">
+            <c:chart xmlns:c="http://schemas.openxmlformats.org/drawingml/2006/chart" r:id="rId1"/>
+          </a:graphicData>
+        </a:graphic>
+      </p:graphicFrame>
+    </p:spTree>
+  </p:cSld>
+  <p:clrMapOvr>
+    <a:masterClrMapping/>
+  </p:clrMapOvr>
+</p:sld>
+</file>
+
+<file path=ppt/slides/slide18.xml><?xml version="1.0" encoding="utf-8"?>
+<p:sld xmlns:a="http://schemas.openxmlformats.org/drawingml/2006/main" xmlns:r="http://schemas.openxmlformats.org/officeDocument/2006/relationships" xmlns:p="http://schemas.openxmlformats.org/presentationml/2006/main">
+  <p:cSld name="Slide 18">
+    <p:bg>
+      <p:bgPr>
+        <a:solidFill>
+          <a:srgbClr val="F5F0EC"/>
+        </a:solidFill>
+      </p:bgPr>
+    </p:bg>
+    <p:spTree>
+      <p:nvGrpSpPr>
+        <p:cNvPr id="1" name=""/>
+        <p:cNvGrpSpPr/>
+        <p:nvPr/>
+      </p:nvGrpSpPr>
+      <p:grpSpPr>
+        <a:xfrm>
+          <a:off x="0" y="0"/>
+          <a:ext cx="0" cy="0"/>
+          <a:chOff x="0" y="0"/>
+          <a:chExt cx="0" cy="0"/>
+        </a:xfrm>
+      </p:grpSpPr>
+      <p:sp>
+        <p:nvSpPr>
+          <p:cNvPr id="2" name="Text 0"/>
+          <p:cNvSpPr/>
+          <p:nvPr/>
+        </p:nvSpPr>
+        <p:spPr>
+          <a:xfrm>
+            <a:off x="502920" y="274320"/>
+            <a:ext cx="4572000" cy="164592"/>
+          </a:xfrm>
+          <a:prstGeom prst="rect">
+            <a:avLst/>
+          </a:prstGeom>
+          <a:noFill/>
+          <a:ln/>
+        </p:spPr>
+        <p:txBody>
+          <a:bodyPr wrap="square" lIns="0" tIns="0" rIns="0" bIns="0" rtlCol="0" anchor="ctr"/>
+          <a:lstStyle/>
+          <a:p>
+            <a:pPr indent="0" marL="0">
+              <a:buNone/>
+            </a:pPr>
+            <a:r>
+              <a:rPr lang="en-US" sz="850" spc="150" kern="0" dirty="0">
+                <a:solidFill>
+                  <a:srgbClr val="78716C"/>
+                </a:solidFill>
+                <a:latin typeface="JetBrains Mono" pitchFamily="34" charset="0"/>
+                <a:ea typeface="JetBrains Mono" pitchFamily="34" charset="-122"/>
+                <a:cs typeface="JetBrains Mono" pitchFamily="34" charset="-120"/>
+              </a:rPr>
+              <a:t>DATA</a:t>
+            </a:r>
+            <a:endParaRPr lang="en-US" sz="850" dirty="0"/>
+          </a:p>
+        </p:txBody>
+      </p:sp>
+      <p:sp>
+        <p:nvSpPr>
+          <p:cNvPr id="3" name="Shape 1"/>
+          <p:cNvSpPr/>
+          <p:nvPr/>
+        </p:nvSpPr>
+        <p:spPr>
+          <a:xfrm>
+            <a:off x="502920" y="475488"/>
+            <a:ext cx="914400" cy="4572"/>
+          </a:xfrm>
+          <a:prstGeom prst="rect">
+            <a:avLst/>
+          </a:prstGeom>
+          <a:solidFill>
+            <a:srgbClr val="6330F5"/>
+          </a:solidFill>
+          <a:ln w="12700">
+            <a:solidFill>
+              <a:srgbClr val="6330F5"/>
+            </a:solidFill>
+            <a:prstDash val="solid"/>
+          </a:ln>
+        </p:spPr>
+      </p:sp>
+      <p:sp>
+        <p:nvSpPr>
+          <p:cNvPr id="4" name="Text 2"/>
+          <p:cNvSpPr/>
+          <p:nvPr/>
+        </p:nvSpPr>
+        <p:spPr>
+          <a:xfrm>
+            <a:off x="502920" y="566928"/>
+            <a:ext cx="7772400" cy="548640"/>
+          </a:xfrm>
+          <a:prstGeom prst="rect">
+            <a:avLst/>
+          </a:prstGeom>
+          <a:noFill/>
+          <a:ln/>
+        </p:spPr>
+        <p:txBody>
+          <a:bodyPr wrap="square" lIns="0" tIns="0" rIns="0" bIns="0" rtlCol="0" anchor="t"/>
+          <a:lstStyle/>
+          <a:p>
+            <a:pPr indent="0" marL="0">
+              <a:lnSpc>
+                <a:spcPct val="110000"/>
+              </a:lnSpc>
+              <a:buNone/>
+            </a:pPr>
+            <a:r>
+              <a:rPr lang="en-US" sz="2600" dirty="0">
+                <a:solidFill>
+                  <a:srgbClr val="0C0A09"/>
+                </a:solidFill>
+                <a:latin typeface="Nanum Myeongjo" pitchFamily="34" charset="0"/>
+                <a:ea typeface="Nanum Myeongjo" pitchFamily="34" charset="-122"/>
+                <a:cs typeface="Nanum Myeongjo" pitchFamily="34" charset="-120"/>
+              </a:rPr>
+              <a:t>Portfolio </a:t>
+            </a:r>
+            <a:pPr indent="0" marL="0">
+              <a:lnSpc>
+                <a:spcPct val="110000"/>
+              </a:lnSpc>
+              <a:buNone/>
+            </a:pPr>
+            <a:r>
+              <a:rPr lang="en-US" sz="2600" i="1" dirty="0">
+                <a:solidFill>
+                  <a:srgbClr val="6330F5"/>
+                </a:solidFill>
+                <a:latin typeface="Nanum Myeongjo" pitchFamily="34" charset="0"/>
+                <a:ea typeface="Nanum Myeongjo" pitchFamily="34" charset="-122"/>
+                <a:cs typeface="Nanum Myeongjo" pitchFamily="34" charset="-120"/>
+              </a:rPr>
+              <a:t>breakdown.</a:t>
+            </a:r>
+            <a:endParaRPr lang="en-US" sz="2600" dirty="0"/>
+          </a:p>
+        </p:txBody>
+      </p:sp>
+      <p:graphicFrame>
+        <p:nvGraphicFramePr>
+          <p:cNvPr id="5" name="Chart 0" descr=""/>
+          <p:cNvGraphicFramePr/>
+          <p:nvPr/>
+        </p:nvGraphicFramePr>
+        <p:xfrm>
+          <a:off x="1828800" y="1097280"/>
+          <a:ext cx="5486400" cy="3749040"/>
+        </p:xfrm>
+        <a:graphic xmlns:a="http://schemas.openxmlformats.org/drawingml/2006/main">
+          <a:graphicData uri="http://schemas.openxmlformats.org/drawingml/2006/chart">
+            <c:chart xmlns:c="http://schemas.openxmlformats.org/drawingml/2006/chart" r:id="rId1"/>
+          </a:graphicData>
+        </a:graphic>
+      </p:graphicFrame>
+    </p:spTree>
+  </p:cSld>
+  <p:clrMapOvr>
+    <a:masterClrMapping/>
+  </p:clrMapOvr>
+</p:sld>
+</file>
+
+<file path=ppt/slides/slide19.xml><?xml version="1.0" encoding="utf-8"?>
+<p:sld xmlns:a="http://schemas.openxmlformats.org/drawingml/2006/main" xmlns:r="http://schemas.openxmlformats.org/officeDocument/2006/relationships" xmlns:p="http://schemas.openxmlformats.org/presentationml/2006/main">
+  <p:cSld name="Slide 19">
+    <p:bg>
+      <p:bgPr>
+        <a:solidFill>
+          <a:srgbClr val="F5F0EC"/>
+        </a:solidFill>
+      </p:bgPr>
+    </p:bg>
+    <p:spTree>
+      <p:nvGrpSpPr>
+        <p:cNvPr id="1" name=""/>
+        <p:cNvGrpSpPr/>
+        <p:nvPr/>
+      </p:nvGrpSpPr>
+      <p:grpSpPr>
+        <a:xfrm>
+          <a:off x="0" y="0"/>
+          <a:ext cx="0" cy="0"/>
+          <a:chOff x="0" y="0"/>
+          <a:chExt cx="0" cy="0"/>
+        </a:xfrm>
+      </p:grpSpPr>
+      <p:sp>
+        <p:nvSpPr>
+          <p:cNvPr id="2" name="Text 0"/>
+          <p:cNvSpPr/>
+          <p:nvPr/>
+        </p:nvSpPr>
+        <p:spPr>
+          <a:xfrm>
+            <a:off x="502920" y="274320"/>
+            <a:ext cx="4572000" cy="164592"/>
+          </a:xfrm>
+          <a:prstGeom prst="rect">
+            <a:avLst/>
+          </a:prstGeom>
+          <a:noFill/>
+          <a:ln/>
+        </p:spPr>
+        <p:txBody>
+          <a:bodyPr wrap="square" lIns="0" tIns="0" rIns="0" bIns="0" rtlCol="0" anchor="ctr"/>
+          <a:lstStyle/>
+          <a:p>
+            <a:pPr indent="0" marL="0">
+              <a:buNone/>
+            </a:pPr>
+            <a:r>
+              <a:rPr lang="en-US" sz="850" spc="150" kern="0" dirty="0">
+                <a:solidFill>
+                  <a:srgbClr val="78716C"/>
+                </a:solidFill>
+                <a:latin typeface="JetBrains Mono" pitchFamily="34" charset="0"/>
+                <a:ea typeface="JetBrains Mono" pitchFamily="34" charset="-122"/>
+                <a:cs typeface="JetBrains Mono" pitchFamily="34" charset="-120"/>
+              </a:rPr>
+              <a:t>DATA</a:t>
+            </a:r>
+            <a:endParaRPr lang="en-US" sz="850" dirty="0"/>
+          </a:p>
+        </p:txBody>
+      </p:sp>
+      <p:sp>
+        <p:nvSpPr>
+          <p:cNvPr id="3" name="Shape 1"/>
+          <p:cNvSpPr/>
+          <p:nvPr/>
+        </p:nvSpPr>
+        <p:spPr>
+          <a:xfrm>
+            <a:off x="502920" y="475488"/>
+            <a:ext cx="914400" cy="4572"/>
+          </a:xfrm>
+          <a:prstGeom prst="rect">
+            <a:avLst/>
+          </a:prstGeom>
+          <a:solidFill>
+            <a:srgbClr val="6330F5"/>
+          </a:solidFill>
+          <a:ln w="12700">
+            <a:solidFill>
+              <a:srgbClr val="6330F5"/>
+            </a:solidFill>
+            <a:prstDash val="solid"/>
+          </a:ln>
+        </p:spPr>
+      </p:sp>
+      <p:sp>
+        <p:nvSpPr>
+          <p:cNvPr id="4" name="Text 2"/>
+          <p:cNvSpPr/>
+          <p:nvPr/>
+        </p:nvSpPr>
+        <p:spPr>
+          <a:xfrm>
+            <a:off x="502920" y="566928"/>
+            <a:ext cx="7772400" cy="548640"/>
+          </a:xfrm>
+          <a:prstGeom prst="rect">
+            <a:avLst/>
+          </a:prstGeom>
+          <a:noFill/>
+          <a:ln/>
+        </p:spPr>
+        <p:txBody>
+          <a:bodyPr wrap="square" lIns="0" tIns="0" rIns="0" bIns="0" rtlCol="0" anchor="t"/>
+          <a:lstStyle/>
+          <a:p>
+            <a:pPr indent="0" marL="0">
+              <a:lnSpc>
+                <a:spcPct val="110000"/>
+              </a:lnSpc>
+              <a:buNone/>
+            </a:pPr>
+            <a:r>
+              <a:rPr lang="en-US" sz="2600" dirty="0">
+                <a:solidFill>
+                  <a:srgbClr val="0C0A09"/>
+                </a:solidFill>
+                <a:latin typeface="Nanum Myeongjo" pitchFamily="34" charset="0"/>
+                <a:ea typeface="Nanum Myeongjo" pitchFamily="34" charset="-122"/>
+                <a:cs typeface="Nanum Myeongjo" pitchFamily="34" charset="-120"/>
+              </a:rPr>
+              <a:t>Performance </a:t>
+            </a:r>
+            <a:pPr indent="0" marL="0">
+              <a:lnSpc>
+                <a:spcPct val="110000"/>
+              </a:lnSpc>
+              <a:buNone/>
+            </a:pPr>
+            <a:r>
+              <a:rPr lang="en-US" sz="2600" i="1" dirty="0">
+                <a:solidFill>
+                  <a:srgbClr val="6330F5"/>
+                </a:solidFill>
+                <a:latin typeface="Nanum Myeongjo" pitchFamily="34" charset="0"/>
+                <a:ea typeface="Nanum Myeongjo" pitchFamily="34" charset="-122"/>
+                <a:cs typeface="Nanum Myeongjo" pitchFamily="34" charset="-120"/>
+              </a:rPr>
+              <a:t>by category.</a:t>
+            </a:r>
+            <a:endParaRPr lang="en-US" sz="2600" dirty="0"/>
+          </a:p>
+        </p:txBody>
+      </p:sp>
+      <p:sp>
+        <p:nvSpPr>
+          <p:cNvPr id="5" name="Shape 3"/>
+          <p:cNvSpPr/>
+          <p:nvPr/>
+        </p:nvSpPr>
+        <p:spPr>
+          <a:xfrm>
+            <a:off x="4567428" y="1234440"/>
+            <a:ext cx="9144" cy="3566160"/>
+          </a:xfrm>
+          <a:prstGeom prst="rect">
+            <a:avLst/>
+          </a:prstGeom>
+          <a:solidFill>
+            <a:srgbClr val="E7E5E4"/>
+          </a:solidFill>
+          <a:ln w="12700">
+            <a:solidFill>
+              <a:srgbClr val="E7E5E4"/>
+            </a:solidFill>
+            <a:prstDash val="solid"/>
+          </a:ln>
+        </p:spPr>
+      </p:sp>
+      <p:sp>
+        <p:nvSpPr>
+          <p:cNvPr id="6" name="Text 4"/>
+          <p:cNvSpPr/>
+          <p:nvPr/>
+        </p:nvSpPr>
+        <p:spPr>
+          <a:xfrm>
+            <a:off x="502920" y="1234440"/>
+            <a:ext cx="3840480" cy="228600"/>
+          </a:xfrm>
+          <a:prstGeom prst="rect">
+            <a:avLst/>
+          </a:prstGeom>
+          <a:noFill/>
+          <a:ln/>
+        </p:spPr>
+        <p:txBody>
+          <a:bodyPr wrap="square" lIns="0" tIns="0" rIns="0" bIns="0" rtlCol="0" anchor="ctr"/>
+          <a:lstStyle/>
+          <a:p>
+            <a:pPr indent="0" marL="0">
+              <a:buNone/>
+            </a:pPr>
+            <a:r>
+              <a:rPr lang="en-US" sz="850" spc="120" kern="0" dirty="0">
+                <a:solidFill>
+                  <a:srgbClr val="78716C"/>
+                </a:solidFill>
+                <a:latin typeface="JetBrains Mono" pitchFamily="34" charset="0"/>
+                <a:ea typeface="JetBrains Mono" pitchFamily="34" charset="-122"/>
+                <a:cs typeface="JetBrains Mono" pitchFamily="34" charset="-120"/>
+              </a:rPr>
+              <a:t>CLUSTERED BAR CHART</a:t>
+            </a:r>
+            <a:endParaRPr lang="en-US" sz="850" dirty="0"/>
+          </a:p>
+        </p:txBody>
+      </p:sp>
+      <p:sp>
+        <p:nvSpPr>
+          <p:cNvPr id="7" name="Shape 5"/>
+          <p:cNvSpPr/>
+          <p:nvPr/>
+        </p:nvSpPr>
+        <p:spPr>
+          <a:xfrm>
+            <a:off x="502920" y="1472184"/>
+            <a:ext cx="3840480" cy="4572"/>
+          </a:xfrm>
+          <a:prstGeom prst="rect">
+            <a:avLst/>
+          </a:prstGeom>
+          <a:solidFill>
+            <a:srgbClr val="E7E5E4"/>
+          </a:solidFill>
+          <a:ln w="12700">
+            <a:solidFill>
+              <a:srgbClr val="E7E5E4"/>
+            </a:solidFill>
+            <a:prstDash val="solid"/>
+          </a:ln>
+        </p:spPr>
+      </p:sp>
+      <p:sp>
+        <p:nvSpPr>
+          <p:cNvPr id="8" name="Text 6"/>
+          <p:cNvSpPr/>
+          <p:nvPr/>
+        </p:nvSpPr>
+        <p:spPr>
+          <a:xfrm>
+            <a:off x="4800600" y="1234440"/>
+            <a:ext cx="4114800" cy="228600"/>
+          </a:xfrm>
+          <a:prstGeom prst="rect">
+            <a:avLst/>
+          </a:prstGeom>
+          <a:noFill/>
+          <a:ln/>
+        </p:spPr>
+        <p:txBody>
+          <a:bodyPr wrap="square" lIns="0" tIns="0" rIns="0" bIns="0" rtlCol="0" anchor="ctr"/>
+          <a:lstStyle/>
+          <a:p>
+            <a:pPr indent="0" marL="0">
+              <a:buNone/>
+            </a:pPr>
+            <a:r>
+              <a:rPr lang="en-US" sz="850" spc="120" kern="0" dirty="0">
+                <a:solidFill>
+                  <a:srgbClr val="78716C"/>
+                </a:solidFill>
+                <a:latin typeface="JetBrains Mono" pitchFamily="34" charset="0"/>
+                <a:ea typeface="JetBrains Mono" pitchFamily="34" charset="-122"/>
+                <a:cs typeface="JetBrains Mono" pitchFamily="34" charset="-120"/>
+              </a:rPr>
+              <a:t>STACKED BAR CHART</a:t>
+            </a:r>
+            <a:endParaRPr lang="en-US" sz="850" dirty="0"/>
+          </a:p>
+        </p:txBody>
+      </p:sp>
+      <p:sp>
+        <p:nvSpPr>
+          <p:cNvPr id="9" name="Shape 7"/>
+          <p:cNvSpPr/>
+          <p:nvPr/>
+        </p:nvSpPr>
+        <p:spPr>
+          <a:xfrm>
+            <a:off x="4800600" y="1472184"/>
+            <a:ext cx="4114800" cy="4572"/>
+          </a:xfrm>
+          <a:prstGeom prst="rect">
+            <a:avLst/>
+          </a:prstGeom>
+          <a:solidFill>
+            <a:srgbClr val="E7E5E4"/>
+          </a:solidFill>
+          <a:ln w="12700">
+            <a:solidFill>
+              <a:srgbClr val="E7E5E4"/>
+            </a:solidFill>
+            <a:prstDash val="solid"/>
+          </a:ln>
+        </p:spPr>
+      </p:sp>
+      <p:graphicFrame>
+        <p:nvGraphicFramePr>
+          <p:cNvPr id="10" name="Chart 0" descr=""/>
+          <p:cNvGraphicFramePr/>
+          <p:nvPr/>
+        </p:nvGraphicFramePr>
+        <p:xfrm>
+          <a:off x="502920" y="1554480"/>
+          <a:ext cx="3931920" cy="3246120"/>
+        </p:xfrm>
+        <a:graphic xmlns:a="http://schemas.openxmlformats.org/drawingml/2006/main">
+          <a:graphicData uri="http://schemas.openxmlformats.org/drawingml/2006/chart">
+            <c:chart xmlns:c="http://schemas.openxmlformats.org/drawingml/2006/chart" r:id="rId1"/>
+          </a:graphicData>
+        </a:graphic>
+      </p:graphicFrame>
+      <p:graphicFrame>
+        <p:nvGraphicFramePr>
+          <p:cNvPr id="11" name="Chart 1" descr=""/>
+          <p:cNvGraphicFramePr/>
+          <p:nvPr/>
+        </p:nvGraphicFramePr>
+        <p:xfrm>
+          <a:off x="4754880" y="1554480"/>
+          <a:ext cx="4160520" cy="3246120"/>
+        </p:xfrm>
+        <a:graphic xmlns:a="http://schemas.openxmlformats.org/drawingml/2006/main">
+          <a:graphicData uri="http://schemas.openxmlformats.org/drawingml/2006/chart">
+            <c:chart xmlns:c="http://schemas.openxmlformats.org/drawingml/2006/chart" r:id="rId2"/>
+          </a:graphicData>
+        </a:graphic>
+      </p:graphicFrame>
     </p:spTree>
   </p:cSld>
   <p:clrMapOvr>
@@ -5983,20 +13090,14 @@
       </p:sp>
       <p:pic>
         <p:nvPicPr>
-          <p:cNvPr id="3" name="Image 0" descr="/sessions/sleepy-youthful-albattani/mnt/brand-system/assets/logos/wordmark-black.svg">    </p:cNvPr>
+          <p:cNvPr id="3" name="Image 0" descr="/sessions/sleepy-youthful-albattani/mnt/brand-system/assets/logos/wordmark-black.png">    </p:cNvPr>
           <p:cNvPicPr>
             <a:picLocks noChangeAspect="1"/>
           </p:cNvPicPr>
           <p:nvPr/>
         </p:nvPicPr>
         <p:blipFill>
-          <a:blip r:embed="rId1">
-            <a:extLst>
-              <a:ext uri="{96DAC541-7B7A-43D3-8B79-37D633B846F1}">
-                <asvg:svgBlip xmlns:asvg="http://schemas.microsoft.com/office/drawing/2016/SVG/main" r:embed="rId2"/>
-              </a:ext>
-            </a:extLst>
-          </a:blip>
+          <a:blip r:embed="rId1"/>
           <a:stretch>
             <a:fillRect/>
           </a:stretch>
@@ -6059,7 +13160,7 @@
         <p:spPr>
           <a:xfrm>
             <a:off x="502920" y="1618488"/>
-            <a:ext cx="914400" cy="10973"/>
+            <a:ext cx="914400" cy="4572"/>
           </a:xfrm>
           <a:prstGeom prst="rect">
             <a:avLst/>
@@ -6356,7 +13457,7 @@
         <p:spPr>
           <a:xfrm>
             <a:off x="502920" y="1847088"/>
-            <a:ext cx="914400" cy="10973"/>
+            <a:ext cx="914400" cy="4572"/>
           </a:xfrm>
           <a:prstGeom prst="rect">
             <a:avLst/>
@@ -6680,7 +13781,7 @@
         <p:spPr>
           <a:xfrm>
             <a:off x="502920" y="704088"/>
-            <a:ext cx="914400" cy="10973"/>
+            <a:ext cx="914400" cy="4572"/>
           </a:xfrm>
           <a:prstGeom prst="rect">
             <a:avLst/>
@@ -7044,7 +14145,7 @@
         <p:spPr>
           <a:xfrm>
             <a:off x="4754880" y="704088"/>
-            <a:ext cx="914400" cy="10973"/>
+            <a:ext cx="914400" cy="4572"/>
           </a:xfrm>
           <a:prstGeom prst="rect">
             <a:avLst/>
@@ -7280,7 +14381,7 @@
         <p:spPr>
           <a:xfrm>
             <a:off x="502920" y="585216"/>
-            <a:ext cx="914400" cy="10973"/>
+            <a:ext cx="914400" cy="4572"/>
           </a:xfrm>
           <a:prstGeom prst="rect">
             <a:avLst/>
@@ -7569,7 +14670,7 @@
         <p:spPr>
           <a:xfrm>
             <a:off x="502920" y="658368"/>
-            <a:ext cx="914400" cy="10973"/>
+            <a:ext cx="914400" cy="4572"/>
           </a:xfrm>
           <a:prstGeom prst="rect">
             <a:avLst/>
@@ -7671,32 +14772,7 @@
       </p:sp>
       <p:sp>
         <p:nvSpPr>
-          <p:cNvPr id="6" name="Shape 4"/>
-          <p:cNvSpPr/>
-          <p:nvPr/>
-        </p:nvSpPr>
-        <p:spPr>
-          <a:xfrm>
-            <a:off x="502920" y="2103120"/>
-            <a:ext cx="2578608" cy="22860"/>
-          </a:xfrm>
-          <a:prstGeom prst="rect">
-            <a:avLst/>
-          </a:prstGeom>
-          <a:solidFill>
-            <a:srgbClr val="9886FF"/>
-          </a:solidFill>
-          <a:ln w="12700">
-            <a:solidFill>
-              <a:srgbClr val="9886FF"/>
-            </a:solidFill>
-            <a:prstDash val="solid"/>
-          </a:ln>
-        </p:spPr>
-      </p:sp>
-      <p:sp>
-        <p:nvSpPr>
-          <p:cNvPr id="7" name="Text 5"/>
+          <p:cNvPr id="6" name="Text 4"/>
           <p:cNvSpPr/>
           <p:nvPr/>
         </p:nvSpPr>
@@ -7723,9 +14799,9 @@
                 <a:solidFill>
                   <a:srgbClr val="FAFAF9"/>
                 </a:solidFill>
-                <a:latin typeface="Nanum Myeongjo" pitchFamily="34" charset="0"/>
-                <a:ea typeface="Nanum Myeongjo" pitchFamily="34" charset="-122"/>
-                <a:cs typeface="Nanum Myeongjo" pitchFamily="34" charset="-120"/>
+                <a:latin typeface="JetBrains Mono" pitchFamily="34" charset="0"/>
+                <a:ea typeface="JetBrains Mono" pitchFamily="34" charset="-122"/>
+                <a:cs typeface="JetBrains Mono" pitchFamily="34" charset="-120"/>
               </a:rPr>
               <a:t>24K+</a:t>
             </a:r>
@@ -7735,7 +14811,7 @@
       </p:sp>
       <p:sp>
         <p:nvSpPr>
-          <p:cNvPr id="8" name="Text 6"/>
+          <p:cNvPr id="7" name="Text 5"/>
           <p:cNvSpPr/>
           <p:nvPr/>
         </p:nvSpPr>
@@ -7758,7 +14834,7 @@
               <a:buNone/>
             </a:pPr>
             <a:r>
-              <a:rPr lang="en-US" sz="1350" b="1" dirty="0">
+              <a:rPr lang="en-US" sz="1350" dirty="0">
                 <a:solidFill>
                   <a:srgbClr val="FAFAF9"/>
                 </a:solidFill>
@@ -7774,7 +14850,7 @@
       </p:sp>
       <p:sp>
         <p:nvSpPr>
-          <p:cNvPr id="9" name="Text 7"/>
+          <p:cNvPr id="8" name="Text 6"/>
           <p:cNvSpPr/>
           <p:nvPr/>
         </p:nvSpPr>
@@ -7813,7 +14889,7 @@
       </p:sp>
       <p:sp>
         <p:nvSpPr>
-          <p:cNvPr id="10" name="Shape 8"/>
+          <p:cNvPr id="9" name="Shape 7"/>
           <p:cNvSpPr/>
           <p:nvPr/>
         </p:nvSpPr>
@@ -7838,32 +14914,7 @@
       </p:sp>
       <p:sp>
         <p:nvSpPr>
-          <p:cNvPr id="11" name="Shape 9"/>
-          <p:cNvSpPr/>
-          <p:nvPr/>
-        </p:nvSpPr>
-        <p:spPr>
-          <a:xfrm>
-            <a:off x="3374136" y="2103120"/>
-            <a:ext cx="2578608" cy="22860"/>
-          </a:xfrm>
-          <a:prstGeom prst="rect">
-            <a:avLst/>
-          </a:prstGeom>
-          <a:solidFill>
-            <a:srgbClr val="9886FF"/>
-          </a:solidFill>
-          <a:ln w="12700">
-            <a:solidFill>
-              <a:srgbClr val="9886FF"/>
-            </a:solidFill>
-            <a:prstDash val="solid"/>
-          </a:ln>
-        </p:spPr>
-      </p:sp>
-      <p:sp>
-        <p:nvSpPr>
-          <p:cNvPr id="12" name="Text 10"/>
+          <p:cNvPr id="10" name="Text 8"/>
           <p:cNvSpPr/>
           <p:nvPr/>
         </p:nvSpPr>
@@ -7890,9 +14941,9 @@
                 <a:solidFill>
                   <a:srgbClr val="FAFAF9"/>
                 </a:solidFill>
-                <a:latin typeface="Nanum Myeongjo" pitchFamily="34" charset="0"/>
-                <a:ea typeface="Nanum Myeongjo" pitchFamily="34" charset="-122"/>
-                <a:cs typeface="Nanum Myeongjo" pitchFamily="34" charset="-120"/>
+                <a:latin typeface="JetBrains Mono" pitchFamily="34" charset="0"/>
+                <a:ea typeface="JetBrains Mono" pitchFamily="34" charset="-122"/>
+                <a:cs typeface="JetBrains Mono" pitchFamily="34" charset="-120"/>
               </a:rPr>
               <a:t>$2.8B</a:t>
             </a:r>
@@ -7902,7 +14953,7 @@
       </p:sp>
       <p:sp>
         <p:nvSpPr>
-          <p:cNvPr id="13" name="Text 11"/>
+          <p:cNvPr id="11" name="Text 9"/>
           <p:cNvSpPr/>
           <p:nvPr/>
         </p:nvSpPr>
@@ -7925,7 +14976,7 @@
               <a:buNone/>
             </a:pPr>
             <a:r>
-              <a:rPr lang="en-US" sz="1350" b="1" dirty="0">
+              <a:rPr lang="en-US" sz="1350" dirty="0">
                 <a:solidFill>
                   <a:srgbClr val="FAFAF9"/>
                 </a:solidFill>
@@ -7941,7 +14992,7 @@
       </p:sp>
       <p:sp>
         <p:nvSpPr>
-          <p:cNvPr id="14" name="Text 12"/>
+          <p:cNvPr id="12" name="Text 10"/>
           <p:cNvSpPr/>
           <p:nvPr/>
         </p:nvSpPr>
@@ -7980,7 +15031,7 @@
       </p:sp>
       <p:sp>
         <p:nvSpPr>
-          <p:cNvPr id="15" name="Shape 13"/>
+          <p:cNvPr id="13" name="Shape 11"/>
           <p:cNvSpPr/>
           <p:nvPr/>
         </p:nvSpPr>
@@ -8005,32 +15056,7 @@
       </p:sp>
       <p:sp>
         <p:nvSpPr>
-          <p:cNvPr id="16" name="Shape 14"/>
-          <p:cNvSpPr/>
-          <p:nvPr/>
-        </p:nvSpPr>
-        <p:spPr>
-          <a:xfrm>
-            <a:off x="6245352" y="2103120"/>
-            <a:ext cx="2578608" cy="22860"/>
-          </a:xfrm>
-          <a:prstGeom prst="rect">
-            <a:avLst/>
-          </a:prstGeom>
-          <a:solidFill>
-            <a:srgbClr val="9886FF"/>
-          </a:solidFill>
-          <a:ln w="12700">
-            <a:solidFill>
-              <a:srgbClr val="9886FF"/>
-            </a:solidFill>
-            <a:prstDash val="solid"/>
-          </a:ln>
-        </p:spPr>
-      </p:sp>
-      <p:sp>
-        <p:nvSpPr>
-          <p:cNvPr id="17" name="Text 15"/>
+          <p:cNvPr id="14" name="Text 12"/>
           <p:cNvSpPr/>
           <p:nvPr/>
         </p:nvSpPr>
@@ -8057,9 +15083,9 @@
                 <a:solidFill>
                   <a:srgbClr val="FAFAF9"/>
                 </a:solidFill>
-                <a:latin typeface="Nanum Myeongjo" pitchFamily="34" charset="0"/>
-                <a:ea typeface="Nanum Myeongjo" pitchFamily="34" charset="-122"/>
-                <a:cs typeface="Nanum Myeongjo" pitchFamily="34" charset="-120"/>
+                <a:latin typeface="JetBrains Mono" pitchFamily="34" charset="0"/>
+                <a:ea typeface="JetBrains Mono" pitchFamily="34" charset="-122"/>
+                <a:cs typeface="JetBrains Mono" pitchFamily="34" charset="-120"/>
               </a:rPr>
               <a:t>180+</a:t>
             </a:r>
@@ -8069,7 +15095,7 @@
       </p:sp>
       <p:sp>
         <p:nvSpPr>
-          <p:cNvPr id="18" name="Text 16"/>
+          <p:cNvPr id="15" name="Text 13"/>
           <p:cNvSpPr/>
           <p:nvPr/>
         </p:nvSpPr>
@@ -8092,7 +15118,7 @@
               <a:buNone/>
             </a:pPr>
             <a:r>
-              <a:rPr lang="en-US" sz="1350" b="1" dirty="0">
+              <a:rPr lang="en-US" sz="1350" dirty="0">
                 <a:solidFill>
                   <a:srgbClr val="FAFAF9"/>
                 </a:solidFill>
@@ -8108,7 +15134,7 @@
       </p:sp>
       <p:sp>
         <p:nvSpPr>
-          <p:cNvPr id="19" name="Text 17"/>
+          <p:cNvPr id="16" name="Text 14"/>
           <p:cNvSpPr/>
           <p:nvPr/>
         </p:nvSpPr>
@@ -8225,7 +15251,7 @@
         <p:spPr>
           <a:xfrm>
             <a:off x="502920" y="585216"/>
-            <a:ext cx="914400" cy="10973"/>
+            <a:ext cx="914400" cy="4572"/>
           </a:xfrm>
           <a:prstGeom prst="rect">
             <a:avLst/>
@@ -8380,7 +15406,7 @@
         <p:spPr>
           <a:xfrm>
             <a:off x="777240" y="2139696"/>
-            <a:ext cx="301752" cy="9144"/>
+            <a:ext cx="301752" cy="4572"/>
           </a:xfrm>
           <a:prstGeom prst="rect">
             <a:avLst/>
@@ -8560,7 +15586,7 @@
         <p:spPr>
           <a:xfrm>
             <a:off x="3575304" y="2139696"/>
-            <a:ext cx="301752" cy="9144"/>
+            <a:ext cx="301752" cy="4572"/>
           </a:xfrm>
           <a:prstGeom prst="rect">
             <a:avLst/>
@@ -8740,7 +15766,7 @@
         <p:spPr>
           <a:xfrm>
             <a:off x="6373368" y="2139696"/>
-            <a:ext cx="301752" cy="9144"/>
+            <a:ext cx="301752" cy="4572"/>
           </a:xfrm>
           <a:prstGeom prst="rect">
             <a:avLst/>
